--- a/draft_poster.pptx
+++ b/draft_poster.pptx
@@ -4544,727 +4544,380 @@
           </a:graphicData>
         </a:graphic>
       </p:graphicFrame>
-      <mc:AlternateContent xmlns:mc="http://schemas.openxmlformats.org/markup-compatibility/2006">
-        <mc:Choice xmlns:a14="http://schemas.microsoft.com/office/drawing/2010/main" Requires="a14">
-          <p:graphicFrame>
-            <p:nvGraphicFramePr>
-              <p:cNvPr id="27" name="object 22">
+      <p:graphicFrame>
+        <p:nvGraphicFramePr>
+          <p:cNvPr id="27" name="object 22">
+            <a:extLst>
+              <a:ext uri="{FF2B5EF4-FFF2-40B4-BE49-F238E27FC236}">
+                <a16:creationId xmlns:a16="http://schemas.microsoft.com/office/drawing/2014/main" id="{B0C8BFD8-10C8-4356-976A-75AD1B4E604C}"/>
+              </a:ext>
+            </a:extLst>
+          </p:cNvPr>
+          <p:cNvGraphicFramePr>
+            <a:graphicFrameLocks noGrp="1"/>
+          </p:cNvGraphicFramePr>
+          <p:nvPr>
+            <p:extLst>
+              <p:ext uri="{D42A27DB-BD31-4B8C-83A1-F6EECF244321}">
+                <p14:modId xmlns:p14="http://schemas.microsoft.com/office/powerpoint/2010/main" val="3273818523"/>
+              </p:ext>
+            </p:extLst>
+          </p:nvPr>
+        </p:nvGraphicFramePr>
+        <p:xfrm>
+          <a:off x="274320" y="21386972"/>
+          <a:ext cx="10149840" cy="8601810"/>
+        </p:xfrm>
+        <a:graphic>
+          <a:graphicData uri="http://schemas.openxmlformats.org/drawingml/2006/table">
+            <a:tbl>
+              <a:tblPr firstRow="1" bandRow="1"/>
+              <a:tblGrid>
+                <a:gridCol w="10149840">
+                  <a:extLst>
+                    <a:ext uri="{9D8B030D-6E8A-4147-A177-3AD203B41FA5}">
+                      <a16:colId xmlns:a16="http://schemas.microsoft.com/office/drawing/2014/main" val="20000"/>
+                    </a:ext>
+                  </a:extLst>
+                </a:gridCol>
+              </a:tblGrid>
+              <a:tr h="830335">
+                <a:tc>
+                  <a:txBody>
+                    <a:bodyPr/>
+                    <a:lstStyle>
+                      <a:lvl1pPr marL="0" algn="l" defTabSz="2139605" rtl="0" eaLnBrk="1" latinLnBrk="0" hangingPunct="1">
+                        <a:defRPr sz="4212" kern="1200">
+                          <a:solidFill>
+                            <a:schemeClr val="tx1"/>
+                          </a:solidFill>
+                          <a:latin typeface="Calibri"/>
+                        </a:defRPr>
+                      </a:lvl1pPr>
+                      <a:lvl2pPr marL="1069802" algn="l" defTabSz="2139605" rtl="0" eaLnBrk="1" latinLnBrk="0" hangingPunct="1">
+                        <a:defRPr sz="4212" kern="1200">
+                          <a:solidFill>
+                            <a:schemeClr val="tx1"/>
+                          </a:solidFill>
+                          <a:latin typeface="Calibri"/>
+                        </a:defRPr>
+                      </a:lvl2pPr>
+                      <a:lvl3pPr marL="2139605" algn="l" defTabSz="2139605" rtl="0" eaLnBrk="1" latinLnBrk="0" hangingPunct="1">
+                        <a:defRPr sz="4212" kern="1200">
+                          <a:solidFill>
+                            <a:schemeClr val="tx1"/>
+                          </a:solidFill>
+                          <a:latin typeface="Calibri"/>
+                        </a:defRPr>
+                      </a:lvl3pPr>
+                      <a:lvl4pPr marL="3209407" algn="l" defTabSz="2139605" rtl="0" eaLnBrk="1" latinLnBrk="0" hangingPunct="1">
+                        <a:defRPr sz="4212" kern="1200">
+                          <a:solidFill>
+                            <a:schemeClr val="tx1"/>
+                          </a:solidFill>
+                          <a:latin typeface="Calibri"/>
+                        </a:defRPr>
+                      </a:lvl4pPr>
+                      <a:lvl5pPr marL="4279209" algn="l" defTabSz="2139605" rtl="0" eaLnBrk="1" latinLnBrk="0" hangingPunct="1">
+                        <a:defRPr sz="4212" kern="1200">
+                          <a:solidFill>
+                            <a:schemeClr val="tx1"/>
+                          </a:solidFill>
+                          <a:latin typeface="Calibri"/>
+                        </a:defRPr>
+                      </a:lvl5pPr>
+                      <a:lvl6pPr marL="5349011" algn="l" defTabSz="2139605" rtl="0" eaLnBrk="1" latinLnBrk="0" hangingPunct="1">
+                        <a:defRPr sz="4212" kern="1200">
+                          <a:solidFill>
+                            <a:schemeClr val="tx1"/>
+                          </a:solidFill>
+                          <a:latin typeface="Calibri"/>
+                        </a:defRPr>
+                      </a:lvl6pPr>
+                      <a:lvl7pPr marL="6418814" algn="l" defTabSz="2139605" rtl="0" eaLnBrk="1" latinLnBrk="0" hangingPunct="1">
+                        <a:defRPr sz="4212" kern="1200">
+                          <a:solidFill>
+                            <a:schemeClr val="tx1"/>
+                          </a:solidFill>
+                          <a:latin typeface="Calibri"/>
+                        </a:defRPr>
+                      </a:lvl7pPr>
+                      <a:lvl8pPr marL="7488616" algn="l" defTabSz="2139605" rtl="0" eaLnBrk="1" latinLnBrk="0" hangingPunct="1">
+                        <a:defRPr sz="4212" kern="1200">
+                          <a:solidFill>
+                            <a:schemeClr val="tx1"/>
+                          </a:solidFill>
+                          <a:latin typeface="Calibri"/>
+                        </a:defRPr>
+                      </a:lvl8pPr>
+                      <a:lvl9pPr marL="8558418" algn="l" defTabSz="2139605" rtl="0" eaLnBrk="1" latinLnBrk="0" hangingPunct="1">
+                        <a:defRPr sz="4212" kern="1200">
+                          <a:solidFill>
+                            <a:schemeClr val="tx1"/>
+                          </a:solidFill>
+                          <a:latin typeface="Calibri"/>
+                        </a:defRPr>
+                      </a:lvl9pPr>
+                    </a:lstStyle>
+                    <a:p>
+                      <a:pPr marL="1905" algn="ctr">
+                        <a:lnSpc>
+                          <a:spcPct val="100000"/>
+                        </a:lnSpc>
+                        <a:spcBef>
+                          <a:spcPts val="120"/>
+                        </a:spcBef>
+                      </a:pPr>
+                      <a:r>
+                        <a:rPr lang="en-US" sz="3600" b="1" spc="-5" dirty="0">
+                          <a:solidFill>
+                            <a:srgbClr val="FFFFFF"/>
+                          </a:solidFill>
+                          <a:latin typeface="TH SarabunPSK" panose="020B0500040200020003" pitchFamily="34" charset="-34"/>
+                          <a:cs typeface="TH SarabunPSK" panose="020B0500040200020003" pitchFamily="34" charset="-34"/>
+                        </a:rPr>
+                        <a:t>Methods</a:t>
+                      </a:r>
+                      <a:endParaRPr sz="3600" dirty="0">
+                        <a:latin typeface="TH SarabunPSK" panose="020B0500040200020003" pitchFamily="34" charset="-34"/>
+                        <a:cs typeface="TH SarabunPSK" panose="020B0500040200020003" pitchFamily="34" charset="-34"/>
+                      </a:endParaRPr>
+                    </a:p>
+                  </a:txBody>
+                  <a:tcPr marL="0" marR="0" marT="15240" marB="0" anchor="ctr">
+                    <a:lnL>
+                      <a:noFill/>
+                    </a:lnL>
+                    <a:lnR>
+                      <a:noFill/>
+                    </a:lnR>
+                    <a:lnT w="3175">
+                      <a:noFill/>
+                      <a:prstDash val="solid"/>
+                    </a:lnT>
+                    <a:lnB>
+                      <a:noFill/>
+                    </a:lnB>
+                    <a:lnTlToBr w="12700" cmpd="sng">
+                      <a:noFill/>
+                      <a:prstDash val="solid"/>
+                    </a:lnTlToBr>
+                    <a:lnBlToTr w="12700" cmpd="sng">
+                      <a:noFill/>
+                      <a:prstDash val="solid"/>
+                    </a:lnBlToTr>
+                    <a:solidFill>
+                      <a:srgbClr val="0070C0"/>
+                    </a:solidFill>
+                  </a:tcPr>
+                </a:tc>
                 <a:extLst>
-                  <a:ext uri="{FF2B5EF4-FFF2-40B4-BE49-F238E27FC236}">
-                    <a16:creationId xmlns:a16="http://schemas.microsoft.com/office/drawing/2014/main" id="{B0C8BFD8-10C8-4356-976A-75AD1B4E604C}"/>
+                  <a:ext uri="{0D108BD9-81ED-4DB2-BD59-A6C34878D82A}">
+                    <a16:rowId xmlns:a16="http://schemas.microsoft.com/office/drawing/2014/main" val="10000"/>
                   </a:ext>
                 </a:extLst>
-              </p:cNvPr>
-              <p:cNvGraphicFramePr>
-                <a:graphicFrameLocks noGrp="1"/>
-              </p:cNvGraphicFramePr>
-              <p:nvPr>
-                <p:extLst>
-                  <p:ext uri="{D42A27DB-BD31-4B8C-83A1-F6EECF244321}">
-                    <p14:modId xmlns:p14="http://schemas.microsoft.com/office/powerpoint/2010/main" val="3612269496"/>
-                  </p:ext>
-                </p:extLst>
-              </p:nvPr>
-            </p:nvGraphicFramePr>
-            <p:xfrm>
-              <a:off x="274320" y="21386972"/>
-              <a:ext cx="10149840" cy="8601810"/>
-            </p:xfrm>
-            <a:graphic>
-              <a:graphicData uri="http://schemas.openxmlformats.org/drawingml/2006/table">
-                <a:tbl>
-                  <a:tblPr firstRow="1" bandRow="1"/>
-                  <a:tblGrid>
-                    <a:gridCol w="10149840">
-                      <a:extLst>
-                        <a:ext uri="{9D8B030D-6E8A-4147-A177-3AD203B41FA5}">
-                          <a16:colId xmlns:a16="http://schemas.microsoft.com/office/drawing/2014/main" val="20000"/>
-                        </a:ext>
-                      </a:extLst>
-                    </a:gridCol>
-                  </a:tblGrid>
-                  <a:tr h="830335">
-                    <a:tc>
-                      <a:txBody>
-                        <a:bodyPr/>
-                        <a:lstStyle>
-                          <a:lvl1pPr marL="0" algn="l" defTabSz="2139605" rtl="0" eaLnBrk="1" latinLnBrk="0" hangingPunct="1">
-                            <a:defRPr sz="4212" kern="1200">
-                              <a:solidFill>
-                                <a:schemeClr val="tx1"/>
-                              </a:solidFill>
-                              <a:latin typeface="Calibri"/>
-                            </a:defRPr>
-                          </a:lvl1pPr>
-                          <a:lvl2pPr marL="1069802" algn="l" defTabSz="2139605" rtl="0" eaLnBrk="1" latinLnBrk="0" hangingPunct="1">
-                            <a:defRPr sz="4212" kern="1200">
-                              <a:solidFill>
-                                <a:schemeClr val="tx1"/>
-                              </a:solidFill>
-                              <a:latin typeface="Calibri"/>
-                            </a:defRPr>
-                          </a:lvl2pPr>
-                          <a:lvl3pPr marL="2139605" algn="l" defTabSz="2139605" rtl="0" eaLnBrk="1" latinLnBrk="0" hangingPunct="1">
-                            <a:defRPr sz="4212" kern="1200">
-                              <a:solidFill>
-                                <a:schemeClr val="tx1"/>
-                              </a:solidFill>
-                              <a:latin typeface="Calibri"/>
-                            </a:defRPr>
-                          </a:lvl3pPr>
-                          <a:lvl4pPr marL="3209407" algn="l" defTabSz="2139605" rtl="0" eaLnBrk="1" latinLnBrk="0" hangingPunct="1">
-                            <a:defRPr sz="4212" kern="1200">
-                              <a:solidFill>
-                                <a:schemeClr val="tx1"/>
-                              </a:solidFill>
-                              <a:latin typeface="Calibri"/>
-                            </a:defRPr>
-                          </a:lvl4pPr>
-                          <a:lvl5pPr marL="4279209" algn="l" defTabSz="2139605" rtl="0" eaLnBrk="1" latinLnBrk="0" hangingPunct="1">
-                            <a:defRPr sz="4212" kern="1200">
-                              <a:solidFill>
-                                <a:schemeClr val="tx1"/>
-                              </a:solidFill>
-                              <a:latin typeface="Calibri"/>
-                            </a:defRPr>
-                          </a:lvl5pPr>
-                          <a:lvl6pPr marL="5349011" algn="l" defTabSz="2139605" rtl="0" eaLnBrk="1" latinLnBrk="0" hangingPunct="1">
-                            <a:defRPr sz="4212" kern="1200">
-                              <a:solidFill>
-                                <a:schemeClr val="tx1"/>
-                              </a:solidFill>
-                              <a:latin typeface="Calibri"/>
-                            </a:defRPr>
-                          </a:lvl6pPr>
-                          <a:lvl7pPr marL="6418814" algn="l" defTabSz="2139605" rtl="0" eaLnBrk="1" latinLnBrk="0" hangingPunct="1">
-                            <a:defRPr sz="4212" kern="1200">
-                              <a:solidFill>
-                                <a:schemeClr val="tx1"/>
-                              </a:solidFill>
-                              <a:latin typeface="Calibri"/>
-                            </a:defRPr>
-                          </a:lvl7pPr>
-                          <a:lvl8pPr marL="7488616" algn="l" defTabSz="2139605" rtl="0" eaLnBrk="1" latinLnBrk="0" hangingPunct="1">
-                            <a:defRPr sz="4212" kern="1200">
-                              <a:solidFill>
-                                <a:schemeClr val="tx1"/>
-                              </a:solidFill>
-                              <a:latin typeface="Calibri"/>
-                            </a:defRPr>
-                          </a:lvl8pPr>
-                          <a:lvl9pPr marL="8558418" algn="l" defTabSz="2139605" rtl="0" eaLnBrk="1" latinLnBrk="0" hangingPunct="1">
-                            <a:defRPr sz="4212" kern="1200">
-                              <a:solidFill>
-                                <a:schemeClr val="tx1"/>
-                              </a:solidFill>
-                              <a:latin typeface="Calibri"/>
-                            </a:defRPr>
-                          </a:lvl9pPr>
-                        </a:lstStyle>
-                        <a:p>
-                          <a:pPr marL="1905" algn="ctr">
-                            <a:lnSpc>
-                              <a:spcPct val="100000"/>
-                            </a:lnSpc>
-                            <a:spcBef>
-                              <a:spcPts val="120"/>
-                            </a:spcBef>
-                          </a:pPr>
-                          <a:r>
-                            <a:rPr lang="en-US" sz="3600" b="1" spc="-5" dirty="0">
-                              <a:solidFill>
-                                <a:srgbClr val="FFFFFF"/>
-                              </a:solidFill>
-                              <a:latin typeface="TH SarabunPSK" panose="020B0500040200020003" pitchFamily="34" charset="-34"/>
-                              <a:cs typeface="TH SarabunPSK" panose="020B0500040200020003" pitchFamily="34" charset="-34"/>
-                            </a:rPr>
-                            <a:t>Methods</a:t>
-                          </a:r>
-                          <a:endParaRPr sz="3600" dirty="0">
-                            <a:latin typeface="TH SarabunPSK" panose="020B0500040200020003" pitchFamily="34" charset="-34"/>
-                            <a:cs typeface="TH SarabunPSK" panose="020B0500040200020003" pitchFamily="34" charset="-34"/>
-                          </a:endParaRPr>
-                        </a:p>
-                      </a:txBody>
-                      <a:tcPr marL="0" marR="0" marT="15240" marB="0" anchor="ctr">
-                        <a:lnL>
-                          <a:noFill/>
-                        </a:lnL>
-                        <a:lnR>
-                          <a:noFill/>
-                        </a:lnR>
-                        <a:lnT w="3175">
-                          <a:noFill/>
-                          <a:prstDash val="solid"/>
-                        </a:lnT>
-                        <a:lnB>
-                          <a:noFill/>
-                        </a:lnB>
-                        <a:lnTlToBr w="12700" cmpd="sng">
-                          <a:noFill/>
-                          <a:prstDash val="solid"/>
-                        </a:lnTlToBr>
-                        <a:lnBlToTr w="12700" cmpd="sng">
-                          <a:noFill/>
-                          <a:prstDash val="solid"/>
-                        </a:lnBlToTr>
-                        <a:solidFill>
-                          <a:srgbClr val="0070C0"/>
-                        </a:solidFill>
-                      </a:tcPr>
-                    </a:tc>
-                    <a:extLst>
-                      <a:ext uri="{0D108BD9-81ED-4DB2-BD59-A6C34878D82A}">
-                        <a16:rowId xmlns:a16="http://schemas.microsoft.com/office/drawing/2014/main" val="10000"/>
-                      </a:ext>
-                    </a:extLst>
-                  </a:tr>
-                  <a:tr h="7771475">
-                    <a:tc>
-                      <a:txBody>
-                        <a:bodyPr/>
-                        <a:lstStyle>
-                          <a:lvl1pPr marL="0" algn="l" defTabSz="2139605" rtl="0" eaLnBrk="1" latinLnBrk="0" hangingPunct="1">
-                            <a:defRPr sz="4212" kern="1200">
-                              <a:solidFill>
-                                <a:schemeClr val="tx1"/>
-                              </a:solidFill>
-                              <a:latin typeface="Calibri"/>
-                            </a:defRPr>
-                          </a:lvl1pPr>
-                          <a:lvl2pPr marL="1069802" algn="l" defTabSz="2139605" rtl="0" eaLnBrk="1" latinLnBrk="0" hangingPunct="1">
-                            <a:defRPr sz="4212" kern="1200">
-                              <a:solidFill>
-                                <a:schemeClr val="tx1"/>
-                              </a:solidFill>
-                              <a:latin typeface="Calibri"/>
-                            </a:defRPr>
-                          </a:lvl2pPr>
-                          <a:lvl3pPr marL="2139605" algn="l" defTabSz="2139605" rtl="0" eaLnBrk="1" latinLnBrk="0" hangingPunct="1">
-                            <a:defRPr sz="4212" kern="1200">
-                              <a:solidFill>
-                                <a:schemeClr val="tx1"/>
-                              </a:solidFill>
-                              <a:latin typeface="Calibri"/>
-                            </a:defRPr>
-                          </a:lvl3pPr>
-                          <a:lvl4pPr marL="3209407" algn="l" defTabSz="2139605" rtl="0" eaLnBrk="1" latinLnBrk="0" hangingPunct="1">
-                            <a:defRPr sz="4212" kern="1200">
-                              <a:solidFill>
-                                <a:schemeClr val="tx1"/>
-                              </a:solidFill>
-                              <a:latin typeface="Calibri"/>
-                            </a:defRPr>
-                          </a:lvl4pPr>
-                          <a:lvl5pPr marL="4279209" algn="l" defTabSz="2139605" rtl="0" eaLnBrk="1" latinLnBrk="0" hangingPunct="1">
-                            <a:defRPr sz="4212" kern="1200">
-                              <a:solidFill>
-                                <a:schemeClr val="tx1"/>
-                              </a:solidFill>
-                              <a:latin typeface="Calibri"/>
-                            </a:defRPr>
-                          </a:lvl5pPr>
-                          <a:lvl6pPr marL="5349011" algn="l" defTabSz="2139605" rtl="0" eaLnBrk="1" latinLnBrk="0" hangingPunct="1">
-                            <a:defRPr sz="4212" kern="1200">
-                              <a:solidFill>
-                                <a:schemeClr val="tx1"/>
-                              </a:solidFill>
-                              <a:latin typeface="Calibri"/>
-                            </a:defRPr>
-                          </a:lvl6pPr>
-                          <a:lvl7pPr marL="6418814" algn="l" defTabSz="2139605" rtl="0" eaLnBrk="1" latinLnBrk="0" hangingPunct="1">
-                            <a:defRPr sz="4212" kern="1200">
-                              <a:solidFill>
-                                <a:schemeClr val="tx1"/>
-                              </a:solidFill>
-                              <a:latin typeface="Calibri"/>
-                            </a:defRPr>
-                          </a:lvl7pPr>
-                          <a:lvl8pPr marL="7488616" algn="l" defTabSz="2139605" rtl="0" eaLnBrk="1" latinLnBrk="0" hangingPunct="1">
-                            <a:defRPr sz="4212" kern="1200">
-                              <a:solidFill>
-                                <a:schemeClr val="tx1"/>
-                              </a:solidFill>
-                              <a:latin typeface="Calibri"/>
-                            </a:defRPr>
-                          </a:lvl8pPr>
-                          <a:lvl9pPr marL="8558418" algn="l" defTabSz="2139605" rtl="0" eaLnBrk="1" latinLnBrk="0" hangingPunct="1">
-                            <a:defRPr sz="4212" kern="1200">
-                              <a:solidFill>
-                                <a:schemeClr val="tx1"/>
-                              </a:solidFill>
-                              <a:latin typeface="Calibri"/>
-                            </a:defRPr>
-                          </a:lvl9pPr>
-                        </a:lstStyle>
-                        <a:p>
-                          <a:pPr>
-                            <a:lnSpc>
-                              <a:spcPct val="100000"/>
-                            </a:lnSpc>
-                            <a:spcBef>
-                              <a:spcPts val="30"/>
-                            </a:spcBef>
-                          </a:pPr>
-                          <a:endParaRPr sz="1250" dirty="0">
-                            <a:latin typeface="TH SarabunPSK" panose="020B0500040200020003" pitchFamily="34" charset="-34"/>
-                            <a:cs typeface="TH SarabunPSK" panose="020B0500040200020003" pitchFamily="34" charset="-34"/>
-                          </a:endParaRPr>
-                        </a:p>
-                        <a:p>
-                          <a:pPr marL="182880">
-                            <a:lnSpc>
-                              <a:spcPct val="100000"/>
-                            </a:lnSpc>
-                          </a:pPr>
-                          <a:r>
-                            <a:rPr lang="en-US" sz="3200" dirty="0">
-                              <a:latin typeface="TH SarabunPSK" panose="020B0500040200020003" pitchFamily="34" charset="-34"/>
-                              <a:cs typeface="TH SarabunPSK" panose="020B0500040200020003" pitchFamily="34" charset="-34"/>
-                            </a:rPr>
-                            <a:t>The approach was to be able to classify patients on whether they needed  cardiac catheterization or not based on information in the Electronic Health Record (EHR). We used the mimic-iv-ext-cardiac-disease-1.0.0 dataset from the MIT computational physiology lab. The dataset consisted of patients with </a:t>
-                          </a:r>
-                          <a:r>
-                            <a:rPr lang="en-US" sz="3200">
-                              <a:latin typeface="TH SarabunPSK" panose="020B0500040200020003" pitchFamily="34" charset="-34"/>
-                              <a:cs typeface="TH SarabunPSK" panose="020B0500040200020003" pitchFamily="34" charset="-34"/>
-                            </a:rPr>
-                            <a:t>heart conditions. We </a:t>
-                          </a:r>
-                          <a:r>
-                            <a:rPr lang="en-US" sz="3200" dirty="0">
-                              <a:latin typeface="TH SarabunPSK" panose="020B0500040200020003" pitchFamily="34" charset="-34"/>
-                              <a:cs typeface="TH SarabunPSK" panose="020B0500040200020003" pitchFamily="34" charset="-34"/>
-                            </a:rPr>
-                            <a:t>used a simple 1. Term Frequency - Inverse Document Frequency (TF-IDF) 2. Baseline BERT Model 3. BERT plus Knowledge graph</a:t>
-                          </a:r>
-                        </a:p>
-                        <a:p>
-                          <a:pPr marL="182880">
-                            <a:lnSpc>
-                              <a:spcPct val="100000"/>
-                            </a:lnSpc>
-                          </a:pPr>
-                          <a:r>
-                            <a:rPr lang="en-US" sz="3200" dirty="0">
-                              <a:latin typeface="TH SarabunPSK" panose="020B0500040200020003" pitchFamily="34" charset="-34"/>
-                              <a:cs typeface="TH SarabunPSK" panose="020B0500040200020003" pitchFamily="34" charset="-34"/>
-                            </a:rPr>
-                            <a:t>4. LLM plus Knowledge Graph. </a:t>
-                          </a:r>
-                        </a:p>
-                        <a:p>
-                          <a:pPr marL="182880">
-                            <a:lnSpc>
-                              <a:spcPct val="100000"/>
-                            </a:lnSpc>
-                          </a:pPr>
-                          <a:r>
-                            <a:rPr lang="en-US" sz="3200" dirty="0">
-                              <a:latin typeface="TH SarabunPSK" panose="020B0500040200020003" pitchFamily="34" charset="-34"/>
-                              <a:cs typeface="TH SarabunPSK" panose="020B0500040200020003" pitchFamily="34" charset="-34"/>
-                            </a:rPr>
-                            <a:t> </a:t>
-                          </a:r>
-                        </a:p>
-                        <a:p>
-                          <a:pPr marL="182880">
-                            <a:lnSpc>
-                              <a:spcPct val="100000"/>
-                            </a:lnSpc>
-                          </a:pPr>
-                          <a14:m>
-                            <m:oMath xmlns:m="http://schemas.openxmlformats.org/officeDocument/2006/math">
-                              <m:r>
-                                <a:rPr lang="en-US" sz="3200" b="0" i="0" smtClean="0">
-                                  <a:latin typeface="Cambria Math" panose="02040503050406030204" pitchFamily="18" charset="0"/>
-                                  <a:cs typeface="TH SarabunPSK" panose="020B0500040200020003" pitchFamily="34" charset="-34"/>
-                                </a:rPr>
-                                <m:t> </m:t>
-                              </m:r>
-                              <m:r>
-                                <a:rPr lang="en-US" sz="3200" i="1" smtClean="0">
-                                  <a:latin typeface="Cambria Math" panose="02040503050406030204" pitchFamily="18" charset="0"/>
-                                  <a:cs typeface="TH SarabunPSK" panose="020B0500040200020003" pitchFamily="34" charset="-34"/>
-                                </a:rPr>
-                                <m:t>𝐴</m:t>
-                              </m:r>
-                              <m:r>
-                                <a:rPr lang="en-US" sz="3200" i="1" smtClean="0">
-                                  <a:latin typeface="Cambria Math" panose="02040503050406030204" pitchFamily="18" charset="0"/>
-                                  <a:cs typeface="TH SarabunPSK" panose="020B0500040200020003" pitchFamily="34" charset="-34"/>
-                                </a:rPr>
-                                <m:t>=</m:t>
-                              </m:r>
-                              <m:r>
-                                <a:rPr lang="en-US" sz="3200" i="1" smtClean="0">
-                                  <a:latin typeface="Cambria Math" panose="02040503050406030204" pitchFamily="18" charset="0"/>
-                                  <a:cs typeface="TH SarabunPSK" panose="020B0500040200020003" pitchFamily="34" charset="-34"/>
-                                </a:rPr>
-                                <m:t>𝜋</m:t>
-                              </m:r>
-                              <m:sSup>
-                                <m:sSupPr>
-                                  <m:ctrlPr>
-                                    <a:rPr lang="ar-AE" sz="3200" i="1" smtClean="0">
-                                      <a:latin typeface="Cambria Math" panose="02040503050406030204" pitchFamily="18" charset="0"/>
-                                      <a:cs typeface="TH SarabunPSK" panose="020B0500040200020003" pitchFamily="34" charset="-34"/>
-                                    </a:rPr>
-                                  </m:ctrlPr>
-                                </m:sSupPr>
-                                <m:e>
-                                  <m:r>
-                                    <a:rPr lang="ar-AE" sz="3200" i="1" smtClean="0">
-                                      <a:latin typeface="Cambria Math" panose="02040503050406030204" pitchFamily="18" charset="0"/>
-                                      <a:cs typeface="TH SarabunPSK" panose="020B0500040200020003" pitchFamily="34" charset="-34"/>
-                                    </a:rPr>
-                                    <m:t>𝑟</m:t>
-                                  </m:r>
-                                </m:e>
-                                <m:sup>
-                                  <m:r>
-                                    <a:rPr lang="ar-AE" sz="3200" i="1" smtClean="0">
-                                      <a:latin typeface="Cambria Math" panose="02040503050406030204" pitchFamily="18" charset="0"/>
-                                      <a:cs typeface="TH SarabunPSK" panose="020B0500040200020003" pitchFamily="34" charset="-34"/>
-                                    </a:rPr>
-                                    <m:t>2</m:t>
-                                  </m:r>
-                                </m:sup>
-                              </m:sSup>
-                              <m:r>
-                                <a:rPr lang="ar-AE" sz="3200" b="0" i="1" smtClean="0">
-                                  <a:latin typeface="Cambria Math" panose="02040503050406030204" pitchFamily="18" charset="0"/>
-                                  <a:cs typeface="TH SarabunPSK" panose="020B0500040200020003" pitchFamily="34" charset="-34"/>
-                                </a:rPr>
-                                <m:t> </m:t>
-                              </m:r>
-                            </m:oMath>
-                          </a14:m>
-                          <a:r>
-                            <a:rPr lang="en-US" sz="3200" dirty="0">
-                              <a:latin typeface="TH SarabunPSK" panose="020B0500040200020003" pitchFamily="34" charset="-34"/>
-                              <a:cs typeface="TH SarabunPSK" panose="020B0500040200020003" pitchFamily="34" charset="-34"/>
-                            </a:rPr>
-                            <a:t>                                                        </a:t>
-                          </a:r>
-                        </a:p>
-                        <a:p>
-                          <a:pPr marL="182880">
-                            <a:lnSpc>
-                              <a:spcPct val="100000"/>
-                            </a:lnSpc>
-                          </a:pPr>
-                          <a:endParaRPr lang="en-US" sz="3200" dirty="0">
-                            <a:latin typeface="TH SarabunPSK" panose="020B0500040200020003" pitchFamily="34" charset="-34"/>
-                            <a:cs typeface="TH SarabunPSK" panose="020B0500040200020003" pitchFamily="34" charset="-34"/>
-                          </a:endParaRPr>
-                        </a:p>
-                        <a:p>
-                          <a:pPr marL="182880" algn="ctr">
-                            <a:lnSpc>
-                              <a:spcPct val="100000"/>
-                            </a:lnSpc>
-                          </a:pPr>
-                          <a:endParaRPr lang="en-US" sz="3200" dirty="0">
-                            <a:latin typeface="TH SarabunPSK" panose="020B0500040200020003" pitchFamily="34" charset="-34"/>
-                            <a:cs typeface="TH SarabunPSK" panose="020B0500040200020003" pitchFamily="34" charset="-34"/>
-                          </a:endParaRPr>
-                        </a:p>
-                        <a:p>
-                          <a:pPr marL="182880" algn="ctr">
-                            <a:lnSpc>
-                              <a:spcPct val="100000"/>
-                            </a:lnSpc>
-                          </a:pPr>
-                          <a:endParaRPr lang="en-US" sz="3200" dirty="0">
-                            <a:latin typeface="TH SarabunPSK" panose="020B0500040200020003" pitchFamily="34" charset="-34"/>
-                            <a:cs typeface="TH SarabunPSK" panose="020B0500040200020003" pitchFamily="34" charset="-34"/>
-                          </a:endParaRPr>
-                        </a:p>
-                        <a:p>
-                          <a:pPr marL="182880" algn="ctr">
-                            <a:lnSpc>
-                              <a:spcPct val="100000"/>
-                            </a:lnSpc>
-                          </a:pPr>
-                          <a:endParaRPr lang="en-US" sz="3200" dirty="0">
-                            <a:latin typeface="TH SarabunPSK" panose="020B0500040200020003" pitchFamily="34" charset="-34"/>
-                            <a:cs typeface="TH SarabunPSK" panose="020B0500040200020003" pitchFamily="34" charset="-34"/>
-                          </a:endParaRPr>
-                        </a:p>
-                        <a:p>
-                          <a:pPr marL="182880">
-                            <a:lnSpc>
-                              <a:spcPct val="100000"/>
-                            </a:lnSpc>
-                          </a:pPr>
-                          <a:endParaRPr lang="en-US" sz="3200" dirty="0">
-                            <a:latin typeface="TH SarabunPSK" panose="020B0500040200020003" pitchFamily="34" charset="-34"/>
-                            <a:cs typeface="TH SarabunPSK" panose="020B0500040200020003" pitchFamily="34" charset="-34"/>
-                          </a:endParaRPr>
-                        </a:p>
-                      </a:txBody>
-                      <a:tcPr marL="0" marR="0" marT="3810" marB="0">
-                        <a:lnL>
-                          <a:noFill/>
-                        </a:lnL>
-                        <a:lnR>
-                          <a:noFill/>
-                        </a:lnR>
-                        <a:lnT>
-                          <a:noFill/>
-                        </a:lnT>
-                        <a:lnB>
-                          <a:noFill/>
-                        </a:lnB>
-                        <a:lnTlToBr w="12700" cmpd="sng">
-                          <a:noFill/>
-                          <a:prstDash val="solid"/>
-                        </a:lnTlToBr>
-                        <a:lnBlToTr w="12700" cmpd="sng">
-                          <a:noFill/>
-                          <a:prstDash val="solid"/>
-                        </a:lnBlToTr>
-                        <a:solidFill>
-                          <a:srgbClr val="F4F0E9"/>
-                        </a:solidFill>
-                      </a:tcPr>
-                    </a:tc>
-                    <a:extLst>
-                      <a:ext uri="{0D108BD9-81ED-4DB2-BD59-A6C34878D82A}">
-                        <a16:rowId xmlns:a16="http://schemas.microsoft.com/office/drawing/2014/main" val="10001"/>
-                      </a:ext>
-                    </a:extLst>
-                  </a:tr>
-                </a:tbl>
-              </a:graphicData>
-            </a:graphic>
-          </p:graphicFrame>
-        </mc:Choice>
-        <mc:Fallback>
-          <p:graphicFrame>
-            <p:nvGraphicFramePr>
-              <p:cNvPr id="27" name="object 22">
+              </a:tr>
+              <a:tr h="7771475">
+                <a:tc>
+                  <a:txBody>
+                    <a:bodyPr/>
+                    <a:lstStyle>
+                      <a:lvl1pPr marL="0" algn="l" defTabSz="2139605" rtl="0" eaLnBrk="1" latinLnBrk="0" hangingPunct="1">
+                        <a:defRPr sz="4212" kern="1200">
+                          <a:solidFill>
+                            <a:schemeClr val="tx1"/>
+                          </a:solidFill>
+                          <a:latin typeface="Calibri"/>
+                        </a:defRPr>
+                      </a:lvl1pPr>
+                      <a:lvl2pPr marL="1069802" algn="l" defTabSz="2139605" rtl="0" eaLnBrk="1" latinLnBrk="0" hangingPunct="1">
+                        <a:defRPr sz="4212" kern="1200">
+                          <a:solidFill>
+                            <a:schemeClr val="tx1"/>
+                          </a:solidFill>
+                          <a:latin typeface="Calibri"/>
+                        </a:defRPr>
+                      </a:lvl2pPr>
+                      <a:lvl3pPr marL="2139605" algn="l" defTabSz="2139605" rtl="0" eaLnBrk="1" latinLnBrk="0" hangingPunct="1">
+                        <a:defRPr sz="4212" kern="1200">
+                          <a:solidFill>
+                            <a:schemeClr val="tx1"/>
+                          </a:solidFill>
+                          <a:latin typeface="Calibri"/>
+                        </a:defRPr>
+                      </a:lvl3pPr>
+                      <a:lvl4pPr marL="3209407" algn="l" defTabSz="2139605" rtl="0" eaLnBrk="1" latinLnBrk="0" hangingPunct="1">
+                        <a:defRPr sz="4212" kern="1200">
+                          <a:solidFill>
+                            <a:schemeClr val="tx1"/>
+                          </a:solidFill>
+                          <a:latin typeface="Calibri"/>
+                        </a:defRPr>
+                      </a:lvl4pPr>
+                      <a:lvl5pPr marL="4279209" algn="l" defTabSz="2139605" rtl="0" eaLnBrk="1" latinLnBrk="0" hangingPunct="1">
+                        <a:defRPr sz="4212" kern="1200">
+                          <a:solidFill>
+                            <a:schemeClr val="tx1"/>
+                          </a:solidFill>
+                          <a:latin typeface="Calibri"/>
+                        </a:defRPr>
+                      </a:lvl5pPr>
+                      <a:lvl6pPr marL="5349011" algn="l" defTabSz="2139605" rtl="0" eaLnBrk="1" latinLnBrk="0" hangingPunct="1">
+                        <a:defRPr sz="4212" kern="1200">
+                          <a:solidFill>
+                            <a:schemeClr val="tx1"/>
+                          </a:solidFill>
+                          <a:latin typeface="Calibri"/>
+                        </a:defRPr>
+                      </a:lvl6pPr>
+                      <a:lvl7pPr marL="6418814" algn="l" defTabSz="2139605" rtl="0" eaLnBrk="1" latinLnBrk="0" hangingPunct="1">
+                        <a:defRPr sz="4212" kern="1200">
+                          <a:solidFill>
+                            <a:schemeClr val="tx1"/>
+                          </a:solidFill>
+                          <a:latin typeface="Calibri"/>
+                        </a:defRPr>
+                      </a:lvl7pPr>
+                      <a:lvl8pPr marL="7488616" algn="l" defTabSz="2139605" rtl="0" eaLnBrk="1" latinLnBrk="0" hangingPunct="1">
+                        <a:defRPr sz="4212" kern="1200">
+                          <a:solidFill>
+                            <a:schemeClr val="tx1"/>
+                          </a:solidFill>
+                          <a:latin typeface="Calibri"/>
+                        </a:defRPr>
+                      </a:lvl8pPr>
+                      <a:lvl9pPr marL="8558418" algn="l" defTabSz="2139605" rtl="0" eaLnBrk="1" latinLnBrk="0" hangingPunct="1">
+                        <a:defRPr sz="4212" kern="1200">
+                          <a:solidFill>
+                            <a:schemeClr val="tx1"/>
+                          </a:solidFill>
+                          <a:latin typeface="Calibri"/>
+                        </a:defRPr>
+                      </a:lvl9pPr>
+                    </a:lstStyle>
+                    <a:p>
+                      <a:pPr>
+                        <a:lnSpc>
+                          <a:spcPct val="100000"/>
+                        </a:lnSpc>
+                        <a:spcBef>
+                          <a:spcPts val="30"/>
+                        </a:spcBef>
+                      </a:pPr>
+                      <a:endParaRPr sz="1250" dirty="0">
+                        <a:latin typeface="TH SarabunPSK" panose="020B0500040200020003" pitchFamily="34" charset="-34"/>
+                        <a:cs typeface="TH SarabunPSK" panose="020B0500040200020003" pitchFamily="34" charset="-34"/>
+                      </a:endParaRPr>
+                    </a:p>
+                    <a:p>
+                      <a:pPr marL="182880">
+                        <a:lnSpc>
+                          <a:spcPct val="100000"/>
+                        </a:lnSpc>
+                      </a:pPr>
+                      <a:r>
+                        <a:rPr lang="en-US" sz="3200" dirty="0">
+                          <a:latin typeface="TH SarabunPSK" panose="020B0500040200020003" pitchFamily="34" charset="-34"/>
+                          <a:cs typeface="TH SarabunPSK" panose="020B0500040200020003" pitchFamily="34" charset="-34"/>
+                        </a:rPr>
+                        <a:t>The approach was to be able to classify patients on whether they needed  cardiac catheterization or not based on information in the Electronic Health Record (EHR). We used the mimic-iv-ext-cardiac-disease-1.0.0 dataset from the MIT computational physiology lab. The dataset consisted of patients with heart conditions. We used a four methods to classify patients that needed cardiac catheterization based on the EHR text. 1. Term Frequency - Inverse Document Frequency (TF-IDF) 2. Baseline BERT Model 3. BERT plus Knowledge graph</a:t>
+                      </a:r>
+                    </a:p>
+                    <a:p>
+                      <a:pPr marL="182880">
+                        <a:lnSpc>
+                          <a:spcPct val="100000"/>
+                        </a:lnSpc>
+                      </a:pPr>
+                      <a:r>
+                        <a:rPr lang="en-US" sz="3200" dirty="0">
+                          <a:latin typeface="TH SarabunPSK" panose="020B0500040200020003" pitchFamily="34" charset="-34"/>
+                          <a:cs typeface="TH SarabunPSK" panose="020B0500040200020003" pitchFamily="34" charset="-34"/>
+                        </a:rPr>
+                        <a:t>4. LLM plus Knowledge Graph. </a:t>
+                      </a:r>
+                    </a:p>
+                    <a:p>
+                      <a:pPr marL="182880" algn="ctr">
+                        <a:lnSpc>
+                          <a:spcPct val="100000"/>
+                        </a:lnSpc>
+                      </a:pPr>
+                      <a:endParaRPr lang="en-US" sz="3200" dirty="0">
+                        <a:latin typeface="TH SarabunPSK" panose="020B0500040200020003" pitchFamily="34" charset="-34"/>
+                        <a:cs typeface="TH SarabunPSK" panose="020B0500040200020003" pitchFamily="34" charset="-34"/>
+                      </a:endParaRPr>
+                    </a:p>
+                    <a:p>
+                      <a:pPr marL="182880" algn="ctr">
+                        <a:lnSpc>
+                          <a:spcPct val="100000"/>
+                        </a:lnSpc>
+                      </a:pPr>
+                      <a:endParaRPr lang="en-US" sz="3200" dirty="0">
+                        <a:latin typeface="TH SarabunPSK" panose="020B0500040200020003" pitchFamily="34" charset="-34"/>
+                        <a:cs typeface="TH SarabunPSK" panose="020B0500040200020003" pitchFamily="34" charset="-34"/>
+                      </a:endParaRPr>
+                    </a:p>
+                    <a:p>
+                      <a:pPr marL="182880" algn="ctr">
+                        <a:lnSpc>
+                          <a:spcPct val="100000"/>
+                        </a:lnSpc>
+                      </a:pPr>
+                      <a:endParaRPr lang="en-US" sz="3200" dirty="0">
+                        <a:latin typeface="TH SarabunPSK" panose="020B0500040200020003" pitchFamily="34" charset="-34"/>
+                        <a:cs typeface="TH SarabunPSK" panose="020B0500040200020003" pitchFamily="34" charset="-34"/>
+                      </a:endParaRPr>
+                    </a:p>
+                    <a:p>
+                      <a:pPr marL="182880">
+                        <a:lnSpc>
+                          <a:spcPct val="100000"/>
+                        </a:lnSpc>
+                      </a:pPr>
+                      <a:endParaRPr lang="en-US" sz="3200" dirty="0">
+                        <a:latin typeface="TH SarabunPSK" panose="020B0500040200020003" pitchFamily="34" charset="-34"/>
+                        <a:cs typeface="TH SarabunPSK" panose="020B0500040200020003" pitchFamily="34" charset="-34"/>
+                      </a:endParaRPr>
+                    </a:p>
+                  </a:txBody>
+                  <a:tcPr marL="0" marR="0" marT="3810" marB="0">
+                    <a:lnL>
+                      <a:noFill/>
+                    </a:lnL>
+                    <a:lnR>
+                      <a:noFill/>
+                    </a:lnR>
+                    <a:lnT>
+                      <a:noFill/>
+                    </a:lnT>
+                    <a:lnB>
+                      <a:noFill/>
+                    </a:lnB>
+                    <a:lnTlToBr w="12700" cmpd="sng">
+                      <a:noFill/>
+                      <a:prstDash val="solid"/>
+                    </a:lnTlToBr>
+                    <a:lnBlToTr w="12700" cmpd="sng">
+                      <a:noFill/>
+                      <a:prstDash val="solid"/>
+                    </a:lnBlToTr>
+                    <a:solidFill>
+                      <a:srgbClr val="F4F0E9"/>
+                    </a:solidFill>
+                  </a:tcPr>
+                </a:tc>
                 <a:extLst>
-                  <a:ext uri="{FF2B5EF4-FFF2-40B4-BE49-F238E27FC236}">
-                    <a16:creationId xmlns:a16="http://schemas.microsoft.com/office/drawing/2014/main" id="{B0C8BFD8-10C8-4356-976A-75AD1B4E604C}"/>
+                  <a:ext uri="{0D108BD9-81ED-4DB2-BD59-A6C34878D82A}">
+                    <a16:rowId xmlns:a16="http://schemas.microsoft.com/office/drawing/2014/main" val="10001"/>
                   </a:ext>
                 </a:extLst>
-              </p:cNvPr>
-              <p:cNvGraphicFramePr>
-                <a:graphicFrameLocks noGrp="1"/>
-              </p:cNvGraphicFramePr>
-              <p:nvPr>
-                <p:extLst>
-                  <p:ext uri="{D42A27DB-BD31-4B8C-83A1-F6EECF244321}">
-                    <p14:modId xmlns:p14="http://schemas.microsoft.com/office/powerpoint/2010/main" val="3612269496"/>
-                  </p:ext>
-                </p:extLst>
-              </p:nvPr>
-            </p:nvGraphicFramePr>
-            <p:xfrm>
-              <a:off x="274320" y="21386972"/>
-              <a:ext cx="10149840" cy="8601810"/>
-            </p:xfrm>
-            <a:graphic>
-              <a:graphicData uri="http://schemas.openxmlformats.org/drawingml/2006/table">
-                <a:tbl>
-                  <a:tblPr firstRow="1" bandRow="1"/>
-                  <a:tblGrid>
-                    <a:gridCol w="10149840">
-                      <a:extLst>
-                        <a:ext uri="{9D8B030D-6E8A-4147-A177-3AD203B41FA5}">
-                          <a16:colId xmlns:a16="http://schemas.microsoft.com/office/drawing/2014/main" val="20000"/>
-                        </a:ext>
-                      </a:extLst>
-                    </a:gridCol>
-                  </a:tblGrid>
-                  <a:tr h="830335">
-                    <a:tc>
-                      <a:txBody>
-                        <a:bodyPr/>
-                        <a:lstStyle>
-                          <a:lvl1pPr marL="0" algn="l" defTabSz="2139605" rtl="0" eaLnBrk="1" latinLnBrk="0" hangingPunct="1">
-                            <a:defRPr sz="4212" kern="1200">
-                              <a:solidFill>
-                                <a:schemeClr val="tx1"/>
-                              </a:solidFill>
-                              <a:latin typeface="Calibri"/>
-                            </a:defRPr>
-                          </a:lvl1pPr>
-                          <a:lvl2pPr marL="1069802" algn="l" defTabSz="2139605" rtl="0" eaLnBrk="1" latinLnBrk="0" hangingPunct="1">
-                            <a:defRPr sz="4212" kern="1200">
-                              <a:solidFill>
-                                <a:schemeClr val="tx1"/>
-                              </a:solidFill>
-                              <a:latin typeface="Calibri"/>
-                            </a:defRPr>
-                          </a:lvl2pPr>
-                          <a:lvl3pPr marL="2139605" algn="l" defTabSz="2139605" rtl="0" eaLnBrk="1" latinLnBrk="0" hangingPunct="1">
-                            <a:defRPr sz="4212" kern="1200">
-                              <a:solidFill>
-                                <a:schemeClr val="tx1"/>
-                              </a:solidFill>
-                              <a:latin typeface="Calibri"/>
-                            </a:defRPr>
-                          </a:lvl3pPr>
-                          <a:lvl4pPr marL="3209407" algn="l" defTabSz="2139605" rtl="0" eaLnBrk="1" latinLnBrk="0" hangingPunct="1">
-                            <a:defRPr sz="4212" kern="1200">
-                              <a:solidFill>
-                                <a:schemeClr val="tx1"/>
-                              </a:solidFill>
-                              <a:latin typeface="Calibri"/>
-                            </a:defRPr>
-                          </a:lvl4pPr>
-                          <a:lvl5pPr marL="4279209" algn="l" defTabSz="2139605" rtl="0" eaLnBrk="1" latinLnBrk="0" hangingPunct="1">
-                            <a:defRPr sz="4212" kern="1200">
-                              <a:solidFill>
-                                <a:schemeClr val="tx1"/>
-                              </a:solidFill>
-                              <a:latin typeface="Calibri"/>
-                            </a:defRPr>
-                          </a:lvl5pPr>
-                          <a:lvl6pPr marL="5349011" algn="l" defTabSz="2139605" rtl="0" eaLnBrk="1" latinLnBrk="0" hangingPunct="1">
-                            <a:defRPr sz="4212" kern="1200">
-                              <a:solidFill>
-                                <a:schemeClr val="tx1"/>
-                              </a:solidFill>
-                              <a:latin typeface="Calibri"/>
-                            </a:defRPr>
-                          </a:lvl6pPr>
-                          <a:lvl7pPr marL="6418814" algn="l" defTabSz="2139605" rtl="0" eaLnBrk="1" latinLnBrk="0" hangingPunct="1">
-                            <a:defRPr sz="4212" kern="1200">
-                              <a:solidFill>
-                                <a:schemeClr val="tx1"/>
-                              </a:solidFill>
-                              <a:latin typeface="Calibri"/>
-                            </a:defRPr>
-                          </a:lvl7pPr>
-                          <a:lvl8pPr marL="7488616" algn="l" defTabSz="2139605" rtl="0" eaLnBrk="1" latinLnBrk="0" hangingPunct="1">
-                            <a:defRPr sz="4212" kern="1200">
-                              <a:solidFill>
-                                <a:schemeClr val="tx1"/>
-                              </a:solidFill>
-                              <a:latin typeface="Calibri"/>
-                            </a:defRPr>
-                          </a:lvl8pPr>
-                          <a:lvl9pPr marL="8558418" algn="l" defTabSz="2139605" rtl="0" eaLnBrk="1" latinLnBrk="0" hangingPunct="1">
-                            <a:defRPr sz="4212" kern="1200">
-                              <a:solidFill>
-                                <a:schemeClr val="tx1"/>
-                              </a:solidFill>
-                              <a:latin typeface="Calibri"/>
-                            </a:defRPr>
-                          </a:lvl9pPr>
-                        </a:lstStyle>
-                        <a:p>
-                          <a:pPr marL="1905" algn="ctr">
-                            <a:lnSpc>
-                              <a:spcPct val="100000"/>
-                            </a:lnSpc>
-                            <a:spcBef>
-                              <a:spcPts val="120"/>
-                            </a:spcBef>
-                          </a:pPr>
-                          <a:r>
-                            <a:rPr lang="en-US" sz="3600" b="1" spc="-5" dirty="0">
-                              <a:solidFill>
-                                <a:srgbClr val="FFFFFF"/>
-                              </a:solidFill>
-                              <a:latin typeface="TH SarabunPSK" panose="020B0500040200020003" pitchFamily="34" charset="-34"/>
-                              <a:cs typeface="TH SarabunPSK" panose="020B0500040200020003" pitchFamily="34" charset="-34"/>
-                            </a:rPr>
-                            <a:t>Methods</a:t>
-                          </a:r>
-                          <a:endParaRPr sz="3600" dirty="0">
-                            <a:latin typeface="TH SarabunPSK" panose="020B0500040200020003" pitchFamily="34" charset="-34"/>
-                            <a:cs typeface="TH SarabunPSK" panose="020B0500040200020003" pitchFamily="34" charset="-34"/>
-                          </a:endParaRPr>
-                        </a:p>
-                      </a:txBody>
-                      <a:tcPr marL="0" marR="0" marT="15240" marB="0" anchor="ctr">
-                        <a:lnL>
-                          <a:noFill/>
-                        </a:lnL>
-                        <a:lnR>
-                          <a:noFill/>
-                        </a:lnR>
-                        <a:lnT w="3175">
-                          <a:noFill/>
-                          <a:prstDash val="solid"/>
-                        </a:lnT>
-                        <a:lnB>
-                          <a:noFill/>
-                        </a:lnB>
-                        <a:lnTlToBr w="12700" cmpd="sng">
-                          <a:noFill/>
-                          <a:prstDash val="solid"/>
-                        </a:lnTlToBr>
-                        <a:lnBlToTr w="12700" cmpd="sng">
-                          <a:noFill/>
-                          <a:prstDash val="solid"/>
-                        </a:lnBlToTr>
-                        <a:solidFill>
-                          <a:srgbClr val="0070C0"/>
-                        </a:solidFill>
-                      </a:tcPr>
-                    </a:tc>
-                    <a:extLst>
-                      <a:ext uri="{0D108BD9-81ED-4DB2-BD59-A6C34878D82A}">
-                        <a16:rowId xmlns:a16="http://schemas.microsoft.com/office/drawing/2014/main" val="10000"/>
-                      </a:ext>
-                    </a:extLst>
-                  </a:tr>
-                  <a:tr h="7771475">
-                    <a:tc>
-                      <a:txBody>
-                        <a:bodyPr/>
-                        <a:lstStyle/>
-                        <a:p>
-                          <a:endParaRPr lang="en-US"/>
-                        </a:p>
-                      </a:txBody>
-                      <a:tcPr marL="0" marR="0" marT="3810" marB="0">
-                        <a:lnL>
-                          <a:noFill/>
-                        </a:lnL>
-                        <a:lnR>
-                          <a:noFill/>
-                        </a:lnR>
-                        <a:lnT>
-                          <a:noFill/>
-                        </a:lnT>
-                        <a:lnB>
-                          <a:noFill/>
-                        </a:lnB>
-                        <a:lnTlToBr w="12700" cmpd="sng">
-                          <a:noFill/>
-                          <a:prstDash val="solid"/>
-                        </a:lnTlToBr>
-                        <a:lnBlToTr w="12700" cmpd="sng">
-                          <a:noFill/>
-                          <a:prstDash val="solid"/>
-                        </a:lnBlToTr>
-                        <a:blipFill>
-                          <a:blip r:embed="rId2"/>
-                          <a:stretch>
-                            <a:fillRect t="-10658"/>
-                          </a:stretch>
-                        </a:blipFill>
-                      </a:tcPr>
-                    </a:tc>
-                    <a:extLst>
-                      <a:ext uri="{0D108BD9-81ED-4DB2-BD59-A6C34878D82A}">
-                        <a16:rowId xmlns:a16="http://schemas.microsoft.com/office/drawing/2014/main" val="10001"/>
-                      </a:ext>
-                    </a:extLst>
-                  </a:tr>
-                </a:tbl>
-              </a:graphicData>
-            </a:graphic>
-          </p:graphicFrame>
-        </mc:Fallback>
-      </mc:AlternateContent>
+              </a:tr>
+            </a:tbl>
+          </a:graphicData>
+        </a:graphic>
+      </p:graphicFrame>
       <p:graphicFrame>
         <p:nvGraphicFramePr>
           <p:cNvPr id="29" name="object 22">
@@ -5280,14 +4933,14 @@
           <p:nvPr>
             <p:extLst>
               <p:ext uri="{D42A27DB-BD31-4B8C-83A1-F6EECF244321}">
-                <p14:modId xmlns:p14="http://schemas.microsoft.com/office/powerpoint/2010/main" val="1859206784"/>
+                <p14:modId xmlns:p14="http://schemas.microsoft.com/office/powerpoint/2010/main" val="2732456321"/>
               </p:ext>
             </p:extLst>
           </p:nvPr>
         </p:nvGraphicFramePr>
         <p:xfrm>
           <a:off x="10698162" y="6732881"/>
-          <a:ext cx="10143692" cy="12607063"/>
+          <a:ext cx="10143692" cy="12481094"/>
         </p:xfrm>
         <a:graphic>
           <a:graphicData uri="http://schemas.openxmlformats.org/drawingml/2006/table">
@@ -5541,7 +5194,7 @@
                           <a:latin typeface="TH SarabunPSK" panose="020B0500040200020003" pitchFamily="34" charset="-34"/>
                           <a:cs typeface="TH SarabunPSK" panose="020B0500040200020003" pitchFamily="34" charset="-34"/>
                         </a:rPr>
-                        <a:t>Abbreviations and acronyms should be defined the first time they appear in the text. Do not use abbreviations in the title unless they are unavoidable. </a:t>
+                        <a:t> </a:t>
                       </a:r>
                     </a:p>
                     <a:p>
@@ -5940,7 +5593,7 @@
           <p:nvPr/>
         </p:nvPicPr>
         <p:blipFill>
-          <a:blip r:embed="rId3">
+          <a:blip r:embed="rId2">
             <a:extLst>
               <a:ext uri="{28A0092B-C50C-407E-A947-70E740481C1C}">
                 <a14:useLocalDpi xmlns:a14="http://schemas.microsoft.com/office/drawing/2010/main" val="0"/>
@@ -5987,7 +5640,7 @@
           <p:nvPr/>
         </p:nvPicPr>
         <p:blipFill>
-          <a:blip r:embed="rId3">
+          <a:blip r:embed="rId2">
             <a:extLst>
               <a:ext uri="{28A0092B-C50C-407E-A947-70E740481C1C}">
                 <a14:useLocalDpi xmlns:a14="http://schemas.microsoft.com/office/drawing/2010/main" val="0"/>
@@ -7704,7 +7357,7 @@
           <p:nvPr/>
         </p:nvPicPr>
         <p:blipFill>
-          <a:blip r:embed="rId4"/>
+          <a:blip r:embed="rId3"/>
           <a:stretch>
             <a:fillRect/>
           </a:stretch>

--- a/draft_poster.pptx
+++ b/draft_poster.pptx
@@ -4933,7 +4933,7 @@
           <p:nvPr>
             <p:extLst>
               <p:ext uri="{D42A27DB-BD31-4B8C-83A1-F6EECF244321}">
-                <p14:modId xmlns:p14="http://schemas.microsoft.com/office/powerpoint/2010/main" val="2732456321"/>
+                <p14:modId xmlns:p14="http://schemas.microsoft.com/office/powerpoint/2010/main" val="343582800"/>
               </p:ext>
             </p:extLst>
           </p:nvPr>
@@ -7344,10 +7344,10 @@
       </p:graphicFrame>
       <p:pic>
         <p:nvPicPr>
-          <p:cNvPr id="5" name="Picture 4">
+          <p:cNvPr id="6" name="Picture 5" descr="A graph of a number of cases&#10;&#10;AI-generated content may be incorrect.">
             <a:extLst>
               <a:ext uri="{FF2B5EF4-FFF2-40B4-BE49-F238E27FC236}">
-                <a16:creationId xmlns:a16="http://schemas.microsoft.com/office/drawing/2014/main" id="{9601B7CB-6BF7-14CA-389E-B89EB8EACD1A}"/>
+                <a16:creationId xmlns:a16="http://schemas.microsoft.com/office/drawing/2014/main" id="{2C8C4FA9-43F5-AF9D-CFDC-FA2E1A58AB73}"/>
               </a:ext>
             </a:extLst>
           </p:cNvPr>
@@ -7357,15 +7357,21 @@
           <p:nvPr/>
         </p:nvPicPr>
         <p:blipFill>
-          <a:blip r:embed="rId3"/>
+          <a:blip r:embed="rId3">
+            <a:extLst>
+              <a:ext uri="{28A0092B-C50C-407E-A947-70E740481C1C}">
+                <a14:useLocalDpi xmlns:a14="http://schemas.microsoft.com/office/drawing/2010/main" val="0"/>
+              </a:ext>
+            </a:extLst>
+          </a:blip>
           <a:stretch>
             <a:fillRect/>
           </a:stretch>
         </p:blipFill>
         <p:spPr>
           <a:xfrm>
-            <a:off x="10966652" y="12023594"/>
-            <a:ext cx="8764280" cy="6713673"/>
+            <a:off x="10698161" y="11934995"/>
+            <a:ext cx="10143693" cy="7190381"/>
           </a:xfrm>
           <a:prstGeom prst="rect">
             <a:avLst/>

--- a/draft_poster.pptx
+++ b/draft_poster.pptx
@@ -3108,7 +3108,7 @@
                 <a:latin typeface="TH SarabunPSK" panose="020B0500040200020003" pitchFamily="34" charset="-34"/>
                 <a:cs typeface="TH SarabunPSK" panose="020B0500040200020003" pitchFamily="34" charset="-34"/>
               </a:rPr>
-              <a:t>Towards Automated Cardiac Catheterization Laboratory Activation</a:t>
+              <a:t>Towards Automated Cardiac Catheterization Laboratory Activation using Medical Text Classification</a:t>
             </a:r>
             <a:endParaRPr lang="en-US" sz="8000" b="1" kern="100" dirty="0">
               <a:solidFill>

--- a/draft_poster.pptx
+++ b/draft_poster.pptx
@@ -3067,7 +3067,7 @@
         <p:spPr bwMode="auto">
           <a:xfrm>
             <a:off x="-1" y="1539095"/>
-            <a:ext cx="21396326" cy="4955415"/>
+            <a:ext cx="21396326" cy="4469128"/>
           </a:xfrm>
           <a:prstGeom prst="rect">
             <a:avLst/>
@@ -3101,7 +3101,7 @@
               <a:defRPr/>
             </a:pPr>
             <a:r>
-              <a:rPr lang="en-GB" altLang="en-US" sz="8000" b="1" kern="0" dirty="0">
+              <a:rPr lang="en-GB" altLang="en-US" sz="7200" b="1" kern="0" dirty="0">
                 <a:solidFill>
                   <a:schemeClr val="bg1"/>
                 </a:solidFill>
@@ -3110,7 +3110,7 @@
               </a:rPr>
               <a:t>Towards Automated Cardiac Catheterization Laboratory Activation using Medical Text Classification</a:t>
             </a:r>
-            <a:endParaRPr lang="en-US" sz="8000" b="1" kern="100" dirty="0">
+            <a:endParaRPr lang="en-US" sz="7200" b="1" kern="100" dirty="0">
               <a:solidFill>
                 <a:schemeClr val="bg1"/>
               </a:solidFill>
@@ -3122,7 +3122,7 @@
           <a:p>
             <a:pPr algn="ctr"/>
             <a:r>
-              <a:rPr lang="en-US" sz="5400" b="1" kern="100" dirty="0">
+              <a:rPr lang="en-US" sz="4800" b="1" kern="100" dirty="0">
                 <a:solidFill>
                   <a:schemeClr val="bg1"/>
                 </a:solidFill>
@@ -3133,7 +3133,7 @@
               <a:t>Ignasius Dwi </a:t>
             </a:r>
             <a:r>
-              <a:rPr lang="en-US" sz="5400" b="1" kern="100" dirty="0" err="1">
+              <a:rPr lang="en-US" sz="4800" b="1" kern="100" dirty="0" err="1">
                 <a:solidFill>
                   <a:schemeClr val="bg1"/>
                 </a:solidFill>
@@ -3144,7 +3144,7 @@
               <a:t>Sagita</a:t>
             </a:r>
             <a:r>
-              <a:rPr lang="en-US" sz="5400" b="1" kern="100" dirty="0">
+              <a:rPr lang="en-US" sz="4800" b="1" kern="100" dirty="0">
                 <a:solidFill>
                   <a:schemeClr val="bg1"/>
                 </a:solidFill>
@@ -3154,7 +3154,7 @@
               </a:rPr>
               <a:t> Christy, Ngwaru Munodawafa</a:t>
             </a:r>
-            <a:endParaRPr lang="en-US" sz="4000" kern="100" dirty="0">
+            <a:endParaRPr lang="en-US" sz="3600" kern="100" dirty="0">
               <a:solidFill>
                 <a:schemeClr val="bg1"/>
               </a:solidFill>
@@ -3166,7 +3166,7 @@
           <a:p>
             <a:pPr algn="ctr"/>
             <a:r>
-              <a:rPr lang="en-GB" sz="4000" b="1" kern="100" dirty="0">
+              <a:rPr lang="en-GB" sz="3600" b="1" kern="100" dirty="0">
                 <a:solidFill>
                   <a:schemeClr val="bg1"/>
                 </a:solidFill>
@@ -3180,7 +3180,7 @@
           <a:p>
             <a:pPr algn="ctr"/>
             <a:r>
-              <a:rPr lang="en-US" sz="4000" b="1" kern="100" dirty="0">
+              <a:rPr lang="en-US" sz="3600" b="1" kern="100" dirty="0">
                 <a:solidFill>
                   <a:schemeClr val="bg1"/>
                 </a:solidFill>
@@ -3188,9 +3188,9 @@
                 <a:ea typeface="MS UI Gothic" panose="020B0600070205080204" pitchFamily="34" charset="-128"/>
                 <a:cs typeface="TH SarabunPSK" panose="020B0500040200020003" pitchFamily="34" charset="-34"/>
               </a:rPr>
-              <a:t>Email: igch8514@student.su.se, munodawafan@gmail.com,</a:t>
+              <a:t>Email: igch8514@student.su.se, munodawafan@gmail.com</a:t>
             </a:r>
-            <a:endParaRPr lang="en-US" sz="4000" kern="100" dirty="0">
+            <a:endParaRPr lang="en-US" sz="3600" kern="100" dirty="0">
               <a:solidFill>
                 <a:schemeClr val="bg1"/>
               </a:solidFill>
@@ -3216,21 +3216,21 @@
           <p:nvPr>
             <p:extLst>
               <p:ext uri="{D42A27DB-BD31-4B8C-83A1-F6EECF244321}">
-                <p14:modId xmlns:p14="http://schemas.microsoft.com/office/powerpoint/2010/main" val="194139671"/>
+                <p14:modId xmlns:p14="http://schemas.microsoft.com/office/powerpoint/2010/main" val="1430969461"/>
               </p:ext>
             </p:extLst>
           </p:nvPr>
         </p:nvGraphicFramePr>
         <p:xfrm>
-          <a:off x="158573" y="6732879"/>
-          <a:ext cx="10265587" cy="10756467"/>
+          <a:off x="0" y="6164538"/>
+          <a:ext cx="10424160" cy="11142769"/>
         </p:xfrm>
         <a:graphic>
           <a:graphicData uri="http://schemas.openxmlformats.org/drawingml/2006/table">
             <a:tbl>
               <a:tblPr firstRow="1" bandRow="1"/>
               <a:tblGrid>
-                <a:gridCol w="10265587">
+                <a:gridCol w="10424160">
                   <a:extLst>
                     <a:ext uri="{9D8B030D-6E8A-4147-A177-3AD203B41FA5}">
                       <a16:colId xmlns:a16="http://schemas.microsoft.com/office/drawing/2014/main" val="20000"/>
@@ -3477,7 +3477,75 @@
                           <a:latin typeface="TH SarabunPSK" panose="020B0500040200020003" pitchFamily="34" charset="-34"/>
                           <a:cs typeface="TH SarabunPSK" panose="020B0500040200020003" pitchFamily="34" charset="-34"/>
                         </a:rPr>
-                        <a:t>Ischaemic Heart Disease is the leading cause of death world-wide responsible for 13% of all deaths. Ischaemic Heart Disease presents in acute cases as acute coronary syndromes (ACS). In acute coronary syndromes there is  need to reduce the time from the patient getting through the hospital door to the time of definitive treatment with balloon catheterization (Cannon CP, 2000). Artificial Intelligence systems have been implemented for automatic detection of ST elevated Myocardial Infarction (STEMI) from ECG (Robert Avram, William F. Fearon, 2024). These platforms have been linked with automatic activation of the Cardiac Catheterization Lab (Robert Avram, William F. Fearon, 2024). This has been demonstrated to reduce the door to balloon time.  </a:t>
+                        <a:t>Ischaemic Heart Disease is the leading cause of death world-wide responsible for 13% of all deaths. Ischaemic Heart Disease presents in acute cases as acute coronary syndromes (ACS). In acute coronary syndromes there is  need to reduce the time from the patient getting through the hospital door to the time of definitive treatment with balloon catheterization</a:t>
+                      </a:r>
+                      <a:r>
+                        <a:rPr lang="en-GB" sz="3200" i="0" baseline="30000" dirty="0">
+                          <a:solidFill>
+                            <a:srgbClr val="0070C0"/>
+                          </a:solidFill>
+                          <a:latin typeface="TH SarabunPSK" panose="020B0500040200020003" pitchFamily="34" charset="-34"/>
+                          <a:cs typeface="TH SarabunPSK" panose="020B0500040200020003" pitchFamily="34" charset="-34"/>
+                        </a:rPr>
+                        <a:t>1</a:t>
+                      </a:r>
+                      <a:r>
+                        <a:rPr lang="en-GB" sz="3200" i="0" dirty="0">
+                          <a:latin typeface="TH SarabunPSK" panose="020B0500040200020003" pitchFamily="34" charset="-34"/>
+                          <a:cs typeface="TH SarabunPSK" panose="020B0500040200020003" pitchFamily="34" charset="-34"/>
+                        </a:rPr>
+                        <a:t>. Artificial Intelligence systems have been implemented for automatic detection of ST elevated Myocardial Infarction (STEMI) from ECG</a:t>
+                      </a:r>
+                      <a:r>
+                        <a:rPr lang="en-GB" sz="3200" i="0" dirty="0">
+                          <a:solidFill>
+                            <a:srgbClr val="0070C0"/>
+                          </a:solidFill>
+                          <a:latin typeface="TH SarabunPSK" panose="020B0500040200020003" pitchFamily="34" charset="-34"/>
+                          <a:cs typeface="TH SarabunPSK" panose="020B0500040200020003" pitchFamily="34" charset="-34"/>
+                        </a:rPr>
+                        <a:t> </a:t>
+                      </a:r>
+                      <a:r>
+                        <a:rPr lang="en-GB" sz="3200" i="0" baseline="30000" dirty="0">
+                          <a:solidFill>
+                            <a:srgbClr val="0070C0"/>
+                          </a:solidFill>
+                          <a:latin typeface="TH SarabunPSK" panose="020B0500040200020003" pitchFamily="34" charset="-34"/>
+                          <a:cs typeface="TH SarabunPSK" panose="020B0500040200020003" pitchFamily="34" charset="-34"/>
+                        </a:rPr>
+                        <a:t>2</a:t>
+                      </a:r>
+                      <a:r>
+                        <a:rPr lang="en-GB" sz="3200" i="0" baseline="0" dirty="0">
+                          <a:latin typeface="TH SarabunPSK" panose="020B0500040200020003" pitchFamily="34" charset="-34"/>
+                          <a:cs typeface="TH SarabunPSK" panose="020B0500040200020003" pitchFamily="34" charset="-34"/>
+                        </a:rPr>
+                        <a:t>. </a:t>
+                      </a:r>
+                      <a:r>
+                        <a:rPr lang="en-GB" sz="3200" i="0" dirty="0">
+                          <a:latin typeface="TH SarabunPSK" panose="020B0500040200020003" pitchFamily="34" charset="-34"/>
+                          <a:cs typeface="TH SarabunPSK" panose="020B0500040200020003" pitchFamily="34" charset="-34"/>
+                        </a:rPr>
+                        <a:t>These platforms have been linked with automatic activation of the Cardiac Catheterization Lab </a:t>
+                      </a:r>
+                      <a:r>
+                        <a:rPr lang="en-GB" sz="3200" i="0" baseline="30000" dirty="0">
+                          <a:solidFill>
+                            <a:srgbClr val="0070C0"/>
+                          </a:solidFill>
+                          <a:latin typeface="TH SarabunPSK" panose="020B0500040200020003" pitchFamily="34" charset="-34"/>
+                          <a:cs typeface="TH SarabunPSK" panose="020B0500040200020003" pitchFamily="34" charset="-34"/>
+                        </a:rPr>
+                        <a:t>2</a:t>
+                      </a:r>
+                      <a:r>
+                        <a:rPr lang="en-GB" sz="3200" i="0" dirty="0">
+                          <a:latin typeface="TH SarabunPSK" panose="020B0500040200020003" pitchFamily="34" charset="-34"/>
+                          <a:cs typeface="TH SarabunPSK" panose="020B0500040200020003" pitchFamily="34" charset="-34"/>
+                        </a:rPr>
+                        <a:t>. This has been demonstrated to reduce the door to balloon time.  </a:t>
                       </a:r>
                     </a:p>
                     <a:p>
@@ -3502,7 +3570,32 @@
                           <a:latin typeface="TH SarabunPSK" panose="020B0500040200020003" pitchFamily="34" charset="-34"/>
                           <a:cs typeface="TH SarabunPSK" panose="020B0500040200020003" pitchFamily="34" charset="-34"/>
                         </a:rPr>
-                        <a:t>However, to decide to send the patient for emergency cardiac catheterisation it is important to consider the patient’s presenting history, ECG results and the results of lab investigations. As soon as the decision is made the Team that works in the catheterisation lab must be notified to prepare for the patient. Our research looks at using a LLM to use text in the Electronic Health Record (EHR) which includes the History of Presenting illness (HPI), Physical Examination, ECG report and lab results (Troponin results) to automatically make the decision and send a notification to the catheterisation lab. </a:t>
+                        <a:t>However, to decide to send the patient for emergency cardiac catheterisation it is important to consider the patient’s presenting history, ECG results and the results of lab investigations. As soon as the decision is made the Team that works in the catheterisation lab must be notified to prepare for the patient. Our research looks at using a LLM to use text in the Electronic Health Record (EHR) which includes the History of Presenting illness (HPI), Physical Examination, ECG report and lab results (Troponin results) to automatically make the decision and send a notification to the catheterisation lab. Essentially this is two class medical  classification. </a:t>
+                      </a:r>
+                    </a:p>
+                    <a:p>
+                      <a:pPr marL="182880">
+                        <a:lnSpc>
+                          <a:spcPct val="100000"/>
+                        </a:lnSpc>
+                      </a:pPr>
+                      <a:endParaRPr lang="en-GB" sz="3200" i="0" dirty="0">
+                        <a:latin typeface="TH SarabunPSK" panose="020B0500040200020003" pitchFamily="34" charset="-34"/>
+                        <a:cs typeface="TH SarabunPSK" panose="020B0500040200020003" pitchFamily="34" charset="-34"/>
+                      </a:endParaRPr>
+                    </a:p>
+                    <a:p>
+                      <a:pPr marL="182880">
+                        <a:lnSpc>
+                          <a:spcPct val="100000"/>
+                        </a:lnSpc>
+                      </a:pPr>
+                      <a:r>
+                        <a:rPr lang="en-GB" sz="3200" i="0" dirty="0">
+                          <a:latin typeface="TH SarabunPSK" panose="020B0500040200020003" pitchFamily="34" charset="-34"/>
+                          <a:cs typeface="TH SarabunPSK" panose="020B0500040200020003" pitchFamily="34" charset="-34"/>
+                        </a:rPr>
+                        <a:t>In previous work ….</a:t>
                       </a:r>
                       <a:endParaRPr sz="2800" i="0" dirty="0">
                         <a:latin typeface="TH SarabunPSK" panose="020B0500040200020003" pitchFamily="34" charset="-34"/>
@@ -3561,21 +3654,21 @@
           <p:nvPr>
             <p:extLst>
               <p:ext uri="{D42A27DB-BD31-4B8C-83A1-F6EECF244321}">
-                <p14:modId xmlns:p14="http://schemas.microsoft.com/office/powerpoint/2010/main" val="700463570"/>
+                <p14:modId xmlns:p14="http://schemas.microsoft.com/office/powerpoint/2010/main" val="255867981"/>
               </p:ext>
             </p:extLst>
           </p:nvPr>
         </p:nvGraphicFramePr>
         <p:xfrm>
-          <a:off x="158572" y="17708302"/>
-          <a:ext cx="10265587" cy="3310890"/>
+          <a:off x="42826" y="17708302"/>
+          <a:ext cx="10381334" cy="4469130"/>
         </p:xfrm>
         <a:graphic>
           <a:graphicData uri="http://schemas.openxmlformats.org/drawingml/2006/table">
             <a:tbl>
               <a:tblPr firstRow="1" bandRow="1"/>
               <a:tblGrid>
-                <a:gridCol w="10265587">
+                <a:gridCol w="10381334">
                   <a:extLst>
                     <a:ext uri="{9D8B030D-6E8A-4147-A177-3AD203B41FA5}">
                       <a16:colId xmlns:a16="http://schemas.microsoft.com/office/drawing/2014/main" val="20000"/>
@@ -3798,20 +3891,6 @@
                       </a:lvl9pPr>
                     </a:lstStyle>
                     <a:p>
-                      <a:pPr>
-                        <a:lnSpc>
-                          <a:spcPct val="100000"/>
-                        </a:lnSpc>
-                        <a:spcBef>
-                          <a:spcPts val="30"/>
-                        </a:spcBef>
-                      </a:pPr>
-                      <a:endParaRPr sz="1250" dirty="0">
-                        <a:latin typeface="TH SarabunPSK" panose="020B0500040200020003" pitchFamily="34" charset="-34"/>
-                        <a:cs typeface="TH SarabunPSK" panose="020B0500040200020003" pitchFamily="34" charset="-34"/>
-                      </a:endParaRPr>
-                    </a:p>
-                    <a:p>
                       <a:pPr marL="182880">
                         <a:lnSpc>
                           <a:spcPct val="100000"/>
@@ -3825,7 +3904,38 @@
                           <a:latin typeface="TH SarabunPSK" panose="020B0500040200020003" pitchFamily="34" charset="-34"/>
                           <a:cs typeface="TH SarabunPSK" panose="020B0500040200020003" pitchFamily="34" charset="-34"/>
                         </a:rPr>
-                        <a:t>Is it possible to predict which patients need cardiac catheterization using text-based classification methods using information in the patient Electronic Health Record ( HPI, Physical, ECG report, lab results) for patients with possible acute coronary syndromes. </a:t>
+                        <a:t> Can transformer based models predict which patients need cardiac catheterization using text-based classification methods using information in the patient Electronic Health Record ( HPI, Physical, ECG report, lab results) for patients with possible acute coronary syndromes. </a:t>
+                      </a:r>
+                    </a:p>
+                    <a:p>
+                      <a:pPr marL="182880">
+                        <a:lnSpc>
+                          <a:spcPct val="100000"/>
+                        </a:lnSpc>
+                      </a:pPr>
+                      <a:endParaRPr lang="en-US" sz="3200" b="1" dirty="0">
+                        <a:solidFill>
+                          <a:schemeClr val="tx1"/>
+                        </a:solidFill>
+                        <a:latin typeface="TH SarabunPSK" panose="020B0500040200020003" pitchFamily="34" charset="-34"/>
+                        <a:cs typeface="TH SarabunPSK" panose="020B0500040200020003" pitchFamily="34" charset="-34"/>
+                      </a:endParaRPr>
+                    </a:p>
+                    <a:p>
+                      <a:pPr marL="182880">
+                        <a:lnSpc>
+                          <a:spcPct val="100000"/>
+                        </a:lnSpc>
+                      </a:pPr>
+                      <a:r>
+                        <a:rPr lang="en-US" sz="3200" b="1" dirty="0">
+                          <a:solidFill>
+                            <a:schemeClr val="tx1"/>
+                          </a:solidFill>
+                          <a:latin typeface="TH SarabunPSK" panose="020B0500040200020003" pitchFamily="34" charset="-34"/>
+                          <a:cs typeface="TH SarabunPSK" panose="020B0500040200020003" pitchFamily="34" charset="-34"/>
+                        </a:rPr>
+                        <a:t>Do knowledge graphs and Multi Agent Systems improve performance of transformer classification for cardiac catheterization need for patients with possible acute coronary syndromes. </a:t>
                       </a:r>
                     </a:p>
                   </a:txBody>
@@ -3880,14 +3990,14 @@
           <p:nvPr>
             <p:extLst>
               <p:ext uri="{D42A27DB-BD31-4B8C-83A1-F6EECF244321}">
-                <p14:modId xmlns:p14="http://schemas.microsoft.com/office/powerpoint/2010/main" val="2226493172"/>
+                <p14:modId xmlns:p14="http://schemas.microsoft.com/office/powerpoint/2010/main" val="2803357915"/>
               </p:ext>
             </p:extLst>
           </p:nvPr>
         </p:nvGraphicFramePr>
         <p:xfrm>
-          <a:off x="10698162" y="19363747"/>
-          <a:ext cx="10534077" cy="3181295"/>
+          <a:off x="10698162" y="19363748"/>
+          <a:ext cx="10534077" cy="1907167"/>
         </p:xfrm>
         <a:graphic>
           <a:graphicData uri="http://schemas.openxmlformats.org/drawingml/2006/table">
@@ -3902,7 +4012,7 @@
                   </a:extLst>
                 </a:gridCol>
               </a:tblGrid>
-              <a:tr h="451115">
+              <a:tr h="289389">
                 <a:tc>
                   <a:txBody>
                     <a:bodyPr/>
@@ -4038,7 +4148,7 @@
                   </a:ext>
                 </a:extLst>
               </a:tr>
-              <a:tr h="2617415">
+              <a:tr h="1343287">
                 <a:tc>
                   <a:txBody>
                     <a:bodyPr/>
@@ -4196,14 +4306,14 @@
           <p:nvPr>
             <p:extLst>
               <p:ext uri="{D42A27DB-BD31-4B8C-83A1-F6EECF244321}">
-                <p14:modId xmlns:p14="http://schemas.microsoft.com/office/powerpoint/2010/main" val="1649916616"/>
+                <p14:modId xmlns:p14="http://schemas.microsoft.com/office/powerpoint/2010/main" val="3550127033"/>
               </p:ext>
             </p:extLst>
           </p:nvPr>
         </p:nvGraphicFramePr>
         <p:xfrm>
-          <a:off x="10698161" y="22783413"/>
-          <a:ext cx="10534077" cy="7133112"/>
+          <a:off x="10698162" y="21386972"/>
+          <a:ext cx="10534077" cy="7620792"/>
         </p:xfrm>
         <a:graphic>
           <a:graphicData uri="http://schemas.openxmlformats.org/drawingml/2006/table">
@@ -4480,28 +4590,41 @@
                           <a:spcPct val="100000"/>
                         </a:lnSpc>
                       </a:pPr>
-                      <a:endParaRPr lang="en-GB" sz="3200" dirty="0">
-                        <a:latin typeface="TH SarabunPSK" panose="020B0500040200020003" pitchFamily="34" charset="-34"/>
-                        <a:cs typeface="TH SarabunPSK" panose="020B0500040200020003" pitchFamily="34" charset="-34"/>
-                      </a:endParaRPr>
-                    </a:p>
-                    <a:p>
-                      <a:pPr marL="182880">
-                        <a:lnSpc>
-                          <a:spcPct val="100000"/>
-                        </a:lnSpc>
-                      </a:pPr>
-                      <a:endParaRPr lang="en-ZA" sz="3200" dirty="0">
-                        <a:latin typeface="TH SarabunPSK" panose="020B0500040200020003" pitchFamily="34" charset="-34"/>
-                        <a:cs typeface="TH SarabunPSK" panose="020B0500040200020003" pitchFamily="34" charset="-34"/>
-                      </a:endParaRPr>
-                    </a:p>
-                    <a:p>
-                      <a:pPr marL="182880">
-                        <a:lnSpc>
-                          <a:spcPct val="100000"/>
-                        </a:lnSpc>
-                      </a:pPr>
+                      <a:r>
+                        <a:rPr lang="en-GB" sz="3200" dirty="0">
+                          <a:latin typeface="TH SarabunPSK" panose="020B0500040200020003" pitchFamily="34" charset="-34"/>
+                          <a:cs typeface="TH SarabunPSK" panose="020B0500040200020003" pitchFamily="34" charset="-34"/>
+                        </a:rPr>
+                        <a:t>4. Maarten Falter, Dries </a:t>
+                      </a:r>
+                      <a:r>
+                        <a:rPr lang="en-GB" sz="3200" dirty="0" err="1">
+                          <a:latin typeface="TH SarabunPSK" panose="020B0500040200020003" pitchFamily="34" charset="-34"/>
+                          <a:cs typeface="TH SarabunPSK" panose="020B0500040200020003" pitchFamily="34" charset="-34"/>
+                        </a:rPr>
+                        <a:t>Godderis</a:t>
+                      </a:r>
+                      <a:r>
+                        <a:rPr lang="en-GB" sz="3200" dirty="0">
+                          <a:latin typeface="TH SarabunPSK" panose="020B0500040200020003" pitchFamily="34" charset="-34"/>
+                          <a:cs typeface="TH SarabunPSK" panose="020B0500040200020003" pitchFamily="34" charset="-34"/>
+                        </a:rPr>
+                        <a:t>, Martijn </a:t>
+                      </a:r>
+                      <a:r>
+                        <a:rPr lang="en-GB" sz="3200" dirty="0" err="1">
+                          <a:latin typeface="TH SarabunPSK" panose="020B0500040200020003" pitchFamily="34" charset="-34"/>
+                          <a:cs typeface="TH SarabunPSK" panose="020B0500040200020003" pitchFamily="34" charset="-34"/>
+                        </a:rPr>
+                        <a:t>Scherrenberg</a:t>
+                      </a:r>
+                      <a:r>
+                        <a:rPr lang="en-GB" sz="3200" dirty="0">
+                          <a:latin typeface="TH SarabunPSK" panose="020B0500040200020003" pitchFamily="34" charset="-34"/>
+                          <a:cs typeface="TH SarabunPSK" panose="020B0500040200020003" pitchFamily="34" charset="-34"/>
+                        </a:rPr>
+                        <a:t>, et al, Using natural language processing for automated classification of disease and to identify misclassified ICD codes in cardiac disease, European Heart Journal - Digital Health, Volume 5, Issue 3, May 2024, Pages 229–234, https://doi.org/10.1093/ehjdh/ztae008</a:t>
+                      </a:r>
                       <a:endParaRPr lang="en-ZA" sz="3200" dirty="0">
                         <a:latin typeface="TH SarabunPSK" panose="020B0500040200020003" pitchFamily="34" charset="-34"/>
                         <a:cs typeface="TH SarabunPSK" panose="020B0500040200020003" pitchFamily="34" charset="-34"/>
@@ -4559,21 +4682,21 @@
           <p:nvPr>
             <p:extLst>
               <p:ext uri="{D42A27DB-BD31-4B8C-83A1-F6EECF244321}">
-                <p14:modId xmlns:p14="http://schemas.microsoft.com/office/powerpoint/2010/main" val="3273818523"/>
+                <p14:modId xmlns:p14="http://schemas.microsoft.com/office/powerpoint/2010/main" val="1602373120"/>
               </p:ext>
             </p:extLst>
           </p:nvPr>
         </p:nvGraphicFramePr>
         <p:xfrm>
-          <a:off x="274320" y="21386972"/>
-          <a:ext cx="10149840" cy="8601810"/>
+          <a:off x="42826" y="22270892"/>
+          <a:ext cx="10424160" cy="7996383"/>
         </p:xfrm>
         <a:graphic>
           <a:graphicData uri="http://schemas.openxmlformats.org/drawingml/2006/table">
             <a:tbl>
               <a:tblPr firstRow="1" bandRow="1"/>
               <a:tblGrid>
-                <a:gridCol w="10149840">
+                <a:gridCol w="10424160">
                   <a:extLst>
                     <a:ext uri="{9D8B030D-6E8A-4147-A177-3AD203B41FA5}">
                       <a16:colId xmlns:a16="http://schemas.microsoft.com/office/drawing/2014/main" val="20000"/>
@@ -4581,7 +4704,7 @@
                   </a:extLst>
                 </a:gridCol>
               </a:tblGrid>
-              <a:tr h="830335">
+              <a:tr h="771893">
                 <a:tc>
                   <a:txBody>
                     <a:bodyPr/>
@@ -4717,7 +4840,7 @@
                   </a:ext>
                 </a:extLst>
               </a:tr>
-              <a:tr h="7771475">
+              <a:tr h="7224490">
                 <a:tc>
                   <a:txBody>
                     <a:bodyPr/>
@@ -4820,7 +4943,35 @@
                           <a:latin typeface="TH SarabunPSK" panose="020B0500040200020003" pitchFamily="34" charset="-34"/>
                           <a:cs typeface="TH SarabunPSK" panose="020B0500040200020003" pitchFamily="34" charset="-34"/>
                         </a:rPr>
-                        <a:t>The approach was to be able to classify patients on whether they needed  cardiac catheterization or not based on information in the Electronic Health Record (EHR). We used the mimic-iv-ext-cardiac-disease-1.0.0 dataset from the MIT computational physiology lab. The dataset consisted of patients with heart conditions. We used a four methods to classify patients that needed cardiac catheterization based on the EHR text. 1. Term Frequency - Inverse Document Frequency (TF-IDF) 2. Baseline BERT Model 3. BERT plus Knowledge graph</a:t>
+                        <a:t>The approach was to be able to classify patients on whether they needed  cardiac catheterization or not based on information in the Electronic Health Record (EHR). We used the mimic-iv-ext-cardiac-disease-1.0.0 dataset from the MIT computational physiology lab. The dataset consisted of 4761 patients with heart conditions. Data cleaning included removing patients with possible data leak in the history. We used a four methods to classify patients that needed cardiac catheterization based on the EHR text. 1. Term Frequency - Inverse Document Frequency (TF-IDF) with Logistic </a:t>
+                      </a:r>
+                      <a:r>
+                        <a:rPr lang="en-US" sz="3200" dirty="0" err="1">
+                          <a:latin typeface="TH SarabunPSK" panose="020B0500040200020003" pitchFamily="34" charset="-34"/>
+                          <a:cs typeface="TH SarabunPSK" panose="020B0500040200020003" pitchFamily="34" charset="-34"/>
+                        </a:rPr>
+                        <a:t>regresssion</a:t>
+                      </a:r>
+                      <a:r>
+                        <a:rPr lang="en-US" sz="3200" dirty="0">
+                          <a:latin typeface="TH SarabunPSK" panose="020B0500040200020003" pitchFamily="34" charset="-34"/>
+                          <a:cs typeface="TH SarabunPSK" panose="020B0500040200020003" pitchFamily="34" charset="-34"/>
+                        </a:rPr>
+                        <a:t> 2. Baseline </a:t>
+                      </a:r>
+                      <a:r>
+                        <a:rPr lang="en-US" sz="3200" dirty="0" err="1">
+                          <a:latin typeface="TH SarabunPSK" panose="020B0500040200020003" pitchFamily="34" charset="-34"/>
+                          <a:cs typeface="TH SarabunPSK" panose="020B0500040200020003" pitchFamily="34" charset="-34"/>
+                        </a:rPr>
+                        <a:t>Bio_ClinicalBERT</a:t>
+                      </a:r>
+                      <a:r>
+                        <a:rPr lang="en-US" sz="3200" dirty="0">
+                          <a:latin typeface="TH SarabunPSK" panose="020B0500040200020003" pitchFamily="34" charset="-34"/>
+                          <a:cs typeface="TH SarabunPSK" panose="020B0500040200020003" pitchFamily="34" charset="-34"/>
+                        </a:rPr>
+                        <a:t> Model 3. BERT plus Knowledge graph</a:t>
                       </a:r>
                     </a:p>
                     <a:p>
@@ -4933,13 +5084,13 @@
           <p:nvPr>
             <p:extLst>
               <p:ext uri="{D42A27DB-BD31-4B8C-83A1-F6EECF244321}">
-                <p14:modId xmlns:p14="http://schemas.microsoft.com/office/powerpoint/2010/main" val="343582800"/>
+                <p14:modId xmlns:p14="http://schemas.microsoft.com/office/powerpoint/2010/main" val="3740915891"/>
               </p:ext>
             </p:extLst>
           </p:nvPr>
         </p:nvGraphicFramePr>
         <p:xfrm>
-          <a:off x="10698162" y="6732881"/>
+          <a:off x="10698162" y="6175989"/>
           <a:ext cx="10143692" cy="12481094"/>
         </p:xfrm>
         <a:graphic>
@@ -5687,13 +5838,13 @@
           <p:nvPr>
             <p:extLst>
               <p:ext uri="{D42A27DB-BD31-4B8C-83A1-F6EECF244321}">
-                <p14:modId xmlns:p14="http://schemas.microsoft.com/office/powerpoint/2010/main" val="3565141533"/>
+                <p14:modId xmlns:p14="http://schemas.microsoft.com/office/powerpoint/2010/main" val="3273931509"/>
               </p:ext>
             </p:extLst>
           </p:nvPr>
         </p:nvGraphicFramePr>
         <p:xfrm>
-          <a:off x="10926232" y="8603928"/>
+          <a:off x="10926233" y="7082792"/>
           <a:ext cx="8804699" cy="2926080"/>
         </p:xfrm>
         <a:graphic>

--- a/draft_poster.pptx
+++ b/draft_poster.pptx
@@ -3066,7 +3066,7 @@
         </p:nvSpPr>
         <p:spPr bwMode="auto">
           <a:xfrm>
-            <a:off x="-1" y="1539095"/>
+            <a:off x="71120" y="-30683"/>
             <a:ext cx="21396326" cy="4469128"/>
           </a:xfrm>
           <a:prstGeom prst="rect">
@@ -3216,21 +3216,21 @@
           <p:nvPr>
             <p:extLst>
               <p:ext uri="{D42A27DB-BD31-4B8C-83A1-F6EECF244321}">
-                <p14:modId xmlns:p14="http://schemas.microsoft.com/office/powerpoint/2010/main" val="1430969461"/>
+                <p14:modId xmlns:p14="http://schemas.microsoft.com/office/powerpoint/2010/main" val="189510950"/>
               </p:ext>
             </p:extLst>
           </p:nvPr>
         </p:nvGraphicFramePr>
         <p:xfrm>
-          <a:off x="0" y="6164538"/>
-          <a:ext cx="10424160" cy="11142769"/>
+          <a:off x="79939" y="4419130"/>
+          <a:ext cx="10609404" cy="10636800"/>
         </p:xfrm>
         <a:graphic>
           <a:graphicData uri="http://schemas.openxmlformats.org/drawingml/2006/table">
             <a:tbl>
               <a:tblPr firstRow="1" bandRow="1"/>
               <a:tblGrid>
-                <a:gridCol w="10424160">
+                <a:gridCol w="10609404">
                   <a:extLst>
                     <a:ext uri="{9D8B030D-6E8A-4147-A177-3AD203B41FA5}">
                       <a16:colId xmlns:a16="http://schemas.microsoft.com/office/drawing/2014/main" val="20000"/>
@@ -3238,7 +3238,7 @@
                   </a:extLst>
                 </a:gridCol>
               </a:tblGrid>
-              <a:tr h="707179">
+              <a:tr h="688890">
                 <a:tc>
                   <a:txBody>
                     <a:bodyPr/>
@@ -3374,7 +3374,7 @@
                   </a:ext>
                 </a:extLst>
               </a:tr>
-              <a:tr h="10049288">
+              <a:tr h="9852949">
                 <a:tc>
                   <a:txBody>
                     <a:bodyPr/>
@@ -3592,12 +3592,18 @@
                       </a:pPr>
                       <a:r>
                         <a:rPr lang="en-GB" sz="3200" i="0" dirty="0">
+                          <a:highlight>
+                            <a:srgbClr val="FF0000"/>
+                          </a:highlight>
                           <a:latin typeface="TH SarabunPSK" panose="020B0500040200020003" pitchFamily="34" charset="-34"/>
                           <a:cs typeface="TH SarabunPSK" panose="020B0500040200020003" pitchFamily="34" charset="-34"/>
                         </a:rPr>
-                        <a:t>In previous work ….</a:t>
+                        <a:t>In previous work …., citations, </a:t>
                       </a:r>
                       <a:endParaRPr sz="2800" i="0" dirty="0">
+                        <a:highlight>
+                          <a:srgbClr val="FF0000"/>
+                        </a:highlight>
                         <a:latin typeface="TH SarabunPSK" panose="020B0500040200020003" pitchFamily="34" charset="-34"/>
                         <a:cs typeface="TH SarabunPSK" panose="020B0500040200020003" pitchFamily="34" charset="-34"/>
                       </a:endParaRPr>
@@ -3654,21 +3660,21 @@
           <p:nvPr>
             <p:extLst>
               <p:ext uri="{D42A27DB-BD31-4B8C-83A1-F6EECF244321}">
-                <p14:modId xmlns:p14="http://schemas.microsoft.com/office/powerpoint/2010/main" val="255867981"/>
+                <p14:modId xmlns:p14="http://schemas.microsoft.com/office/powerpoint/2010/main" val="4010524944"/>
               </p:ext>
             </p:extLst>
           </p:nvPr>
         </p:nvGraphicFramePr>
         <p:xfrm>
-          <a:off x="42826" y="17708302"/>
-          <a:ext cx="10381334" cy="4469130"/>
+          <a:off x="-2" y="16714475"/>
+          <a:ext cx="10609404" cy="4469130"/>
         </p:xfrm>
         <a:graphic>
           <a:graphicData uri="http://schemas.openxmlformats.org/drawingml/2006/table">
             <a:tbl>
               <a:tblPr firstRow="1" bandRow="1"/>
               <a:tblGrid>
-                <a:gridCol w="10381334">
+                <a:gridCol w="10609404">
                   <a:extLst>
                     <a:ext uri="{9D8B030D-6E8A-4147-A177-3AD203B41FA5}">
                       <a16:colId xmlns:a16="http://schemas.microsoft.com/office/drawing/2014/main" val="20000"/>
@@ -3676,7 +3682,7 @@
                   </a:extLst>
                 </a:gridCol>
               </a:tblGrid>
-              <a:tr h="408153">
+              <a:tr h="559122">
                 <a:tc>
                   <a:txBody>
                     <a:bodyPr/>
@@ -3812,7 +3818,7 @@
                   </a:ext>
                 </a:extLst>
               </a:tr>
-              <a:tr h="2747010">
+              <a:tr h="3872300">
                 <a:tc>
                   <a:txBody>
                     <a:bodyPr/>
@@ -3904,7 +3910,17 @@
                           <a:latin typeface="TH SarabunPSK" panose="020B0500040200020003" pitchFamily="34" charset="-34"/>
                           <a:cs typeface="TH SarabunPSK" panose="020B0500040200020003" pitchFamily="34" charset="-34"/>
                         </a:rPr>
-                        <a:t> Can transformer based models predict which patients need cardiac catheterization using text-based classification methods using information in the patient Electronic Health Record ( HPI, Physical, ECG report, lab results) for patients with possible acute coronary syndromes. </a:t>
+                        <a:t> </a:t>
+                      </a:r>
+                      <a:r>
+                        <a:rPr lang="en-US" sz="3200" b="0" dirty="0">
+                          <a:solidFill>
+                            <a:schemeClr val="tx1"/>
+                          </a:solidFill>
+                          <a:latin typeface="TH SarabunPSK" panose="020B0500040200020003" pitchFamily="34" charset="-34"/>
+                          <a:cs typeface="TH SarabunPSK" panose="020B0500040200020003" pitchFamily="34" charset="-34"/>
+                        </a:rPr>
+                        <a:t>Can transformer based models predict which patients need cardiac catheterization using text-based classification methods using information in the patient Electronic Health Record ( HPI, Physical, ECG report, lab results) for patients with possible acute coronary syndromes. </a:t>
                       </a:r>
                     </a:p>
                     <a:p>
@@ -3913,7 +3929,7 @@
                           <a:spcPct val="100000"/>
                         </a:lnSpc>
                       </a:pPr>
-                      <a:endParaRPr lang="en-US" sz="3200" b="1" dirty="0">
+                      <a:endParaRPr lang="en-US" sz="3200" b="0" dirty="0">
                         <a:solidFill>
                           <a:schemeClr val="tx1"/>
                         </a:solidFill>
@@ -3928,7 +3944,7 @@
                         </a:lnSpc>
                       </a:pPr>
                       <a:r>
-                        <a:rPr lang="en-US" sz="3200" b="1" dirty="0">
+                        <a:rPr lang="en-US" sz="3200" b="0" dirty="0">
                           <a:solidFill>
                             <a:schemeClr val="tx1"/>
                           </a:solidFill>
@@ -3990,14 +4006,14 @@
           <p:nvPr>
             <p:extLst>
               <p:ext uri="{D42A27DB-BD31-4B8C-83A1-F6EECF244321}">
-                <p14:modId xmlns:p14="http://schemas.microsoft.com/office/powerpoint/2010/main" val="2803357915"/>
+                <p14:modId xmlns:p14="http://schemas.microsoft.com/office/powerpoint/2010/main" val="54875809"/>
               </p:ext>
             </p:extLst>
           </p:nvPr>
         </p:nvGraphicFramePr>
         <p:xfrm>
-          <a:off x="10698162" y="19363748"/>
-          <a:ext cx="10534077" cy="1907167"/>
+          <a:off x="10637041" y="18533623"/>
+          <a:ext cx="10534077" cy="2221230"/>
         </p:xfrm>
         <a:graphic>
           <a:graphicData uri="http://schemas.openxmlformats.org/drawingml/2006/table">
@@ -4251,7 +4267,7 @@
                           <a:latin typeface="TH SarabunPSK" panose="020B0500040200020003" pitchFamily="34" charset="-34"/>
                           <a:cs typeface="TH SarabunPSK" panose="020B0500040200020003" pitchFamily="34" charset="-34"/>
                         </a:rPr>
-                        <a:t>The conclusion section should be included.</a:t>
+                        <a:t>Inconclusion, we noticed that the simple model that used TF – IDF and logistic regression performed well but using a multi agent system and knowledge graph did yield improvements in recall which is important for this application. </a:t>
                       </a:r>
                     </a:p>
                   </a:txBody>
@@ -4306,14 +4322,14 @@
           <p:nvPr>
             <p:extLst>
               <p:ext uri="{D42A27DB-BD31-4B8C-83A1-F6EECF244321}">
-                <p14:modId xmlns:p14="http://schemas.microsoft.com/office/powerpoint/2010/main" val="3550127033"/>
+                <p14:modId xmlns:p14="http://schemas.microsoft.com/office/powerpoint/2010/main" val="1571992389"/>
               </p:ext>
             </p:extLst>
           </p:nvPr>
         </p:nvGraphicFramePr>
         <p:xfrm>
-          <a:off x="10698162" y="21386972"/>
-          <a:ext cx="10534077" cy="7620792"/>
+          <a:off x="10698162" y="20899120"/>
+          <a:ext cx="10534077" cy="8108644"/>
         </p:xfrm>
         <a:graphic>
           <a:graphicData uri="http://schemas.openxmlformats.org/drawingml/2006/table">
@@ -4328,7 +4344,7 @@
                   </a:extLst>
                 </a:gridCol>
               </a:tblGrid>
-              <a:tr h="789462">
+              <a:tr h="840000">
                 <a:tc>
                   <a:txBody>
                     <a:bodyPr/>
@@ -4464,7 +4480,7 @@
                   </a:ext>
                 </a:extLst>
               </a:tr>
-              <a:tr h="5666630">
+              <a:tr h="7268644">
                 <a:tc>
                   <a:txBody>
                     <a:bodyPr/>
@@ -4549,7 +4565,7 @@
                         </a:lnSpc>
                       </a:pPr>
                       <a:r>
-                        <a:rPr lang="en-GB" sz="3200" dirty="0">
+                        <a:rPr lang="en-GB" sz="2400" dirty="0">
                           <a:latin typeface="TH SarabunPSK" panose="020B0500040200020003" pitchFamily="34" charset="-34"/>
                           <a:cs typeface="TH SarabunPSK" panose="020B0500040200020003" pitchFamily="34" charset="-34"/>
                         </a:rPr>
@@ -4563,7 +4579,7 @@
                         </a:lnSpc>
                       </a:pPr>
                       <a:r>
-                        <a:rPr lang="en-GB" sz="3200" dirty="0">
+                        <a:rPr lang="en-GB" sz="2400" dirty="0">
                           <a:latin typeface="TH SarabunPSK" panose="020B0500040200020003" pitchFamily="34" charset="-34"/>
                           <a:cs typeface="TH SarabunPSK" panose="020B0500040200020003" pitchFamily="34" charset="-34"/>
                         </a:rPr>
@@ -4577,7 +4593,7 @@
                         </a:lnSpc>
                       </a:pPr>
                       <a:r>
-                        <a:rPr lang="en-GB" sz="3200" dirty="0">
+                        <a:rPr lang="en-GB" sz="2400" dirty="0">
                           <a:latin typeface="TH SarabunPSK" panose="020B0500040200020003" pitchFamily="34" charset="-34"/>
                           <a:cs typeface="TH SarabunPSK" panose="020B0500040200020003" pitchFamily="34" charset="-34"/>
                         </a:rPr>
@@ -4591,41 +4607,41 @@
                         </a:lnSpc>
                       </a:pPr>
                       <a:r>
-                        <a:rPr lang="en-GB" sz="3200" dirty="0">
+                        <a:rPr lang="en-GB" sz="2400" dirty="0">
                           <a:latin typeface="TH SarabunPSK" panose="020B0500040200020003" pitchFamily="34" charset="-34"/>
                           <a:cs typeface="TH SarabunPSK" panose="020B0500040200020003" pitchFamily="34" charset="-34"/>
                         </a:rPr>
                         <a:t>4. Maarten Falter, Dries </a:t>
                       </a:r>
                       <a:r>
-                        <a:rPr lang="en-GB" sz="3200" dirty="0" err="1">
+                        <a:rPr lang="en-GB" sz="2400" dirty="0" err="1">
                           <a:latin typeface="TH SarabunPSK" panose="020B0500040200020003" pitchFamily="34" charset="-34"/>
                           <a:cs typeface="TH SarabunPSK" panose="020B0500040200020003" pitchFamily="34" charset="-34"/>
                         </a:rPr>
                         <a:t>Godderis</a:t>
                       </a:r>
                       <a:r>
-                        <a:rPr lang="en-GB" sz="3200" dirty="0">
+                        <a:rPr lang="en-GB" sz="2400" dirty="0">
                           <a:latin typeface="TH SarabunPSK" panose="020B0500040200020003" pitchFamily="34" charset="-34"/>
                           <a:cs typeface="TH SarabunPSK" panose="020B0500040200020003" pitchFamily="34" charset="-34"/>
                         </a:rPr>
                         <a:t>, Martijn </a:t>
                       </a:r>
                       <a:r>
-                        <a:rPr lang="en-GB" sz="3200" dirty="0" err="1">
+                        <a:rPr lang="en-GB" sz="2400" dirty="0" err="1">
                           <a:latin typeface="TH SarabunPSK" panose="020B0500040200020003" pitchFamily="34" charset="-34"/>
                           <a:cs typeface="TH SarabunPSK" panose="020B0500040200020003" pitchFamily="34" charset="-34"/>
                         </a:rPr>
                         <a:t>Scherrenberg</a:t>
                       </a:r>
                       <a:r>
-                        <a:rPr lang="en-GB" sz="3200" dirty="0">
+                        <a:rPr lang="en-GB" sz="2400" dirty="0">
                           <a:latin typeface="TH SarabunPSK" panose="020B0500040200020003" pitchFamily="34" charset="-34"/>
                           <a:cs typeface="TH SarabunPSK" panose="020B0500040200020003" pitchFamily="34" charset="-34"/>
                         </a:rPr>
                         <a:t>, et al, Using natural language processing for automated classification of disease and to identify misclassified ICD codes in cardiac disease, European Heart Journal - Digital Health, Volume 5, Issue 3, May 2024, Pages 229–234, https://doi.org/10.1093/ehjdh/ztae008</a:t>
                       </a:r>
-                      <a:endParaRPr lang="en-ZA" sz="3200" dirty="0">
+                      <a:endParaRPr lang="en-ZA" sz="2400" dirty="0">
                         <a:latin typeface="TH SarabunPSK" panose="020B0500040200020003" pitchFamily="34" charset="-34"/>
                         <a:cs typeface="TH SarabunPSK" panose="020B0500040200020003" pitchFamily="34" charset="-34"/>
                       </a:endParaRPr>
@@ -4682,21 +4698,21 @@
           <p:nvPr>
             <p:extLst>
               <p:ext uri="{D42A27DB-BD31-4B8C-83A1-F6EECF244321}">
-                <p14:modId xmlns:p14="http://schemas.microsoft.com/office/powerpoint/2010/main" val="1602373120"/>
+                <p14:modId xmlns:p14="http://schemas.microsoft.com/office/powerpoint/2010/main" val="3609255569"/>
               </p:ext>
             </p:extLst>
           </p:nvPr>
         </p:nvGraphicFramePr>
         <p:xfrm>
-          <a:off x="42826" y="22270892"/>
-          <a:ext cx="10424160" cy="7996383"/>
+          <a:off x="-1" y="21168991"/>
+          <a:ext cx="10609403" cy="9092004"/>
         </p:xfrm>
         <a:graphic>
           <a:graphicData uri="http://schemas.openxmlformats.org/drawingml/2006/table">
             <a:tbl>
               <a:tblPr firstRow="1" bandRow="1"/>
               <a:tblGrid>
-                <a:gridCol w="10424160">
+                <a:gridCol w="10609403">
                   <a:extLst>
                     <a:ext uri="{9D8B030D-6E8A-4147-A177-3AD203B41FA5}">
                       <a16:colId xmlns:a16="http://schemas.microsoft.com/office/drawing/2014/main" val="20000"/>
@@ -4704,7 +4720,7 @@
                   </a:extLst>
                 </a:gridCol>
               </a:tblGrid>
-              <a:tr h="771893">
+              <a:tr h="607134">
                 <a:tc>
                   <a:txBody>
                     <a:bodyPr/>
@@ -4840,7 +4856,7 @@
                   </a:ext>
                 </a:extLst>
               </a:tr>
-              <a:tr h="7224490">
+              <a:tr h="8301988">
                 <a:tc>
                   <a:txBody>
                     <a:bodyPr/>
@@ -4943,21 +4959,148 @@
                           <a:latin typeface="TH SarabunPSK" panose="020B0500040200020003" pitchFamily="34" charset="-34"/>
                           <a:cs typeface="TH SarabunPSK" panose="020B0500040200020003" pitchFamily="34" charset="-34"/>
                         </a:rPr>
-                        <a:t>The approach was to be able to classify patients on whether they needed  cardiac catheterization or not based on information in the Electronic Health Record (EHR). We used the mimic-iv-ext-cardiac-disease-1.0.0 dataset from the MIT computational physiology lab. The dataset consisted of 4761 patients with heart conditions. Data cleaning included removing patients with possible data leak in the history. We used a four methods to classify patients that needed cardiac catheterization based on the EHR text. 1. Term Frequency - Inverse Document Frequency (TF-IDF) with Logistic </a:t>
+                        <a:t>The approach was to be able to classify patients on whether they needed  cardiac catheterization or not based on information in the Electronic Health Record (EHR). We used the mimic-iv-ext-cardiac-disease-1.0.0 dataset from the MIT computational physiology lab. The dataset consisted of 4761 patients with heart conditions. Data cleaning included removing patients with possible data leak in the history and selecting patients with symptoms of acute coronary syndrome (e.g. chest pain). After data cleaning </a:t>
+                      </a:r>
+                      <a:r>
+                        <a:rPr lang="en-US" sz="3200" b="1" dirty="0">
+                          <a:latin typeface="TH SarabunPSK" panose="020B0500040200020003" pitchFamily="34" charset="-34"/>
+                          <a:cs typeface="TH SarabunPSK" panose="020B0500040200020003" pitchFamily="34" charset="-34"/>
+                        </a:rPr>
+                        <a:t>1887</a:t>
+                      </a:r>
+                      <a:r>
+                        <a:rPr lang="en-US" sz="3200" dirty="0">
+                          <a:latin typeface="TH SarabunPSK" panose="020B0500040200020003" pitchFamily="34" charset="-34"/>
+                          <a:cs typeface="TH SarabunPSK" panose="020B0500040200020003" pitchFamily="34" charset="-34"/>
+                        </a:rPr>
+                        <a:t> patient records were left of these </a:t>
+                      </a:r>
+                      <a:r>
+                        <a:rPr lang="en-US" sz="3200" b="1" dirty="0">
+                          <a:latin typeface="TH SarabunPSK" panose="020B0500040200020003" pitchFamily="34" charset="-34"/>
+                          <a:cs typeface="TH SarabunPSK" panose="020B0500040200020003" pitchFamily="34" charset="-34"/>
+                        </a:rPr>
+                        <a:t>441 (23.3%) </a:t>
+                      </a:r>
+                      <a:r>
+                        <a:rPr lang="en-US" sz="3200" dirty="0">
+                          <a:latin typeface="TH SarabunPSK" panose="020B0500040200020003" pitchFamily="34" charset="-34"/>
+                          <a:cs typeface="TH SarabunPSK" panose="020B0500040200020003" pitchFamily="34" charset="-34"/>
+                        </a:rPr>
+                        <a:t>underwent cardiac catheterization and </a:t>
+                      </a:r>
+                      <a:r>
+                        <a:rPr lang="en-US" sz="3200" b="1" dirty="0">
+                          <a:latin typeface="TH SarabunPSK" panose="020B0500040200020003" pitchFamily="34" charset="-34"/>
+                          <a:cs typeface="TH SarabunPSK" panose="020B0500040200020003" pitchFamily="34" charset="-34"/>
+                        </a:rPr>
+                        <a:t>1446 (76.7%) </a:t>
+                      </a:r>
+                      <a:r>
+                        <a:rPr lang="en-US" sz="3200" dirty="0">
+                          <a:latin typeface="TH SarabunPSK" panose="020B0500040200020003" pitchFamily="34" charset="-34"/>
+                          <a:cs typeface="TH SarabunPSK" panose="020B0500040200020003" pitchFamily="34" charset="-34"/>
+                        </a:rPr>
+                        <a:t>did not go for catheterization. The data was split into train and test sets with test size 20%.  We used four methods to classify patients needed for cardiac catheterization based on the EHR text:</a:t>
+                      </a:r>
+                    </a:p>
+                    <a:p>
+                      <a:pPr marL="697230" indent="-514350">
+                        <a:lnSpc>
+                          <a:spcPct val="100000"/>
+                        </a:lnSpc>
+                        <a:buAutoNum type="arabicPeriod"/>
+                      </a:pPr>
+                      <a:r>
+                        <a:rPr lang="en-US" sz="3200" dirty="0">
+                          <a:latin typeface="TH SarabunPSK" panose="020B0500040200020003" pitchFamily="34" charset="-34"/>
+                          <a:cs typeface="TH SarabunPSK" panose="020B0500040200020003" pitchFamily="34" charset="-34"/>
+                        </a:rPr>
+                        <a:t>Term Frequency - Inverse Document Frequency (TF-IDF) with Logistic regression </a:t>
+                      </a:r>
+                    </a:p>
+                    <a:p>
+                      <a:pPr marL="697230" indent="-514350">
+                        <a:lnSpc>
+                          <a:spcPct val="100000"/>
+                        </a:lnSpc>
+                        <a:buAutoNum type="arabicPeriod"/>
+                      </a:pPr>
+                      <a:r>
+                        <a:rPr lang="en-US" sz="3200" dirty="0" err="1">
+                          <a:latin typeface="TH SarabunPSK" panose="020B0500040200020003" pitchFamily="34" charset="-34"/>
+                          <a:cs typeface="TH SarabunPSK" panose="020B0500040200020003" pitchFamily="34" charset="-34"/>
+                        </a:rPr>
+                        <a:t>Bio_ClinicalBERT</a:t>
+                      </a:r>
+                      <a:r>
+                        <a:rPr lang="en-US" sz="3200" dirty="0">
+                          <a:latin typeface="TH SarabunPSK" panose="020B0500040200020003" pitchFamily="34" charset="-34"/>
+                          <a:cs typeface="TH SarabunPSK" panose="020B0500040200020003" pitchFamily="34" charset="-34"/>
+                        </a:rPr>
+                        <a:t> Model with fine tuning with early stopping based on F 1 scores</a:t>
+                      </a:r>
+                    </a:p>
+                    <a:p>
+                      <a:pPr marL="697230" marR="0" lvl="0" indent="-514350" algn="l" defTabSz="2139605" rtl="0" eaLnBrk="1" fontAlgn="auto" latinLnBrk="0" hangingPunct="1">
+                        <a:lnSpc>
+                          <a:spcPct val="100000"/>
+                        </a:lnSpc>
+                        <a:spcBef>
+                          <a:spcPts val="0"/>
+                        </a:spcBef>
+                        <a:spcAft>
+                          <a:spcPts val="0"/>
+                        </a:spcAft>
+                        <a:buClrTx/>
+                        <a:buSzTx/>
+                        <a:buFontTx/>
+                        <a:buAutoNum type="arabicPeriod"/>
+                        <a:tabLst/>
+                        <a:defRPr/>
+                      </a:pPr>
+                      <a:r>
+                        <a:rPr lang="en-US" sz="3200" dirty="0" err="1">
+                          <a:latin typeface="TH SarabunPSK" panose="020B0500040200020003" pitchFamily="34" charset="-34"/>
+                          <a:cs typeface="TH SarabunPSK" panose="020B0500040200020003" pitchFamily="34" charset="-34"/>
+                        </a:rPr>
+                        <a:t>Bio_ClinicalBERT</a:t>
+                      </a:r>
+                      <a:r>
+                        <a:rPr lang="en-US" sz="3200" dirty="0">
+                          <a:latin typeface="TH SarabunPSK" panose="020B0500040200020003" pitchFamily="34" charset="-34"/>
+                          <a:cs typeface="TH SarabunPSK" panose="020B0500040200020003" pitchFamily="34" charset="-34"/>
+                        </a:rPr>
+                        <a:t> Model with fine tuning with early stopping based on F 1 scores plus Knowledge graph (with truncation of long input patient histories)</a:t>
+                      </a:r>
+                    </a:p>
+                    <a:p>
+                      <a:pPr marL="697230" indent="-514350">
+                        <a:lnSpc>
+                          <a:spcPct val="100000"/>
+                        </a:lnSpc>
+                        <a:buAutoNum type="arabicPeriod"/>
+                      </a:pPr>
+                      <a:r>
+                        <a:rPr lang="en-US" sz="3200" dirty="0">
+                          <a:latin typeface="TH SarabunPSK" panose="020B0500040200020003" pitchFamily="34" charset="-34"/>
+                          <a:cs typeface="TH SarabunPSK" panose="020B0500040200020003" pitchFamily="34" charset="-34"/>
+                        </a:rPr>
+                        <a:t>Multi agent information retrieval Used LLM predictions of components of patient history (HPI, ECG report, lab results </a:t>
                       </a:r>
                       <a:r>
                         <a:rPr lang="en-US" sz="3200" dirty="0" err="1">
                           <a:latin typeface="TH SarabunPSK" panose="020B0500040200020003" pitchFamily="34" charset="-34"/>
                           <a:cs typeface="TH SarabunPSK" panose="020B0500040200020003" pitchFamily="34" charset="-34"/>
                         </a:rPr>
-                        <a:t>regresssion</a:t>
+                        <a:t>e.t.c</a:t>
                       </a:r>
                       <a:r>
                         <a:rPr lang="en-US" sz="3200" dirty="0">
                           <a:latin typeface="TH SarabunPSK" panose="020B0500040200020003" pitchFamily="34" charset="-34"/>
                           <a:cs typeface="TH SarabunPSK" panose="020B0500040200020003" pitchFamily="34" charset="-34"/>
                         </a:rPr>
-                        <a:t> 2. Baseline </a:t>
+                        <a:t> .)  as input to </a:t>
                       </a:r>
                       <a:r>
                         <a:rPr lang="en-US" sz="3200" dirty="0" err="1">
@@ -4971,66 +5114,8 @@
                           <a:latin typeface="TH SarabunPSK" panose="020B0500040200020003" pitchFamily="34" charset="-34"/>
                           <a:cs typeface="TH SarabunPSK" panose="020B0500040200020003" pitchFamily="34" charset="-34"/>
                         </a:rPr>
-                        <a:t> Model 3. BERT plus Knowledge graph</a:t>
+                        <a:t> Model with fine tuning with early stopping based on F 1 scores .</a:t>
                       </a:r>
-                    </a:p>
-                    <a:p>
-                      <a:pPr marL="182880">
-                        <a:lnSpc>
-                          <a:spcPct val="100000"/>
-                        </a:lnSpc>
-                      </a:pPr>
-                      <a:r>
-                        <a:rPr lang="en-US" sz="3200" dirty="0">
-                          <a:latin typeface="TH SarabunPSK" panose="020B0500040200020003" pitchFamily="34" charset="-34"/>
-                          <a:cs typeface="TH SarabunPSK" panose="020B0500040200020003" pitchFamily="34" charset="-34"/>
-                        </a:rPr>
-                        <a:t>4. LLM plus Knowledge Graph. </a:t>
-                      </a:r>
-                    </a:p>
-                    <a:p>
-                      <a:pPr marL="182880" algn="ctr">
-                        <a:lnSpc>
-                          <a:spcPct val="100000"/>
-                        </a:lnSpc>
-                      </a:pPr>
-                      <a:endParaRPr lang="en-US" sz="3200" dirty="0">
-                        <a:latin typeface="TH SarabunPSK" panose="020B0500040200020003" pitchFamily="34" charset="-34"/>
-                        <a:cs typeface="TH SarabunPSK" panose="020B0500040200020003" pitchFamily="34" charset="-34"/>
-                      </a:endParaRPr>
-                    </a:p>
-                    <a:p>
-                      <a:pPr marL="182880" algn="ctr">
-                        <a:lnSpc>
-                          <a:spcPct val="100000"/>
-                        </a:lnSpc>
-                      </a:pPr>
-                      <a:endParaRPr lang="en-US" sz="3200" dirty="0">
-                        <a:latin typeface="TH SarabunPSK" panose="020B0500040200020003" pitchFamily="34" charset="-34"/>
-                        <a:cs typeface="TH SarabunPSK" panose="020B0500040200020003" pitchFamily="34" charset="-34"/>
-                      </a:endParaRPr>
-                    </a:p>
-                    <a:p>
-                      <a:pPr marL="182880" algn="ctr">
-                        <a:lnSpc>
-                          <a:spcPct val="100000"/>
-                        </a:lnSpc>
-                      </a:pPr>
-                      <a:endParaRPr lang="en-US" sz="3200" dirty="0">
-                        <a:latin typeface="TH SarabunPSK" panose="020B0500040200020003" pitchFamily="34" charset="-34"/>
-                        <a:cs typeface="TH SarabunPSK" panose="020B0500040200020003" pitchFamily="34" charset="-34"/>
-                      </a:endParaRPr>
-                    </a:p>
-                    <a:p>
-                      <a:pPr marL="182880">
-                        <a:lnSpc>
-                          <a:spcPct val="100000"/>
-                        </a:lnSpc>
-                      </a:pPr>
-                      <a:endParaRPr lang="en-US" sz="3200" dirty="0">
-                        <a:latin typeface="TH SarabunPSK" panose="020B0500040200020003" pitchFamily="34" charset="-34"/>
-                        <a:cs typeface="TH SarabunPSK" panose="020B0500040200020003" pitchFamily="34" charset="-34"/>
-                      </a:endParaRPr>
                     </a:p>
                   </a:txBody>
                   <a:tcPr marL="0" marR="0" marT="3810" marB="0">
@@ -5084,21 +5169,21 @@
           <p:nvPr>
             <p:extLst>
               <p:ext uri="{D42A27DB-BD31-4B8C-83A1-F6EECF244321}">
-                <p14:modId xmlns:p14="http://schemas.microsoft.com/office/powerpoint/2010/main" val="3740915891"/>
+                <p14:modId xmlns:p14="http://schemas.microsoft.com/office/powerpoint/2010/main" val="149108724"/>
               </p:ext>
             </p:extLst>
           </p:nvPr>
         </p:nvGraphicFramePr>
         <p:xfrm>
-          <a:off x="10698162" y="6175989"/>
-          <a:ext cx="10143692" cy="12481094"/>
+          <a:off x="10698161" y="4438445"/>
+          <a:ext cx="10609404" cy="12481094"/>
         </p:xfrm>
         <a:graphic>
           <a:graphicData uri="http://schemas.openxmlformats.org/drawingml/2006/table">
             <a:tbl>
               <a:tblPr firstRow="1" bandRow="1"/>
               <a:tblGrid>
-                <a:gridCol w="10143692">
+                <a:gridCol w="10609404">
                   <a:extLst>
                     <a:ext uri="{9D8B030D-6E8A-4147-A177-3AD203B41FA5}">
                       <a16:colId xmlns:a16="http://schemas.microsoft.com/office/drawing/2014/main" val="20000"/>
@@ -5758,7 +5843,7 @@
         </p:blipFill>
         <p:spPr bwMode="auto">
           <a:xfrm>
-            <a:off x="0" y="-2"/>
+            <a:off x="71120" y="2884736"/>
             <a:ext cx="1665393" cy="1553709"/>
           </a:xfrm>
           <a:prstGeom prst="rect">
@@ -5805,7 +5890,7 @@
         </p:blipFill>
         <p:spPr bwMode="auto">
           <a:xfrm>
-            <a:off x="19730932" y="-1"/>
+            <a:off x="19802053" y="2865421"/>
             <a:ext cx="1665393" cy="1553709"/>
           </a:xfrm>
           <a:prstGeom prst="rect">
@@ -5838,57 +5923,537 @@
           <p:nvPr>
             <p:extLst>
               <p:ext uri="{D42A27DB-BD31-4B8C-83A1-F6EECF244321}">
-                <p14:modId xmlns:p14="http://schemas.microsoft.com/office/powerpoint/2010/main" val="3273931509"/>
+                <p14:modId xmlns:p14="http://schemas.microsoft.com/office/powerpoint/2010/main" val="1133990102"/>
               </p:ext>
             </p:extLst>
           </p:nvPr>
         </p:nvGraphicFramePr>
         <p:xfrm>
-          <a:off x="10926233" y="7082792"/>
-          <a:ext cx="8804699" cy="2926080"/>
+          <a:off x="10698161" y="5275248"/>
+          <a:ext cx="10411839" cy="6421804"/>
         </p:xfrm>
         <a:graphic>
           <a:graphicData uri="http://schemas.openxmlformats.org/drawingml/2006/table">
             <a:tbl>
               <a:tblPr firstRow="1" firstCol="1" lastRow="1" lastCol="1" bandRow="1" bandCol="1"/>
               <a:tblGrid>
-                <a:gridCol w="2538836">
+                <a:gridCol w="2702560">
                   <a:extLst>
                     <a:ext uri="{9D8B030D-6E8A-4147-A177-3AD203B41FA5}">
                       <a16:colId xmlns:a16="http://schemas.microsoft.com/office/drawing/2014/main" val="1352617459"/>
                     </a:ext>
                   </a:extLst>
                 </a:gridCol>
-                <a:gridCol w="1447255">
-                  <a:extLst>
-                    <a:ext uri="{9D8B030D-6E8A-4147-A177-3AD203B41FA5}">
-                      <a16:colId xmlns:a16="http://schemas.microsoft.com/office/drawing/2014/main" val="2758061288"/>
-                    </a:ext>
-                  </a:extLst>
-                </a:gridCol>
-                <a:gridCol w="1832075">
+                <a:gridCol w="1263958">
                   <a:extLst>
                     <a:ext uri="{9D8B030D-6E8A-4147-A177-3AD203B41FA5}">
                       <a16:colId xmlns:a16="http://schemas.microsoft.com/office/drawing/2014/main" val="3245172871"/>
                     </a:ext>
                   </a:extLst>
                 </a:gridCol>
-                <a:gridCol w="1614569">
+                <a:gridCol w="1465189">
                   <a:extLst>
                     <a:ext uri="{9D8B030D-6E8A-4147-A177-3AD203B41FA5}">
                       <a16:colId xmlns:a16="http://schemas.microsoft.com/office/drawing/2014/main" val="1321357079"/>
                     </a:ext>
                   </a:extLst>
                 </a:gridCol>
-                <a:gridCol w="1371964">
+                <a:gridCol w="1245033">
                   <a:extLst>
                     <a:ext uri="{9D8B030D-6E8A-4147-A177-3AD203B41FA5}">
                       <a16:colId xmlns:a16="http://schemas.microsoft.com/office/drawing/2014/main" val="116693498"/>
                     </a:ext>
                   </a:extLst>
                 </a:gridCol>
+                <a:gridCol w="1245033">
+                  <a:extLst>
+                    <a:ext uri="{9D8B030D-6E8A-4147-A177-3AD203B41FA5}">
+                      <a16:colId xmlns:a16="http://schemas.microsoft.com/office/drawing/2014/main" val="2364302200"/>
+                    </a:ext>
+                  </a:extLst>
+                </a:gridCol>
+                <a:gridCol w="1245033">
+                  <a:extLst>
+                    <a:ext uri="{9D8B030D-6E8A-4147-A177-3AD203B41FA5}">
+                      <a16:colId xmlns:a16="http://schemas.microsoft.com/office/drawing/2014/main" val="571724730"/>
+                    </a:ext>
+                  </a:extLst>
+                </a:gridCol>
+                <a:gridCol w="1245033">
+                  <a:extLst>
+                    <a:ext uri="{9D8B030D-6E8A-4147-A177-3AD203B41FA5}">
+                      <a16:colId xmlns:a16="http://schemas.microsoft.com/office/drawing/2014/main" val="1254078845"/>
+                    </a:ext>
+                  </a:extLst>
+                </a:gridCol>
               </a:tblGrid>
-              <a:tr h="453622">
+              <a:tr h="796681">
+                <a:tc>
+                  <a:txBody>
+                    <a:bodyPr/>
+                    <a:lstStyle/>
+                    <a:p>
+                      <a:pPr algn="ctr"/>
+                      <a:endParaRPr lang="en-US" sz="3200" dirty="0">
+                        <a:solidFill>
+                          <a:schemeClr val="bg1"/>
+                        </a:solidFill>
+                        <a:latin typeface="TH SarabunPSK" panose="020B0500040200020003" pitchFamily="34" charset="-34"/>
+                        <a:cs typeface="TH SarabunPSK" panose="020B0500040200020003" pitchFamily="34" charset="-34"/>
+                      </a:endParaRPr>
+                    </a:p>
+                  </a:txBody>
+                  <a:tcPr marL="68580" marR="68580" marT="0" marB="0" anchor="ctr">
+                    <a:lnL w="12700" cap="flat" cmpd="sng" algn="ctr">
+                      <a:solidFill>
+                        <a:srgbClr val="000000"/>
+                      </a:solidFill>
+                      <a:prstDash val="solid"/>
+                      <a:round/>
+                      <a:headEnd type="none" w="med" len="med"/>
+                      <a:tailEnd type="none" w="med" len="med"/>
+                    </a:lnL>
+                    <a:lnR w="12700" cap="flat" cmpd="sng" algn="ctr">
+                      <a:solidFill>
+                        <a:srgbClr val="000000"/>
+                      </a:solidFill>
+                      <a:prstDash val="solid"/>
+                      <a:round/>
+                      <a:headEnd type="none" w="med" len="med"/>
+                      <a:tailEnd type="none" w="med" len="med"/>
+                    </a:lnR>
+                    <a:lnT w="12700" cap="flat" cmpd="sng" algn="ctr">
+                      <a:solidFill>
+                        <a:srgbClr val="000000"/>
+                      </a:solidFill>
+                      <a:prstDash val="solid"/>
+                      <a:round/>
+                      <a:headEnd type="none" w="med" len="med"/>
+                      <a:tailEnd type="none" w="med" len="med"/>
+                    </a:lnT>
+                    <a:lnB w="12700" cap="flat" cmpd="sng" algn="ctr">
+                      <a:solidFill>
+                        <a:srgbClr val="000000"/>
+                      </a:solidFill>
+                      <a:prstDash val="solid"/>
+                      <a:round/>
+                      <a:headEnd type="none" w="med" len="med"/>
+                      <a:tailEnd type="none" w="med" len="med"/>
+                    </a:lnB>
+                    <a:solidFill>
+                      <a:srgbClr val="0070C0"/>
+                    </a:solidFill>
+                  </a:tcPr>
+                </a:tc>
+                <a:tc gridSpan="3">
+                  <a:txBody>
+                    <a:bodyPr/>
+                    <a:lstStyle/>
+                    <a:p>
+                      <a:pPr marL="0" marR="0" algn="ctr">
+                        <a:spcBef>
+                          <a:spcPts val="0"/>
+                        </a:spcBef>
+                        <a:spcAft>
+                          <a:spcPts val="0"/>
+                        </a:spcAft>
+                      </a:pPr>
+                      <a:r>
+                        <a:rPr lang="en-US" sz="3200" kern="100" dirty="0">
+                          <a:solidFill>
+                            <a:schemeClr val="bg1"/>
+                          </a:solidFill>
+                          <a:effectLst/>
+                          <a:latin typeface="TH SarabunPSK" panose="020B0500040200020003" pitchFamily="34" charset="-34"/>
+                          <a:ea typeface="MS UI Gothic" panose="020B0600070205080204" pitchFamily="34" charset="-128"/>
+                          <a:cs typeface="TH SarabunPSK" panose="020B0500040200020003" pitchFamily="34" charset="-34"/>
+                        </a:rPr>
+                        <a:t>All Patients</a:t>
+                      </a:r>
+                    </a:p>
+                  </a:txBody>
+                  <a:tcPr marL="68580" marR="68580" marT="0" marB="0" anchor="ctr">
+                    <a:lnL w="12700" cap="flat" cmpd="sng" algn="ctr">
+                      <a:solidFill>
+                        <a:srgbClr val="000000"/>
+                      </a:solidFill>
+                      <a:prstDash val="solid"/>
+                      <a:round/>
+                      <a:headEnd type="none" w="med" len="med"/>
+                      <a:tailEnd type="none" w="med" len="med"/>
+                    </a:lnL>
+                    <a:lnR w="12700" cap="flat" cmpd="sng" algn="ctr">
+                      <a:solidFill>
+                        <a:srgbClr val="000000"/>
+                      </a:solidFill>
+                      <a:prstDash val="solid"/>
+                      <a:round/>
+                      <a:headEnd type="none" w="med" len="med"/>
+                      <a:tailEnd type="none" w="med" len="med"/>
+                    </a:lnR>
+                    <a:lnT w="12700" cap="flat" cmpd="sng" algn="ctr">
+                      <a:solidFill>
+                        <a:srgbClr val="000000"/>
+                      </a:solidFill>
+                      <a:prstDash val="solid"/>
+                      <a:round/>
+                      <a:headEnd type="none" w="med" len="med"/>
+                      <a:tailEnd type="none" w="med" len="med"/>
+                    </a:lnT>
+                    <a:lnB w="12700" cap="flat" cmpd="sng" algn="ctr">
+                      <a:solidFill>
+                        <a:srgbClr val="000000"/>
+                      </a:solidFill>
+                      <a:prstDash val="solid"/>
+                      <a:round/>
+                      <a:headEnd type="none" w="med" len="med"/>
+                      <a:tailEnd type="none" w="med" len="med"/>
+                    </a:lnB>
+                    <a:solidFill>
+                      <a:srgbClr val="0070C0"/>
+                    </a:solidFill>
+                  </a:tcPr>
+                </a:tc>
+                <a:tc hMerge="1">
+                  <a:txBody>
+                    <a:bodyPr/>
+                    <a:lstStyle/>
+                    <a:p>
+                      <a:pPr marL="0" marR="0" algn="ctr">
+                        <a:spcBef>
+                          <a:spcPts val="0"/>
+                        </a:spcBef>
+                        <a:spcAft>
+                          <a:spcPts val="0"/>
+                        </a:spcAft>
+                      </a:pPr>
+                      <a:endParaRPr lang="en-US" sz="3200" kern="100" dirty="0">
+                        <a:solidFill>
+                          <a:schemeClr val="bg1"/>
+                        </a:solidFill>
+                        <a:effectLst/>
+                        <a:latin typeface="TH SarabunPSK" panose="020B0500040200020003" pitchFamily="34" charset="-34"/>
+                        <a:ea typeface="MS UI Gothic" panose="020B0600070205080204" pitchFamily="34" charset="-128"/>
+                        <a:cs typeface="TH SarabunPSK" panose="020B0500040200020003" pitchFamily="34" charset="-34"/>
+                      </a:endParaRPr>
+                    </a:p>
+                  </a:txBody>
+                  <a:tcPr marL="68580" marR="68580" marT="0" marB="0" anchor="ctr">
+                    <a:lnL w="12700" cap="flat" cmpd="sng" algn="ctr">
+                      <a:solidFill>
+                        <a:srgbClr val="000000"/>
+                      </a:solidFill>
+                      <a:prstDash val="solid"/>
+                      <a:round/>
+                      <a:headEnd type="none" w="med" len="med"/>
+                      <a:tailEnd type="none" w="med" len="med"/>
+                    </a:lnL>
+                    <a:lnR w="12700" cap="flat" cmpd="sng" algn="ctr">
+                      <a:solidFill>
+                        <a:srgbClr val="000000"/>
+                      </a:solidFill>
+                      <a:prstDash val="solid"/>
+                      <a:round/>
+                      <a:headEnd type="none" w="med" len="med"/>
+                      <a:tailEnd type="none" w="med" len="med"/>
+                    </a:lnR>
+                    <a:lnT w="12700" cap="flat" cmpd="sng" algn="ctr">
+                      <a:solidFill>
+                        <a:srgbClr val="000000"/>
+                      </a:solidFill>
+                      <a:prstDash val="solid"/>
+                      <a:round/>
+                      <a:headEnd type="none" w="med" len="med"/>
+                      <a:tailEnd type="none" w="med" len="med"/>
+                    </a:lnT>
+                    <a:lnB w="12700" cap="flat" cmpd="sng" algn="ctr">
+                      <a:solidFill>
+                        <a:srgbClr val="000000"/>
+                      </a:solidFill>
+                      <a:prstDash val="solid"/>
+                      <a:round/>
+                      <a:headEnd type="none" w="med" len="med"/>
+                      <a:tailEnd type="none" w="med" len="med"/>
+                    </a:lnB>
+                    <a:solidFill>
+                      <a:srgbClr val="0070C0"/>
+                    </a:solidFill>
+                  </a:tcPr>
+                </a:tc>
+                <a:tc hMerge="1">
+                  <a:txBody>
+                    <a:bodyPr/>
+                    <a:lstStyle/>
+                    <a:p>
+                      <a:pPr marL="0" marR="0" algn="ctr">
+                        <a:spcBef>
+                          <a:spcPts val="0"/>
+                        </a:spcBef>
+                        <a:spcAft>
+                          <a:spcPts val="0"/>
+                        </a:spcAft>
+                      </a:pPr>
+                      <a:endParaRPr lang="en-US" sz="3200" kern="100" dirty="0">
+                        <a:solidFill>
+                          <a:schemeClr val="bg1"/>
+                        </a:solidFill>
+                        <a:effectLst/>
+                        <a:latin typeface="TH SarabunPSK" panose="020B0500040200020003" pitchFamily="34" charset="-34"/>
+                        <a:ea typeface="MS UI Gothic" panose="020B0600070205080204" pitchFamily="34" charset="-128"/>
+                        <a:cs typeface="TH SarabunPSK" panose="020B0500040200020003" pitchFamily="34" charset="-34"/>
+                      </a:endParaRPr>
+                    </a:p>
+                  </a:txBody>
+                  <a:tcPr marL="68580" marR="68580" marT="0" marB="0" anchor="ctr">
+                    <a:lnL w="12700" cap="flat" cmpd="sng" algn="ctr">
+                      <a:solidFill>
+                        <a:srgbClr val="000000"/>
+                      </a:solidFill>
+                      <a:prstDash val="solid"/>
+                      <a:round/>
+                      <a:headEnd type="none" w="med" len="med"/>
+                      <a:tailEnd type="none" w="med" len="med"/>
+                    </a:lnL>
+                    <a:lnR w="12700" cap="flat" cmpd="sng" algn="ctr">
+                      <a:solidFill>
+                        <a:srgbClr val="000000"/>
+                      </a:solidFill>
+                      <a:prstDash val="solid"/>
+                      <a:round/>
+                      <a:headEnd type="none" w="med" len="med"/>
+                      <a:tailEnd type="none" w="med" len="med"/>
+                    </a:lnR>
+                    <a:lnT w="12700" cap="flat" cmpd="sng" algn="ctr">
+                      <a:solidFill>
+                        <a:srgbClr val="000000"/>
+                      </a:solidFill>
+                      <a:prstDash val="solid"/>
+                      <a:round/>
+                      <a:headEnd type="none" w="med" len="med"/>
+                      <a:tailEnd type="none" w="med" len="med"/>
+                    </a:lnT>
+                    <a:lnB w="12700" cap="flat" cmpd="sng" algn="ctr">
+                      <a:solidFill>
+                        <a:srgbClr val="000000"/>
+                      </a:solidFill>
+                      <a:prstDash val="solid"/>
+                      <a:round/>
+                      <a:headEnd type="none" w="med" len="med"/>
+                      <a:tailEnd type="none" w="med" len="med"/>
+                    </a:lnB>
+                    <a:solidFill>
+                      <a:srgbClr val="0070C0"/>
+                    </a:solidFill>
+                  </a:tcPr>
+                </a:tc>
+                <a:tc gridSpan="3">
+                  <a:txBody>
+                    <a:bodyPr/>
+                    <a:lstStyle/>
+                    <a:p>
+                      <a:pPr marL="0" marR="0" algn="ctr">
+                        <a:spcBef>
+                          <a:spcPts val="0"/>
+                        </a:spcBef>
+                        <a:spcAft>
+                          <a:spcPts val="0"/>
+                        </a:spcAft>
+                      </a:pPr>
+                      <a:r>
+                        <a:rPr lang="en-US" sz="3200" kern="100" dirty="0">
+                          <a:solidFill>
+                            <a:schemeClr val="bg1"/>
+                          </a:solidFill>
+                          <a:effectLst/>
+                          <a:latin typeface="TH SarabunPSK" panose="020B0500040200020003" pitchFamily="34" charset="-34"/>
+                          <a:ea typeface="MS UI Gothic" panose="020B0600070205080204" pitchFamily="34" charset="-128"/>
+                          <a:cs typeface="TH SarabunPSK" panose="020B0500040200020003" pitchFamily="34" charset="-34"/>
+                        </a:rPr>
+                        <a:t>Myocardial Infarction patients </a:t>
+                      </a:r>
+                    </a:p>
+                  </a:txBody>
+                  <a:tcPr marL="68580" marR="68580" marT="0" marB="0" anchor="ctr">
+                    <a:lnL w="12700" cap="flat" cmpd="sng" algn="ctr">
+                      <a:solidFill>
+                        <a:srgbClr val="000000"/>
+                      </a:solidFill>
+                      <a:prstDash val="solid"/>
+                      <a:round/>
+                      <a:headEnd type="none" w="med" len="med"/>
+                      <a:tailEnd type="none" w="med" len="med"/>
+                    </a:lnL>
+                    <a:lnR w="12700" cap="flat" cmpd="sng" algn="ctr">
+                      <a:solidFill>
+                        <a:srgbClr val="000000"/>
+                      </a:solidFill>
+                      <a:prstDash val="solid"/>
+                      <a:round/>
+                      <a:headEnd type="none" w="med" len="med"/>
+                      <a:tailEnd type="none" w="med" len="med"/>
+                    </a:lnR>
+                    <a:lnT w="12700" cap="flat" cmpd="sng" algn="ctr">
+                      <a:solidFill>
+                        <a:srgbClr val="000000"/>
+                      </a:solidFill>
+                      <a:prstDash val="solid"/>
+                      <a:round/>
+                      <a:headEnd type="none" w="med" len="med"/>
+                      <a:tailEnd type="none" w="med" len="med"/>
+                    </a:lnT>
+                    <a:lnB w="12700" cap="flat" cmpd="sng" algn="ctr">
+                      <a:solidFill>
+                        <a:srgbClr val="000000"/>
+                      </a:solidFill>
+                      <a:prstDash val="solid"/>
+                      <a:round/>
+                      <a:headEnd type="none" w="med" len="med"/>
+                      <a:tailEnd type="none" w="med" len="med"/>
+                    </a:lnB>
+                    <a:solidFill>
+                      <a:srgbClr val="0070C0"/>
+                    </a:solidFill>
+                  </a:tcPr>
+                </a:tc>
+                <a:tc hMerge="1">
+                  <a:txBody>
+                    <a:bodyPr/>
+                    <a:lstStyle/>
+                    <a:p>
+                      <a:pPr marL="0" marR="0" algn="ctr">
+                        <a:spcBef>
+                          <a:spcPts val="0"/>
+                        </a:spcBef>
+                        <a:spcAft>
+                          <a:spcPts val="0"/>
+                        </a:spcAft>
+                      </a:pPr>
+                      <a:endParaRPr lang="en-US" sz="3200" kern="100" dirty="0">
+                        <a:solidFill>
+                          <a:schemeClr val="bg1"/>
+                        </a:solidFill>
+                        <a:effectLst/>
+                        <a:latin typeface="TH SarabunPSK" panose="020B0500040200020003" pitchFamily="34" charset="-34"/>
+                        <a:ea typeface="MS UI Gothic" panose="020B0600070205080204" pitchFamily="34" charset="-128"/>
+                        <a:cs typeface="TH SarabunPSK" panose="020B0500040200020003" pitchFamily="34" charset="-34"/>
+                      </a:endParaRPr>
+                    </a:p>
+                  </a:txBody>
+                  <a:tcPr marL="68580" marR="68580" marT="0" marB="0" anchor="ctr">
+                    <a:lnL w="12700" cap="flat" cmpd="sng" algn="ctr">
+                      <a:solidFill>
+                        <a:srgbClr val="000000"/>
+                      </a:solidFill>
+                      <a:prstDash val="solid"/>
+                      <a:round/>
+                      <a:headEnd type="none" w="med" len="med"/>
+                      <a:tailEnd type="none" w="med" len="med"/>
+                    </a:lnL>
+                    <a:lnR w="12700" cap="flat" cmpd="sng" algn="ctr">
+                      <a:solidFill>
+                        <a:srgbClr val="000000"/>
+                      </a:solidFill>
+                      <a:prstDash val="solid"/>
+                      <a:round/>
+                      <a:headEnd type="none" w="med" len="med"/>
+                      <a:tailEnd type="none" w="med" len="med"/>
+                    </a:lnR>
+                    <a:lnT w="12700" cap="flat" cmpd="sng" algn="ctr">
+                      <a:solidFill>
+                        <a:srgbClr val="000000"/>
+                      </a:solidFill>
+                      <a:prstDash val="solid"/>
+                      <a:round/>
+                      <a:headEnd type="none" w="med" len="med"/>
+                      <a:tailEnd type="none" w="med" len="med"/>
+                    </a:lnT>
+                    <a:lnB w="12700" cap="flat" cmpd="sng" algn="ctr">
+                      <a:solidFill>
+                        <a:srgbClr val="000000"/>
+                      </a:solidFill>
+                      <a:prstDash val="solid"/>
+                      <a:round/>
+                      <a:headEnd type="none" w="med" len="med"/>
+                      <a:tailEnd type="none" w="med" len="med"/>
+                    </a:lnB>
+                    <a:solidFill>
+                      <a:srgbClr val="0070C0"/>
+                    </a:solidFill>
+                  </a:tcPr>
+                </a:tc>
+                <a:tc hMerge="1">
+                  <a:txBody>
+                    <a:bodyPr/>
+                    <a:lstStyle/>
+                    <a:p>
+                      <a:pPr marL="0" marR="0" algn="ctr">
+                        <a:spcBef>
+                          <a:spcPts val="0"/>
+                        </a:spcBef>
+                        <a:spcAft>
+                          <a:spcPts val="0"/>
+                        </a:spcAft>
+                      </a:pPr>
+                      <a:endParaRPr lang="en-US" sz="3200" kern="100" dirty="0">
+                        <a:solidFill>
+                          <a:schemeClr val="bg1"/>
+                        </a:solidFill>
+                        <a:effectLst/>
+                        <a:latin typeface="TH SarabunPSK" panose="020B0500040200020003" pitchFamily="34" charset="-34"/>
+                        <a:ea typeface="MS UI Gothic" panose="020B0600070205080204" pitchFamily="34" charset="-128"/>
+                        <a:cs typeface="TH SarabunPSK" panose="020B0500040200020003" pitchFamily="34" charset="-34"/>
+                      </a:endParaRPr>
+                    </a:p>
+                  </a:txBody>
+                  <a:tcPr marL="68580" marR="68580" marT="0" marB="0" anchor="ctr">
+                    <a:lnL w="12700" cap="flat" cmpd="sng" algn="ctr">
+                      <a:solidFill>
+                        <a:srgbClr val="000000"/>
+                      </a:solidFill>
+                      <a:prstDash val="solid"/>
+                      <a:round/>
+                      <a:headEnd type="none" w="med" len="med"/>
+                      <a:tailEnd type="none" w="med" len="med"/>
+                    </a:lnL>
+                    <a:lnR w="12700" cap="flat" cmpd="sng" algn="ctr">
+                      <a:solidFill>
+                        <a:srgbClr val="000000"/>
+                      </a:solidFill>
+                      <a:prstDash val="solid"/>
+                      <a:round/>
+                      <a:headEnd type="none" w="med" len="med"/>
+                      <a:tailEnd type="none" w="med" len="med"/>
+                    </a:lnR>
+                    <a:lnT w="12700" cap="flat" cmpd="sng" algn="ctr">
+                      <a:solidFill>
+                        <a:srgbClr val="000000"/>
+                      </a:solidFill>
+                      <a:prstDash val="solid"/>
+                      <a:round/>
+                      <a:headEnd type="none" w="med" len="med"/>
+                      <a:tailEnd type="none" w="med" len="med"/>
+                    </a:lnT>
+                    <a:lnB w="12700" cap="flat" cmpd="sng" algn="ctr">
+                      <a:solidFill>
+                        <a:srgbClr val="000000"/>
+                      </a:solidFill>
+                      <a:prstDash val="solid"/>
+                      <a:round/>
+                      <a:headEnd type="none" w="med" len="med"/>
+                      <a:tailEnd type="none" w="med" len="med"/>
+                    </a:lnB>
+                    <a:solidFill>
+                      <a:srgbClr val="0070C0"/>
+                    </a:solidFill>
+                  </a:tcPr>
+                </a:tc>
+                <a:extLst>
+                  <a:ext uri="{0D108BD9-81ED-4DB2-BD59-A6C34878D82A}">
+                    <a16:rowId xmlns:a16="http://schemas.microsoft.com/office/drawing/2014/main" val="2639366490"/>
+                  </a:ext>
+                </a:extLst>
+              </a:tr>
+              <a:tr h="796681">
                 <a:tc>
                   <a:txBody>
                     <a:bodyPr/>
@@ -5951,7 +6516,7 @@
                     <a:bodyPr/>
                     <a:lstStyle/>
                     <a:p>
-                      <a:pPr marL="0" marR="0" indent="0" algn="ctr">
+                      <a:pPr marL="0" marR="0" algn="ctr">
                         <a:spcBef>
                           <a:spcPts val="0"/>
                         </a:spcBef>
@@ -5969,7 +6534,29 @@
                           <a:ea typeface="MS UI Gothic" panose="020B0600070205080204" pitchFamily="34" charset="-128"/>
                           <a:cs typeface="TH SarabunPSK" panose="020B0500040200020003" pitchFamily="34" charset="-34"/>
                         </a:rPr>
-                        <a:t>Precision</a:t>
+                        <a:t>Recall </a:t>
+                      </a:r>
+                    </a:p>
+                    <a:p>
+                      <a:pPr marL="0" marR="0" algn="ctr">
+                        <a:spcBef>
+                          <a:spcPts val="0"/>
+                        </a:spcBef>
+                        <a:spcAft>
+                          <a:spcPts val="0"/>
+                        </a:spcAft>
+                      </a:pPr>
+                      <a:r>
+                        <a:rPr lang="en-US" sz="3200" kern="100" dirty="0">
+                          <a:solidFill>
+                            <a:schemeClr val="bg1"/>
+                          </a:solidFill>
+                          <a:effectLst/>
+                          <a:latin typeface="TH SarabunPSK" panose="020B0500040200020003" pitchFamily="34" charset="-34"/>
+                          <a:ea typeface="MS UI Gothic" panose="020B0600070205080204" pitchFamily="34" charset="-128"/>
+                          <a:cs typeface="TH SarabunPSK" panose="020B0500040200020003" pitchFamily="34" charset="-34"/>
+                        </a:rPr>
+                        <a:t>(Cath)</a:t>
                       </a:r>
                     </a:p>
                   </a:txBody>
@@ -6038,7 +6625,7 @@
                           <a:ea typeface="MS UI Gothic" panose="020B0600070205080204" pitchFamily="34" charset="-128"/>
                           <a:cs typeface="TH SarabunPSK" panose="020B0500040200020003" pitchFamily="34" charset="-34"/>
                         </a:rPr>
-                        <a:t>Recall</a:t>
+                        <a:t>F 1 Score</a:t>
                       </a:r>
                     </a:p>
                   </a:txBody>
@@ -6107,7 +6694,7 @@
                           <a:ea typeface="MS UI Gothic" panose="020B0600070205080204" pitchFamily="34" charset="-128"/>
                           <a:cs typeface="TH SarabunPSK" panose="020B0500040200020003" pitchFamily="34" charset="-34"/>
                         </a:rPr>
-                        <a:t>F 1 Score</a:t>
+                        <a:t>ROC</a:t>
                       </a:r>
                     </a:p>
                   </a:txBody>
@@ -6166,15 +6753,178 @@
                           <a:spcPts val="0"/>
                         </a:spcAft>
                       </a:pPr>
-                      <a:endParaRPr lang="en-US" sz="3200" kern="100" dirty="0">
-                        <a:solidFill>
-                          <a:schemeClr val="bg1"/>
-                        </a:solidFill>
-                        <a:effectLst/>
-                        <a:latin typeface="TH SarabunPSK" panose="020B0500040200020003" pitchFamily="34" charset="-34"/>
-                        <a:ea typeface="MS UI Gothic" panose="020B0600070205080204" pitchFamily="34" charset="-128"/>
-                        <a:cs typeface="TH SarabunPSK" panose="020B0500040200020003" pitchFamily="34" charset="-34"/>
-                      </a:endParaRPr>
+                      <a:r>
+                        <a:rPr lang="en-US" sz="3200" kern="100" dirty="0">
+                          <a:solidFill>
+                            <a:schemeClr val="bg1"/>
+                          </a:solidFill>
+                          <a:effectLst/>
+                          <a:latin typeface="TH SarabunPSK" panose="020B0500040200020003" pitchFamily="34" charset="-34"/>
+                          <a:ea typeface="MS UI Gothic" panose="020B0600070205080204" pitchFamily="34" charset="-128"/>
+                          <a:cs typeface="TH SarabunPSK" panose="020B0500040200020003" pitchFamily="34" charset="-34"/>
+                        </a:rPr>
+                        <a:t>Recall </a:t>
+                      </a:r>
+                    </a:p>
+                    <a:p>
+                      <a:pPr marL="0" marR="0" algn="ctr">
+                        <a:spcBef>
+                          <a:spcPts val="0"/>
+                        </a:spcBef>
+                        <a:spcAft>
+                          <a:spcPts val="0"/>
+                        </a:spcAft>
+                      </a:pPr>
+                      <a:r>
+                        <a:rPr lang="en-US" sz="3200" kern="100" dirty="0">
+                          <a:solidFill>
+                            <a:schemeClr val="bg1"/>
+                          </a:solidFill>
+                          <a:effectLst/>
+                          <a:latin typeface="TH SarabunPSK" panose="020B0500040200020003" pitchFamily="34" charset="-34"/>
+                          <a:ea typeface="MS UI Gothic" panose="020B0600070205080204" pitchFamily="34" charset="-128"/>
+                          <a:cs typeface="TH SarabunPSK" panose="020B0500040200020003" pitchFamily="34" charset="-34"/>
+                        </a:rPr>
+                        <a:t>(Cath)</a:t>
+                      </a:r>
+                    </a:p>
+                  </a:txBody>
+                  <a:tcPr marL="68580" marR="68580" marT="0" marB="0" anchor="ctr">
+                    <a:lnL w="12700" cap="flat" cmpd="sng" algn="ctr">
+                      <a:solidFill>
+                        <a:srgbClr val="000000"/>
+                      </a:solidFill>
+                      <a:prstDash val="solid"/>
+                      <a:round/>
+                      <a:headEnd type="none" w="med" len="med"/>
+                      <a:tailEnd type="none" w="med" len="med"/>
+                    </a:lnL>
+                    <a:lnR w="12700" cap="flat" cmpd="sng" algn="ctr">
+                      <a:solidFill>
+                        <a:srgbClr val="000000"/>
+                      </a:solidFill>
+                      <a:prstDash val="solid"/>
+                      <a:round/>
+                      <a:headEnd type="none" w="med" len="med"/>
+                      <a:tailEnd type="none" w="med" len="med"/>
+                    </a:lnR>
+                    <a:lnT w="12700" cap="flat" cmpd="sng" algn="ctr">
+                      <a:solidFill>
+                        <a:srgbClr val="000000"/>
+                      </a:solidFill>
+                      <a:prstDash val="solid"/>
+                      <a:round/>
+                      <a:headEnd type="none" w="med" len="med"/>
+                      <a:tailEnd type="none" w="med" len="med"/>
+                    </a:lnT>
+                    <a:lnB w="12700" cap="flat" cmpd="sng" algn="ctr">
+                      <a:solidFill>
+                        <a:srgbClr val="000000"/>
+                      </a:solidFill>
+                      <a:prstDash val="solid"/>
+                      <a:round/>
+                      <a:headEnd type="none" w="med" len="med"/>
+                      <a:tailEnd type="none" w="med" len="med"/>
+                    </a:lnB>
+                    <a:solidFill>
+                      <a:srgbClr val="0070C0"/>
+                    </a:solidFill>
+                  </a:tcPr>
+                </a:tc>
+                <a:tc>
+                  <a:txBody>
+                    <a:bodyPr/>
+                    <a:lstStyle/>
+                    <a:p>
+                      <a:pPr marL="0" marR="0" algn="ctr">
+                        <a:spcBef>
+                          <a:spcPts val="0"/>
+                        </a:spcBef>
+                        <a:spcAft>
+                          <a:spcPts val="0"/>
+                        </a:spcAft>
+                      </a:pPr>
+                      <a:r>
+                        <a:rPr lang="en-US" sz="3200" kern="100" dirty="0">
+                          <a:solidFill>
+                            <a:schemeClr val="bg1"/>
+                          </a:solidFill>
+                          <a:effectLst/>
+                          <a:latin typeface="TH SarabunPSK" panose="020B0500040200020003" pitchFamily="34" charset="-34"/>
+                          <a:ea typeface="MS UI Gothic" panose="020B0600070205080204" pitchFamily="34" charset="-128"/>
+                          <a:cs typeface="TH SarabunPSK" panose="020B0500040200020003" pitchFamily="34" charset="-34"/>
+                        </a:rPr>
+                        <a:t>F 1 Score</a:t>
+                      </a:r>
+                    </a:p>
+                  </a:txBody>
+                  <a:tcPr marL="68580" marR="68580" marT="0" marB="0" anchor="ctr">
+                    <a:lnL w="12700" cap="flat" cmpd="sng" algn="ctr">
+                      <a:solidFill>
+                        <a:srgbClr val="000000"/>
+                      </a:solidFill>
+                      <a:prstDash val="solid"/>
+                      <a:round/>
+                      <a:headEnd type="none" w="med" len="med"/>
+                      <a:tailEnd type="none" w="med" len="med"/>
+                    </a:lnL>
+                    <a:lnR w="12700" cap="flat" cmpd="sng" algn="ctr">
+                      <a:solidFill>
+                        <a:srgbClr val="000000"/>
+                      </a:solidFill>
+                      <a:prstDash val="solid"/>
+                      <a:round/>
+                      <a:headEnd type="none" w="med" len="med"/>
+                      <a:tailEnd type="none" w="med" len="med"/>
+                    </a:lnR>
+                    <a:lnT w="12700" cap="flat" cmpd="sng" algn="ctr">
+                      <a:solidFill>
+                        <a:srgbClr val="000000"/>
+                      </a:solidFill>
+                      <a:prstDash val="solid"/>
+                      <a:round/>
+                      <a:headEnd type="none" w="med" len="med"/>
+                      <a:tailEnd type="none" w="med" len="med"/>
+                    </a:lnT>
+                    <a:lnB w="12700" cap="flat" cmpd="sng" algn="ctr">
+                      <a:solidFill>
+                        <a:srgbClr val="000000"/>
+                      </a:solidFill>
+                      <a:prstDash val="solid"/>
+                      <a:round/>
+                      <a:headEnd type="none" w="med" len="med"/>
+                      <a:tailEnd type="none" w="med" len="med"/>
+                    </a:lnB>
+                    <a:solidFill>
+                      <a:srgbClr val="0070C0"/>
+                    </a:solidFill>
+                  </a:tcPr>
+                </a:tc>
+                <a:tc>
+                  <a:txBody>
+                    <a:bodyPr/>
+                    <a:lstStyle/>
+                    <a:p>
+                      <a:pPr marL="0" marR="0" algn="ctr">
+                        <a:spcBef>
+                          <a:spcPts val="0"/>
+                        </a:spcBef>
+                        <a:spcAft>
+                          <a:spcPts val="0"/>
+                        </a:spcAft>
+                      </a:pPr>
+                      <a:r>
+                        <a:rPr lang="en-US" sz="3200" kern="100" dirty="0">
+                          <a:solidFill>
+                            <a:schemeClr val="bg1"/>
+                          </a:solidFill>
+                          <a:effectLst/>
+                          <a:latin typeface="TH SarabunPSK" panose="020B0500040200020003" pitchFamily="34" charset="-34"/>
+                          <a:ea typeface="MS UI Gothic" panose="020B0600070205080204" pitchFamily="34" charset="-128"/>
+                          <a:cs typeface="TH SarabunPSK" panose="020B0500040200020003" pitchFamily="34" charset="-34"/>
+                        </a:rPr>
+                        <a:t>ROC</a:t>
+                      </a:r>
                     </a:p>
                   </a:txBody>
                   <a:tcPr marL="68580" marR="68580" marT="0" marB="0" anchor="ctr">
@@ -6225,7 +6975,7 @@
                   </a:ext>
                 </a:extLst>
               </a:tr>
-              <a:tr h="453622">
+              <a:tr h="1195021">
                 <a:tc>
                   <a:txBody>
                     <a:bodyPr/>
@@ -6249,7 +6999,7 @@
                           <a:ea typeface="MS UI Gothic" panose="020B0600070205080204" pitchFamily="34" charset="-128"/>
                           <a:cs typeface="TH SarabunPSK" panose="020B0500040200020003" pitchFamily="34" charset="-34"/>
                         </a:rPr>
-                        <a:t>TF - IDF</a:t>
+                        <a:t>TF – IDF plus Logistic Regression</a:t>
                       </a:r>
                     </a:p>
                   </a:txBody>
@@ -6300,7 +7050,127 @@
                     <a:bodyPr/>
                     <a:lstStyle/>
                     <a:p>
-                      <a:pPr marL="0" marR="0" indent="0" algn="ctr">
+                      <a:pPr marL="0" marR="0" algn="ctr">
+                        <a:spcBef>
+                          <a:spcPts val="0"/>
+                        </a:spcBef>
+                        <a:spcAft>
+                          <a:spcPts val="0"/>
+                        </a:spcAft>
+                      </a:pPr>
+                      <a:endParaRPr lang="en-US" sz="3200" kern="100" dirty="0">
+                        <a:effectLst/>
+                        <a:latin typeface="TH SarabunPSK" panose="020B0500040200020003" pitchFamily="34" charset="-34"/>
+                        <a:ea typeface="MS UI Gothic" panose="020B0600070205080204" pitchFamily="34" charset="-128"/>
+                        <a:cs typeface="TH SarabunPSK" panose="020B0500040200020003" pitchFamily="34" charset="-34"/>
+                      </a:endParaRPr>
+                    </a:p>
+                  </a:txBody>
+                  <a:tcPr marL="68580" marR="68580" marT="0" marB="0" anchor="ctr">
+                    <a:lnL w="12700" cap="flat" cmpd="sng" algn="ctr">
+                      <a:solidFill>
+                        <a:srgbClr val="000000"/>
+                      </a:solidFill>
+                      <a:prstDash val="solid"/>
+                      <a:round/>
+                      <a:headEnd type="none" w="med" len="med"/>
+                      <a:tailEnd type="none" w="med" len="med"/>
+                    </a:lnL>
+                    <a:lnR w="12700" cap="flat" cmpd="sng" algn="ctr">
+                      <a:solidFill>
+                        <a:srgbClr val="000000"/>
+                      </a:solidFill>
+                      <a:prstDash val="solid"/>
+                      <a:round/>
+                      <a:headEnd type="none" w="med" len="med"/>
+                      <a:tailEnd type="none" w="med" len="med"/>
+                    </a:lnR>
+                    <a:lnT w="12700" cap="flat" cmpd="sng" algn="ctr">
+                      <a:solidFill>
+                        <a:srgbClr val="000000"/>
+                      </a:solidFill>
+                      <a:prstDash val="solid"/>
+                      <a:round/>
+                      <a:headEnd type="none" w="med" len="med"/>
+                      <a:tailEnd type="none" w="med" len="med"/>
+                    </a:lnT>
+                    <a:lnB w="12700" cap="flat" cmpd="sng" algn="ctr">
+                      <a:solidFill>
+                        <a:srgbClr val="000000"/>
+                      </a:solidFill>
+                      <a:prstDash val="solid"/>
+                      <a:round/>
+                      <a:headEnd type="none" w="med" len="med"/>
+                      <a:tailEnd type="none" w="med" len="med"/>
+                    </a:lnB>
+                  </a:tcPr>
+                </a:tc>
+                <a:tc>
+                  <a:txBody>
+                    <a:bodyPr/>
+                    <a:lstStyle/>
+                    <a:p>
+                      <a:pPr marL="0" marR="0" algn="ctr">
+                        <a:spcBef>
+                          <a:spcPts val="0"/>
+                        </a:spcBef>
+                        <a:spcAft>
+                          <a:spcPts val="0"/>
+                        </a:spcAft>
+                      </a:pPr>
+                      <a:endParaRPr lang="en-US" sz="3200" kern="100" dirty="0">
+                        <a:effectLst/>
+                        <a:latin typeface="TH SarabunPSK" panose="020B0500040200020003" pitchFamily="34" charset="-34"/>
+                        <a:ea typeface="MS UI Gothic" panose="020B0600070205080204" pitchFamily="34" charset="-128"/>
+                        <a:cs typeface="TH SarabunPSK" panose="020B0500040200020003" pitchFamily="34" charset="-34"/>
+                      </a:endParaRPr>
+                    </a:p>
+                  </a:txBody>
+                  <a:tcPr marL="68580" marR="68580" marT="0" marB="0" anchor="ctr">
+                    <a:lnL w="12700" cap="flat" cmpd="sng" algn="ctr">
+                      <a:solidFill>
+                        <a:srgbClr val="000000"/>
+                      </a:solidFill>
+                      <a:prstDash val="solid"/>
+                      <a:round/>
+                      <a:headEnd type="none" w="med" len="med"/>
+                      <a:tailEnd type="none" w="med" len="med"/>
+                    </a:lnL>
+                    <a:lnR w="12700" cap="flat" cmpd="sng" algn="ctr">
+                      <a:solidFill>
+                        <a:srgbClr val="000000"/>
+                      </a:solidFill>
+                      <a:prstDash val="solid"/>
+                      <a:round/>
+                      <a:headEnd type="none" w="med" len="med"/>
+                      <a:tailEnd type="none" w="med" len="med"/>
+                    </a:lnR>
+                    <a:lnT w="12700" cap="flat" cmpd="sng" algn="ctr">
+                      <a:solidFill>
+                        <a:srgbClr val="000000"/>
+                      </a:solidFill>
+                      <a:prstDash val="solid"/>
+                      <a:round/>
+                      <a:headEnd type="none" w="med" len="med"/>
+                      <a:tailEnd type="none" w="med" len="med"/>
+                    </a:lnT>
+                    <a:lnB w="12700" cap="flat" cmpd="sng" algn="ctr">
+                      <a:solidFill>
+                        <a:srgbClr val="000000"/>
+                      </a:solidFill>
+                      <a:prstDash val="solid"/>
+                      <a:round/>
+                      <a:headEnd type="none" w="med" len="med"/>
+                      <a:tailEnd type="none" w="med" len="med"/>
+                    </a:lnB>
+                  </a:tcPr>
+                </a:tc>
+                <a:tc>
+                  <a:txBody>
+                    <a:bodyPr/>
+                    <a:lstStyle/>
+                    <a:p>
+                      <a:pPr marL="0" marR="0" algn="ctr">
                         <a:spcBef>
                           <a:spcPts val="0"/>
                         </a:spcBef>
@@ -6541,7 +7411,7 @@
                   </a:ext>
                 </a:extLst>
               </a:tr>
-              <a:tr h="453622">
+              <a:tr h="796681">
                 <a:tc>
                   <a:txBody>
                     <a:bodyPr/>
@@ -6556,7 +7426,7 @@
                         </a:spcAft>
                       </a:pPr>
                       <a:r>
-                        <a:rPr lang="en-US" sz="3200" kern="100" dirty="0">
+                        <a:rPr lang="en-US" sz="3200" kern="100" dirty="0" err="1">
                           <a:solidFill>
                             <a:schemeClr val="bg1"/>
                           </a:solidFill>
@@ -6565,8 +7435,17 @@
                           <a:ea typeface="MS UI Gothic" panose="020B0600070205080204" pitchFamily="34" charset="-128"/>
                           <a:cs typeface="TH SarabunPSK" panose="020B0500040200020003" pitchFamily="34" charset="-34"/>
                         </a:rPr>
-                        <a:t>Baseline BERT</a:t>
+                        <a:t>Bio_ClinicalBERT</a:t>
                       </a:r>
+                      <a:endParaRPr lang="en-US" sz="3200" kern="100" dirty="0">
+                        <a:solidFill>
+                          <a:schemeClr val="bg1"/>
+                        </a:solidFill>
+                        <a:effectLst/>
+                        <a:latin typeface="TH SarabunPSK" panose="020B0500040200020003" pitchFamily="34" charset="-34"/>
+                        <a:ea typeface="MS UI Gothic" panose="020B0600070205080204" pitchFamily="34" charset="-128"/>
+                        <a:cs typeface="TH SarabunPSK" panose="020B0500040200020003" pitchFamily="34" charset="-34"/>
+                      </a:endParaRPr>
                     </a:p>
                   </a:txBody>
                   <a:tcPr marL="68580" marR="68580" marT="0" marB="0" anchor="ctr">
@@ -6851,13 +7730,6 @@
                     </a:lnB>
                   </a:tcPr>
                 </a:tc>
-                <a:extLst>
-                  <a:ext uri="{0D108BD9-81ED-4DB2-BD59-A6C34878D82A}">
-                    <a16:rowId xmlns:a16="http://schemas.microsoft.com/office/drawing/2014/main" val="4220206093"/>
-                  </a:ext>
-                </a:extLst>
-              </a:tr>
-              <a:tr h="453622">
                 <a:tc>
                   <a:txBody>
                     <a:bodyPr/>
@@ -6871,8 +7743,144 @@
                           <a:spcPts val="0"/>
                         </a:spcAft>
                       </a:pPr>
+                      <a:endParaRPr lang="en-US" sz="3200" kern="100" dirty="0">
+                        <a:effectLst/>
+                        <a:latin typeface="TH SarabunPSK" panose="020B0500040200020003" pitchFamily="34" charset="-34"/>
+                        <a:ea typeface="MS UI Gothic" panose="020B0600070205080204" pitchFamily="34" charset="-128"/>
+                        <a:cs typeface="TH SarabunPSK" panose="020B0500040200020003" pitchFamily="34" charset="-34"/>
+                      </a:endParaRPr>
+                    </a:p>
+                  </a:txBody>
+                  <a:tcPr marL="68580" marR="68580" marT="0" marB="0" anchor="ctr">
+                    <a:lnL w="12700" cap="flat" cmpd="sng" algn="ctr">
+                      <a:solidFill>
+                        <a:srgbClr val="000000"/>
+                      </a:solidFill>
+                      <a:prstDash val="solid"/>
+                      <a:round/>
+                      <a:headEnd type="none" w="med" len="med"/>
+                      <a:tailEnd type="none" w="med" len="med"/>
+                    </a:lnL>
+                    <a:lnR w="12700" cap="flat" cmpd="sng" algn="ctr">
+                      <a:solidFill>
+                        <a:srgbClr val="000000"/>
+                      </a:solidFill>
+                      <a:prstDash val="solid"/>
+                      <a:round/>
+                      <a:headEnd type="none" w="med" len="med"/>
+                      <a:tailEnd type="none" w="med" len="med"/>
+                    </a:lnR>
+                    <a:lnT w="12700" cap="flat" cmpd="sng" algn="ctr">
+                      <a:solidFill>
+                        <a:srgbClr val="000000"/>
+                      </a:solidFill>
+                      <a:prstDash val="solid"/>
+                      <a:round/>
+                      <a:headEnd type="none" w="med" len="med"/>
+                      <a:tailEnd type="none" w="med" len="med"/>
+                    </a:lnT>
+                    <a:lnB w="12700" cap="flat" cmpd="sng" algn="ctr">
+                      <a:solidFill>
+                        <a:srgbClr val="000000"/>
+                      </a:solidFill>
+                      <a:prstDash val="solid"/>
+                      <a:round/>
+                      <a:headEnd type="none" w="med" len="med"/>
+                      <a:tailEnd type="none" w="med" len="med"/>
+                    </a:lnB>
+                  </a:tcPr>
+                </a:tc>
+                <a:tc>
+                  <a:txBody>
+                    <a:bodyPr/>
+                    <a:lstStyle/>
+                    <a:p>
+                      <a:pPr marL="0" marR="0" algn="ctr">
+                        <a:spcBef>
+                          <a:spcPts val="0"/>
+                        </a:spcBef>
+                        <a:spcAft>
+                          <a:spcPts val="0"/>
+                        </a:spcAft>
+                      </a:pPr>
+                      <a:endParaRPr lang="en-US" sz="3200" kern="100" dirty="0">
+                        <a:effectLst/>
+                        <a:latin typeface="TH SarabunPSK" panose="020B0500040200020003" pitchFamily="34" charset="-34"/>
+                        <a:ea typeface="MS UI Gothic" panose="020B0600070205080204" pitchFamily="34" charset="-128"/>
+                        <a:cs typeface="TH SarabunPSK" panose="020B0500040200020003" pitchFamily="34" charset="-34"/>
+                      </a:endParaRPr>
+                    </a:p>
+                  </a:txBody>
+                  <a:tcPr marL="68580" marR="68580" marT="0" marB="0" anchor="ctr">
+                    <a:lnL w="12700" cap="flat" cmpd="sng" algn="ctr">
+                      <a:solidFill>
+                        <a:srgbClr val="000000"/>
+                      </a:solidFill>
+                      <a:prstDash val="solid"/>
+                      <a:round/>
+                      <a:headEnd type="none" w="med" len="med"/>
+                      <a:tailEnd type="none" w="med" len="med"/>
+                    </a:lnL>
+                    <a:lnR w="12700" cap="flat" cmpd="sng" algn="ctr">
+                      <a:solidFill>
+                        <a:srgbClr val="000000"/>
+                      </a:solidFill>
+                      <a:prstDash val="solid"/>
+                      <a:round/>
+                      <a:headEnd type="none" w="med" len="med"/>
+                      <a:tailEnd type="none" w="med" len="med"/>
+                    </a:lnR>
+                    <a:lnT w="12700" cap="flat" cmpd="sng" algn="ctr">
+                      <a:solidFill>
+                        <a:srgbClr val="000000"/>
+                      </a:solidFill>
+                      <a:prstDash val="solid"/>
+                      <a:round/>
+                      <a:headEnd type="none" w="med" len="med"/>
+                      <a:tailEnd type="none" w="med" len="med"/>
+                    </a:lnT>
+                    <a:lnB w="12700" cap="flat" cmpd="sng" algn="ctr">
+                      <a:solidFill>
+                        <a:srgbClr val="000000"/>
+                      </a:solidFill>
+                      <a:prstDash val="solid"/>
+                      <a:round/>
+                      <a:headEnd type="none" w="med" len="med"/>
+                      <a:tailEnd type="none" w="med" len="med"/>
+                    </a:lnB>
+                  </a:tcPr>
+                </a:tc>
+                <a:extLst>
+                  <a:ext uri="{0D108BD9-81ED-4DB2-BD59-A6C34878D82A}">
+                    <a16:rowId xmlns:a16="http://schemas.microsoft.com/office/drawing/2014/main" val="4220206093"/>
+                  </a:ext>
+                </a:extLst>
+              </a:tr>
+              <a:tr h="1991702">
+                <a:tc>
+                  <a:txBody>
+                    <a:bodyPr/>
+                    <a:lstStyle/>
+                    <a:p>
+                      <a:pPr marL="0" marR="0" lvl="0" indent="0" algn="ctr" defTabSz="2139605" rtl="0" eaLnBrk="1" fontAlgn="auto" latinLnBrk="0" hangingPunct="1">
+                        <a:lnSpc>
+                          <a:spcPct val="100000"/>
+                        </a:lnSpc>
+                        <a:spcBef>
+                          <a:spcPts val="0"/>
+                        </a:spcBef>
+                        <a:spcAft>
+                          <a:spcPts val="0"/>
+                        </a:spcAft>
+                        <a:buClrTx/>
+                        <a:buSzTx/>
+                        <a:buFontTx/>
+                        <a:buNone/>
+                        <a:tabLst/>
+                        <a:defRPr/>
+                      </a:pPr>
                       <a:r>
-                        <a:rPr lang="en-US" sz="3200" kern="100" dirty="0">
+                        <a:rPr lang="en-US" sz="3200" kern="100" dirty="0" err="1">
                           <a:solidFill>
                             <a:schemeClr val="bg1"/>
                           </a:solidFill>
@@ -6881,7 +7889,38 @@
                           <a:ea typeface="MS UI Gothic" panose="020B0600070205080204" pitchFamily="34" charset="-128"/>
                           <a:cs typeface="TH SarabunPSK" panose="020B0500040200020003" pitchFamily="34" charset="-34"/>
                         </a:rPr>
-                        <a:t>BERT + Knowledge Graph</a:t>
+                        <a:t>Bio_ClinicalBERT</a:t>
+                      </a:r>
+                      <a:endParaRPr lang="en-US" sz="3200" kern="100" dirty="0">
+                        <a:solidFill>
+                          <a:schemeClr val="bg1"/>
+                        </a:solidFill>
+                        <a:effectLst/>
+                        <a:latin typeface="TH SarabunPSK" panose="020B0500040200020003" pitchFamily="34" charset="-34"/>
+                        <a:ea typeface="MS UI Gothic" panose="020B0600070205080204" pitchFamily="34" charset="-128"/>
+                        <a:cs typeface="TH SarabunPSK" panose="020B0500040200020003" pitchFamily="34" charset="-34"/>
+                      </a:endParaRPr>
+                    </a:p>
+                    <a:p>
+                      <a:pPr marL="0" marR="0" algn="ctr">
+                        <a:spcBef>
+                          <a:spcPts val="0"/>
+                        </a:spcBef>
+                        <a:spcAft>
+                          <a:spcPts val="0"/>
+                        </a:spcAft>
+                      </a:pPr>
+                      <a:r>
+                        <a:rPr lang="en-US" sz="3200" kern="100" dirty="0">
+                          <a:solidFill>
+                            <a:schemeClr val="bg1"/>
+                          </a:solidFill>
+                          <a:effectLst/>
+                          <a:latin typeface="TH SarabunPSK" panose="020B0500040200020003" pitchFamily="34" charset="-34"/>
+                          <a:ea typeface="MS UI Gothic" panose="020B0600070205080204" pitchFamily="34" charset="-128"/>
+                          <a:cs typeface="TH SarabunPSK" panose="020B0500040200020003" pitchFamily="34" charset="-34"/>
+                        </a:rPr>
+                        <a:t> + Knowledge Graph</a:t>
                       </a:r>
                     </a:p>
                   </a:txBody>
@@ -7167,13 +8206,6 @@
                     </a:lnB>
                   </a:tcPr>
                 </a:tc>
-                <a:extLst>
-                  <a:ext uri="{0D108BD9-81ED-4DB2-BD59-A6C34878D82A}">
-                    <a16:rowId xmlns:a16="http://schemas.microsoft.com/office/drawing/2014/main" val="2983728674"/>
-                  </a:ext>
-                </a:extLst>
-              </a:tr>
-              <a:tr h="453622">
                 <a:tc>
                   <a:txBody>
                     <a:bodyPr/>
@@ -7187,6 +8219,133 @@
                           <a:spcPts val="0"/>
                         </a:spcAft>
                       </a:pPr>
+                      <a:endParaRPr lang="en-US" sz="3200" kern="100" dirty="0">
+                        <a:effectLst/>
+                        <a:latin typeface="TH SarabunPSK" panose="020B0500040200020003" pitchFamily="34" charset="-34"/>
+                        <a:ea typeface="MS UI Gothic" panose="020B0600070205080204" pitchFamily="34" charset="-128"/>
+                        <a:cs typeface="TH SarabunPSK" panose="020B0500040200020003" pitchFamily="34" charset="-34"/>
+                      </a:endParaRPr>
+                    </a:p>
+                  </a:txBody>
+                  <a:tcPr marL="68580" marR="68580" marT="0" marB="0" anchor="ctr">
+                    <a:lnL w="12700" cap="flat" cmpd="sng" algn="ctr">
+                      <a:solidFill>
+                        <a:srgbClr val="000000"/>
+                      </a:solidFill>
+                      <a:prstDash val="solid"/>
+                      <a:round/>
+                      <a:headEnd type="none" w="med" len="med"/>
+                      <a:tailEnd type="none" w="med" len="med"/>
+                    </a:lnL>
+                    <a:lnR w="12700" cap="flat" cmpd="sng" algn="ctr">
+                      <a:solidFill>
+                        <a:srgbClr val="000000"/>
+                      </a:solidFill>
+                      <a:prstDash val="solid"/>
+                      <a:round/>
+                      <a:headEnd type="none" w="med" len="med"/>
+                      <a:tailEnd type="none" w="med" len="med"/>
+                    </a:lnR>
+                    <a:lnT w="12700" cap="flat" cmpd="sng" algn="ctr">
+                      <a:solidFill>
+                        <a:srgbClr val="000000"/>
+                      </a:solidFill>
+                      <a:prstDash val="solid"/>
+                      <a:round/>
+                      <a:headEnd type="none" w="med" len="med"/>
+                      <a:tailEnd type="none" w="med" len="med"/>
+                    </a:lnT>
+                    <a:lnB w="12700" cap="flat" cmpd="sng" algn="ctr">
+                      <a:solidFill>
+                        <a:srgbClr val="000000"/>
+                      </a:solidFill>
+                      <a:prstDash val="solid"/>
+                      <a:round/>
+                      <a:headEnd type="none" w="med" len="med"/>
+                      <a:tailEnd type="none" w="med" len="med"/>
+                    </a:lnB>
+                  </a:tcPr>
+                </a:tc>
+                <a:tc>
+                  <a:txBody>
+                    <a:bodyPr/>
+                    <a:lstStyle/>
+                    <a:p>
+                      <a:pPr marL="0" marR="0" algn="ctr">
+                        <a:spcBef>
+                          <a:spcPts val="0"/>
+                        </a:spcBef>
+                        <a:spcAft>
+                          <a:spcPts val="0"/>
+                        </a:spcAft>
+                      </a:pPr>
+                      <a:endParaRPr lang="en-US" sz="3200" kern="100" dirty="0">
+                        <a:effectLst/>
+                        <a:latin typeface="TH SarabunPSK" panose="020B0500040200020003" pitchFamily="34" charset="-34"/>
+                        <a:ea typeface="MS UI Gothic" panose="020B0600070205080204" pitchFamily="34" charset="-128"/>
+                        <a:cs typeface="TH SarabunPSK" panose="020B0500040200020003" pitchFamily="34" charset="-34"/>
+                      </a:endParaRPr>
+                    </a:p>
+                  </a:txBody>
+                  <a:tcPr marL="68580" marR="68580" marT="0" marB="0" anchor="ctr">
+                    <a:lnL w="12700" cap="flat" cmpd="sng" algn="ctr">
+                      <a:solidFill>
+                        <a:srgbClr val="000000"/>
+                      </a:solidFill>
+                      <a:prstDash val="solid"/>
+                      <a:round/>
+                      <a:headEnd type="none" w="med" len="med"/>
+                      <a:tailEnd type="none" w="med" len="med"/>
+                    </a:lnL>
+                    <a:lnR w="12700" cap="flat" cmpd="sng" algn="ctr">
+                      <a:solidFill>
+                        <a:srgbClr val="000000"/>
+                      </a:solidFill>
+                      <a:prstDash val="solid"/>
+                      <a:round/>
+                      <a:headEnd type="none" w="med" len="med"/>
+                      <a:tailEnd type="none" w="med" len="med"/>
+                    </a:lnR>
+                    <a:lnT w="12700" cap="flat" cmpd="sng" algn="ctr">
+                      <a:solidFill>
+                        <a:srgbClr val="000000"/>
+                      </a:solidFill>
+                      <a:prstDash val="solid"/>
+                      <a:round/>
+                      <a:headEnd type="none" w="med" len="med"/>
+                      <a:tailEnd type="none" w="med" len="med"/>
+                    </a:lnT>
+                    <a:lnB w="12700" cap="flat" cmpd="sng" algn="ctr">
+                      <a:solidFill>
+                        <a:srgbClr val="000000"/>
+                      </a:solidFill>
+                      <a:prstDash val="solid"/>
+                      <a:round/>
+                      <a:headEnd type="none" w="med" len="med"/>
+                      <a:tailEnd type="none" w="med" len="med"/>
+                    </a:lnB>
+                  </a:tcPr>
+                </a:tc>
+                <a:extLst>
+                  <a:ext uri="{0D108BD9-81ED-4DB2-BD59-A6C34878D82A}">
+                    <a16:rowId xmlns:a16="http://schemas.microsoft.com/office/drawing/2014/main" val="2983728674"/>
+                  </a:ext>
+                </a:extLst>
+              </a:tr>
+              <a:tr h="398340">
+                <a:tc>
+                  <a:txBody>
+                    <a:bodyPr/>
+                    <a:lstStyle/>
+                    <a:p>
+                      <a:pPr marL="0" marR="0" algn="ctr">
+                        <a:spcBef>
+                          <a:spcPts val="0"/>
+                        </a:spcBef>
+                        <a:spcAft>
+                          <a:spcPts val="0"/>
+                        </a:spcAft>
+                      </a:pPr>
                       <a:r>
                         <a:rPr lang="en-US" sz="3200" kern="100" dirty="0">
                           <a:solidFill>
@@ -7241,6 +8400,126 @@
                     <a:solidFill>
                       <a:srgbClr val="0070C0"/>
                     </a:solidFill>
+                  </a:tcPr>
+                </a:tc>
+                <a:tc>
+                  <a:txBody>
+                    <a:bodyPr/>
+                    <a:lstStyle/>
+                    <a:p>
+                      <a:pPr marL="0" marR="0" algn="ctr">
+                        <a:spcBef>
+                          <a:spcPts val="0"/>
+                        </a:spcBef>
+                        <a:spcAft>
+                          <a:spcPts val="0"/>
+                        </a:spcAft>
+                      </a:pPr>
+                      <a:endParaRPr lang="en-US" sz="3200" kern="100" dirty="0">
+                        <a:effectLst/>
+                        <a:latin typeface="TH SarabunPSK" panose="020B0500040200020003" pitchFamily="34" charset="-34"/>
+                        <a:ea typeface="MS UI Gothic" panose="020B0600070205080204" pitchFamily="34" charset="-128"/>
+                        <a:cs typeface="TH SarabunPSK" panose="020B0500040200020003" pitchFamily="34" charset="-34"/>
+                      </a:endParaRPr>
+                    </a:p>
+                  </a:txBody>
+                  <a:tcPr marL="68580" marR="68580" marT="0" marB="0" anchor="ctr">
+                    <a:lnL w="12700" cap="flat" cmpd="sng" algn="ctr">
+                      <a:solidFill>
+                        <a:srgbClr val="000000"/>
+                      </a:solidFill>
+                      <a:prstDash val="solid"/>
+                      <a:round/>
+                      <a:headEnd type="none" w="med" len="med"/>
+                      <a:tailEnd type="none" w="med" len="med"/>
+                    </a:lnL>
+                    <a:lnR w="12700" cap="flat" cmpd="sng" algn="ctr">
+                      <a:solidFill>
+                        <a:srgbClr val="000000"/>
+                      </a:solidFill>
+                      <a:prstDash val="solid"/>
+                      <a:round/>
+                      <a:headEnd type="none" w="med" len="med"/>
+                      <a:tailEnd type="none" w="med" len="med"/>
+                    </a:lnR>
+                    <a:lnT w="12700" cap="flat" cmpd="sng" algn="ctr">
+                      <a:solidFill>
+                        <a:srgbClr val="000000"/>
+                      </a:solidFill>
+                      <a:prstDash val="solid"/>
+                      <a:round/>
+                      <a:headEnd type="none" w="med" len="med"/>
+                      <a:tailEnd type="none" w="med" len="med"/>
+                    </a:lnT>
+                    <a:lnB w="12700" cap="flat" cmpd="sng" algn="ctr">
+                      <a:solidFill>
+                        <a:srgbClr val="000000"/>
+                      </a:solidFill>
+                      <a:prstDash val="solid"/>
+                      <a:round/>
+                      <a:headEnd type="none" w="med" len="med"/>
+                      <a:tailEnd type="none" w="med" len="med"/>
+                    </a:lnB>
+                  </a:tcPr>
+                </a:tc>
+                <a:tc>
+                  <a:txBody>
+                    <a:bodyPr/>
+                    <a:lstStyle/>
+                    <a:p>
+                      <a:pPr marL="0" marR="0" algn="ctr">
+                        <a:spcBef>
+                          <a:spcPts val="0"/>
+                        </a:spcBef>
+                        <a:spcAft>
+                          <a:spcPts val="0"/>
+                        </a:spcAft>
+                      </a:pPr>
+                      <a:endParaRPr lang="en-US" sz="3200" kern="100" dirty="0">
+                        <a:effectLst/>
+                        <a:latin typeface="TH SarabunPSK" panose="020B0500040200020003" pitchFamily="34" charset="-34"/>
+                        <a:ea typeface="MS UI Gothic" panose="020B0600070205080204" pitchFamily="34" charset="-128"/>
+                        <a:cs typeface="TH SarabunPSK" panose="020B0500040200020003" pitchFamily="34" charset="-34"/>
+                      </a:endParaRPr>
+                    </a:p>
+                  </a:txBody>
+                  <a:tcPr marL="68580" marR="68580" marT="0" marB="0" anchor="ctr">
+                    <a:lnL w="12700" cap="flat" cmpd="sng" algn="ctr">
+                      <a:solidFill>
+                        <a:srgbClr val="000000"/>
+                      </a:solidFill>
+                      <a:prstDash val="solid"/>
+                      <a:round/>
+                      <a:headEnd type="none" w="med" len="med"/>
+                      <a:tailEnd type="none" w="med" len="med"/>
+                    </a:lnL>
+                    <a:lnR w="12700" cap="flat" cmpd="sng" algn="ctr">
+                      <a:solidFill>
+                        <a:srgbClr val="000000"/>
+                      </a:solidFill>
+                      <a:prstDash val="solid"/>
+                      <a:round/>
+                      <a:headEnd type="none" w="med" len="med"/>
+                      <a:tailEnd type="none" w="med" len="med"/>
+                    </a:lnR>
+                    <a:lnT w="12700" cap="flat" cmpd="sng" algn="ctr">
+                      <a:solidFill>
+                        <a:srgbClr val="000000"/>
+                      </a:solidFill>
+                      <a:prstDash val="solid"/>
+                      <a:round/>
+                      <a:headEnd type="none" w="med" len="med"/>
+                      <a:tailEnd type="none" w="med" len="med"/>
+                    </a:lnT>
+                    <a:lnB w="12700" cap="flat" cmpd="sng" algn="ctr">
+                      <a:solidFill>
+                        <a:srgbClr val="000000"/>
+                      </a:solidFill>
+                      <a:prstDash val="solid"/>
+                      <a:round/>
+                      <a:headEnd type="none" w="med" len="med"/>
+                      <a:tailEnd type="none" w="med" len="med"/>
+                    </a:lnB>
                   </a:tcPr>
                 </a:tc>
                 <a:tc>
@@ -7521,8 +8800,8 @@
         </p:blipFill>
         <p:spPr>
           <a:xfrm>
-            <a:off x="10698161" y="11934995"/>
-            <a:ext cx="10143693" cy="7190381"/>
+            <a:off x="10637041" y="11775311"/>
+            <a:ext cx="10534077" cy="6421804"/>
           </a:xfrm>
           <a:prstGeom prst="rect">
             <a:avLst/>

--- a/draft_poster.pptx
+++ b/draft_poster.pptx
@@ -2981,77 +2981,6 @@
       </p:grpSpPr>
       <p:sp>
         <p:nvSpPr>
-          <p:cNvPr id="7" name="Text Box 138">
-            <a:extLst>
-              <a:ext uri="{FF2B5EF4-FFF2-40B4-BE49-F238E27FC236}">
-                <a16:creationId xmlns:a16="http://schemas.microsoft.com/office/drawing/2014/main" id="{5567DAB8-D21D-4848-AF0E-5BB5E7425CEE}"/>
-              </a:ext>
-            </a:extLst>
-          </p:cNvPr>
-          <p:cNvSpPr txBox="1">
-            <a:spLocks noChangeArrowheads="1"/>
-          </p:cNvSpPr>
-          <p:nvPr/>
-        </p:nvSpPr>
-        <p:spPr bwMode="auto">
-          <a:xfrm>
-            <a:off x="-3218181" y="-14023157"/>
-            <a:ext cx="21396326" cy="1877649"/>
-          </a:xfrm>
-          <a:prstGeom prst="rect">
-            <a:avLst/>
-          </a:prstGeom>
-          <a:noFill/>
-          <a:ln w="9525">
-            <a:noFill/>
-            <a:miter lim="800000"/>
-            <a:headEnd/>
-            <a:tailEnd/>
-          </a:ln>
-        </p:spPr>
-        <p:txBody>
-          <a:bodyPr wrap="square" lIns="183090" tIns="91545" rIns="183090" bIns="91545">
-            <a:spAutoFit/>
-          </a:bodyPr>
-          <a:lstStyle/>
-          <a:p>
-            <a:pPr lvl="0" algn="ctr" defTabSz="4171950" fontAlgn="base">
-              <a:lnSpc>
-                <a:spcPct val="110000"/>
-              </a:lnSpc>
-              <a:spcBef>
-                <a:spcPct val="0"/>
-              </a:spcBef>
-              <a:spcAft>
-                <a:spcPct val="0"/>
-              </a:spcAft>
-              <a:defRPr/>
-            </a:pPr>
-            <a:r>
-              <a:rPr lang="en-US" altLang="en-US" sz="9600" b="1" kern="0" dirty="0">
-                <a:solidFill>
-                  <a:srgbClr val="FF0000"/>
-                </a:solidFill>
-                <a:latin typeface="TH SarabunPSK" panose="020B0500040200020003" pitchFamily="34" charset="-34"/>
-                <a:cs typeface="TH SarabunPSK" panose="020B0500040200020003" pitchFamily="34" charset="-34"/>
-              </a:rPr>
-              <a:t> </a:t>
-            </a:r>
-            <a:r>
-              <a:rPr lang="en-US" altLang="en-US" sz="8000" b="1" kern="0" dirty="0">
-                <a:solidFill>
-                  <a:srgbClr val="6D1537"/>
-                </a:solidFill>
-                <a:latin typeface="Times New Roman" panose="02020603050405020304" pitchFamily="18" charset="0"/>
-                <a:cs typeface="Times New Roman" panose="02020603050405020304" pitchFamily="18" charset="0"/>
-              </a:rPr>
-              <a:t>ICA SP-CON 2020</a:t>
-            </a:r>
-          </a:p>
-        </p:txBody>
-      </p:sp>
-      <p:sp>
-        <p:nvSpPr>
           <p:cNvPr id="15" name="Text Box 138">
             <a:extLst>
               <a:ext uri="{FF2B5EF4-FFF2-40B4-BE49-F238E27FC236}">
@@ -3067,7 +2996,7 @@
         <p:spPr bwMode="auto">
           <a:xfrm>
             <a:off x="71120" y="-30683"/>
-            <a:ext cx="21396326" cy="4469128"/>
+            <a:ext cx="21236445" cy="4469128"/>
           </a:xfrm>
           <a:prstGeom prst="rect">
             <a:avLst/>
@@ -3216,7 +3145,7 @@
           <p:nvPr>
             <p:extLst>
               <p:ext uri="{D42A27DB-BD31-4B8C-83A1-F6EECF244321}">
-                <p14:modId xmlns:p14="http://schemas.microsoft.com/office/powerpoint/2010/main" val="189510950"/>
+                <p14:modId xmlns:p14="http://schemas.microsoft.com/office/powerpoint/2010/main" val="93245397"/>
               </p:ext>
             </p:extLst>
           </p:nvPr>
@@ -3660,13 +3589,13 @@
           <p:nvPr>
             <p:extLst>
               <p:ext uri="{D42A27DB-BD31-4B8C-83A1-F6EECF244321}">
-                <p14:modId xmlns:p14="http://schemas.microsoft.com/office/powerpoint/2010/main" val="4010524944"/>
+                <p14:modId xmlns:p14="http://schemas.microsoft.com/office/powerpoint/2010/main" val="3560417053"/>
               </p:ext>
             </p:extLst>
           </p:nvPr>
         </p:nvGraphicFramePr>
         <p:xfrm>
-          <a:off x="-2" y="16714475"/>
+          <a:off x="-16742" y="16660493"/>
           <a:ext cx="10609404" cy="4469130"/>
         </p:xfrm>
         <a:graphic>
@@ -4698,13 +4627,13 @@
           <p:nvPr>
             <p:extLst>
               <p:ext uri="{D42A27DB-BD31-4B8C-83A1-F6EECF244321}">
-                <p14:modId xmlns:p14="http://schemas.microsoft.com/office/powerpoint/2010/main" val="3609255569"/>
+                <p14:modId xmlns:p14="http://schemas.microsoft.com/office/powerpoint/2010/main" val="3928086831"/>
               </p:ext>
             </p:extLst>
           </p:nvPr>
         </p:nvGraphicFramePr>
         <p:xfrm>
-          <a:off x="-1" y="21168991"/>
+          <a:off x="0" y="21129623"/>
           <a:ext cx="10609403" cy="9092004"/>
         </p:xfrm>
         <a:graphic>
@@ -5843,8 +5772,8 @@
         </p:blipFill>
         <p:spPr bwMode="auto">
           <a:xfrm>
-            <a:off x="71120" y="2884736"/>
-            <a:ext cx="1665393" cy="1553709"/>
+            <a:off x="71120" y="2199190"/>
+            <a:ext cx="2400218" cy="2239255"/>
           </a:xfrm>
           <a:prstGeom prst="rect">
             <a:avLst/>
@@ -5890,8 +5819,8 @@
         </p:blipFill>
         <p:spPr bwMode="auto">
           <a:xfrm>
-            <a:off x="19802053" y="2865421"/>
-            <a:ext cx="1665393" cy="1553709"/>
+            <a:off x="18799451" y="2059400"/>
+            <a:ext cx="2508114" cy="2339916"/>
           </a:xfrm>
           <a:prstGeom prst="rect">
             <a:avLst/>

--- a/draft_poster.pptx
+++ b/draft_poster.pptx
@@ -243,7 +243,7 @@
           <a:p>
             <a:fld id="{C9D56EB1-F2BE-4898-8B6B-5560BA3C98FF}" type="datetimeFigureOut">
               <a:rPr lang="en-US" smtClean="0"/>
-              <a:t>10/24/2025</a:t>
+              <a:t>10/27/2025</a:t>
             </a:fld>
             <a:endParaRPr lang="en-US"/>
           </a:p>
@@ -413,7 +413,7 @@
           <a:p>
             <a:fld id="{C9D56EB1-F2BE-4898-8B6B-5560BA3C98FF}" type="datetimeFigureOut">
               <a:rPr lang="en-US" smtClean="0"/>
-              <a:t>10/24/2025</a:t>
+              <a:t>10/27/2025</a:t>
             </a:fld>
             <a:endParaRPr lang="en-US"/>
           </a:p>
@@ -593,7 +593,7 @@
           <a:p>
             <a:fld id="{C9D56EB1-F2BE-4898-8B6B-5560BA3C98FF}" type="datetimeFigureOut">
               <a:rPr lang="en-US" smtClean="0"/>
-              <a:t>10/24/2025</a:t>
+              <a:t>10/27/2025</a:t>
             </a:fld>
             <a:endParaRPr lang="en-US"/>
           </a:p>
@@ -763,7 +763,7 @@
           <a:p>
             <a:fld id="{C9D56EB1-F2BE-4898-8B6B-5560BA3C98FF}" type="datetimeFigureOut">
               <a:rPr lang="en-US" smtClean="0"/>
-              <a:t>10/24/2025</a:t>
+              <a:t>10/27/2025</a:t>
             </a:fld>
             <a:endParaRPr lang="en-US"/>
           </a:p>
@@ -1007,7 +1007,7 @@
           <a:p>
             <a:fld id="{C9D56EB1-F2BE-4898-8B6B-5560BA3C98FF}" type="datetimeFigureOut">
               <a:rPr lang="en-US" smtClean="0"/>
-              <a:t>10/24/2025</a:t>
+              <a:t>10/27/2025</a:t>
             </a:fld>
             <a:endParaRPr lang="en-US"/>
           </a:p>
@@ -1239,7 +1239,7 @@
           <a:p>
             <a:fld id="{C9D56EB1-F2BE-4898-8B6B-5560BA3C98FF}" type="datetimeFigureOut">
               <a:rPr lang="en-US" smtClean="0"/>
-              <a:t>10/24/2025</a:t>
+              <a:t>10/27/2025</a:t>
             </a:fld>
             <a:endParaRPr lang="en-US"/>
           </a:p>
@@ -1606,7 +1606,7 @@
           <a:p>
             <a:fld id="{C9D56EB1-F2BE-4898-8B6B-5560BA3C98FF}" type="datetimeFigureOut">
               <a:rPr lang="en-US" smtClean="0"/>
-              <a:t>10/24/2025</a:t>
+              <a:t>10/27/2025</a:t>
             </a:fld>
             <a:endParaRPr lang="en-US"/>
           </a:p>
@@ -1724,7 +1724,7 @@
           <a:p>
             <a:fld id="{C9D56EB1-F2BE-4898-8B6B-5560BA3C98FF}" type="datetimeFigureOut">
               <a:rPr lang="en-US" smtClean="0"/>
-              <a:t>10/24/2025</a:t>
+              <a:t>10/27/2025</a:t>
             </a:fld>
             <a:endParaRPr lang="en-US"/>
           </a:p>
@@ -1819,7 +1819,7 @@
           <a:p>
             <a:fld id="{C9D56EB1-F2BE-4898-8B6B-5560BA3C98FF}" type="datetimeFigureOut">
               <a:rPr lang="en-US" smtClean="0"/>
-              <a:t>10/24/2025</a:t>
+              <a:t>10/27/2025</a:t>
             </a:fld>
             <a:endParaRPr lang="en-US"/>
           </a:p>
@@ -2096,7 +2096,7 @@
           <a:p>
             <a:fld id="{C9D56EB1-F2BE-4898-8B6B-5560BA3C98FF}" type="datetimeFigureOut">
               <a:rPr lang="en-US" smtClean="0"/>
-              <a:t>10/24/2025</a:t>
+              <a:t>10/27/2025</a:t>
             </a:fld>
             <a:endParaRPr lang="en-US"/>
           </a:p>
@@ -2353,7 +2353,7 @@
           <a:p>
             <a:fld id="{C9D56EB1-F2BE-4898-8B6B-5560BA3C98FF}" type="datetimeFigureOut">
               <a:rPr lang="en-US" smtClean="0"/>
-              <a:t>10/24/2025</a:t>
+              <a:t>10/27/2025</a:t>
             </a:fld>
             <a:endParaRPr lang="en-US"/>
           </a:p>
@@ -2566,7 +2566,7 @@
           <a:p>
             <a:fld id="{C9D56EB1-F2BE-4898-8B6B-5560BA3C98FF}" type="datetimeFigureOut">
               <a:rPr lang="en-US" smtClean="0"/>
-              <a:t>10/24/2025</a:t>
+              <a:t>10/27/2025</a:t>
             </a:fld>
             <a:endParaRPr lang="en-US"/>
           </a:p>
@@ -3145,14 +3145,14 @@
           <p:nvPr>
             <p:extLst>
               <p:ext uri="{D42A27DB-BD31-4B8C-83A1-F6EECF244321}">
-                <p14:modId xmlns:p14="http://schemas.microsoft.com/office/powerpoint/2010/main" val="93245397"/>
+                <p14:modId xmlns:p14="http://schemas.microsoft.com/office/powerpoint/2010/main" val="678381363"/>
               </p:ext>
             </p:extLst>
           </p:nvPr>
         </p:nvGraphicFramePr>
         <p:xfrm>
           <a:off x="79939" y="4419130"/>
-          <a:ext cx="10609404" cy="10636800"/>
+          <a:ext cx="10609404" cy="11612160"/>
         </p:xfrm>
         <a:graphic>
           <a:graphicData uri="http://schemas.openxmlformats.org/drawingml/2006/table">
@@ -3406,7 +3406,7 @@
                           <a:latin typeface="TH SarabunPSK" panose="020B0500040200020003" pitchFamily="34" charset="-34"/>
                           <a:cs typeface="TH SarabunPSK" panose="020B0500040200020003" pitchFamily="34" charset="-34"/>
                         </a:rPr>
-                        <a:t>Ischaemic Heart Disease is the leading cause of death world-wide responsible for 13% of all deaths. Ischaemic Heart Disease presents in acute cases as acute coronary syndromes (ACS). In acute coronary syndromes there is  need to reduce the time from the patient getting through the hospital door to the time of definitive treatment with balloon catheterization</a:t>
+                        <a:t>Ischaemic Heart Disease is the leading cause of death world-wide responsible for 13% of all deaths</a:t>
                       </a:r>
                       <a:r>
                         <a:rPr lang="en-GB" sz="3200" i="0" baseline="30000" dirty="0">
@@ -3423,6 +3423,33 @@
                           <a:latin typeface="TH SarabunPSK" panose="020B0500040200020003" pitchFamily="34" charset="-34"/>
                           <a:cs typeface="TH SarabunPSK" panose="020B0500040200020003" pitchFamily="34" charset="-34"/>
                         </a:rPr>
+                        <a:t>. Ischaemic Heart Disease presents in emergency cases as acute coronary syndromes (ACS). In ACS there is  need to reduce the time from the patient getting through the hospital door to the time of definitive treatment with balloon catheterization</a:t>
+                      </a:r>
+                      <a:r>
+                        <a:rPr lang="en-GB" sz="3200" i="0" baseline="30000" dirty="0">
+                          <a:solidFill>
+                            <a:srgbClr val="0070C0"/>
+                          </a:solidFill>
+                          <a:latin typeface="TH SarabunPSK" panose="020B0500040200020003" pitchFamily="34" charset="-34"/>
+                          <a:cs typeface="TH SarabunPSK" panose="020B0500040200020003" pitchFamily="34" charset="-34"/>
+                        </a:rPr>
+                        <a:t>2 </a:t>
+                      </a:r>
+                      <a:r>
+                        <a:rPr lang="en-GB" sz="3200" i="0" baseline="0" dirty="0">
+                          <a:solidFill>
+                            <a:schemeClr val="tx1"/>
+                          </a:solidFill>
+                          <a:latin typeface="TH SarabunPSK" panose="020B0500040200020003" pitchFamily="34" charset="-34"/>
+                          <a:cs typeface="TH SarabunPSK" panose="020B0500040200020003" pitchFamily="34" charset="-34"/>
+                        </a:rPr>
+                        <a:t> (door to balloon time)</a:t>
+                      </a:r>
+                      <a:r>
+                        <a:rPr lang="en-GB" sz="3200" i="0" dirty="0">
+                          <a:latin typeface="TH SarabunPSK" panose="020B0500040200020003" pitchFamily="34" charset="-34"/>
+                          <a:cs typeface="TH SarabunPSK" panose="020B0500040200020003" pitchFamily="34" charset="-34"/>
+                        </a:rPr>
                         <a:t>. Artificial Intelligence systems have been implemented for automatic detection of ST elevated Myocardial Infarction (STEMI) from ECG</a:t>
                       </a:r>
                       <a:r>
@@ -3443,21 +3470,21 @@
                           <a:latin typeface="TH SarabunPSK" panose="020B0500040200020003" pitchFamily="34" charset="-34"/>
                           <a:cs typeface="TH SarabunPSK" panose="020B0500040200020003" pitchFamily="34" charset="-34"/>
                         </a:rPr>
-                        <a:t>2</a:t>
+                        <a:t>3</a:t>
                       </a:r>
                       <a:r>
                         <a:rPr lang="en-GB" sz="3200" i="0" baseline="0" dirty="0">
                           <a:latin typeface="TH SarabunPSK" panose="020B0500040200020003" pitchFamily="34" charset="-34"/>
                           <a:cs typeface="TH SarabunPSK" panose="020B0500040200020003" pitchFamily="34" charset="-34"/>
                         </a:rPr>
-                        <a:t>. </a:t>
+                        <a:t>. Linking these</a:t>
                       </a:r>
                       <a:r>
                         <a:rPr lang="en-GB" sz="3200" i="0" dirty="0">
                           <a:latin typeface="TH SarabunPSK" panose="020B0500040200020003" pitchFamily="34" charset="-34"/>
                           <a:cs typeface="TH SarabunPSK" panose="020B0500040200020003" pitchFamily="34" charset="-34"/>
                         </a:rPr>
-                        <a:t>These platforms have been linked with automatic activation of the Cardiac Catheterization Lab </a:t>
+                        <a:t> platforms to notification systems has been demonstrated to reduce the door to balloon time</a:t>
                       </a:r>
                       <a:r>
                         <a:rPr lang="en-GB" sz="3200" i="0" baseline="30000" dirty="0">
@@ -3467,14 +3494,14 @@
                           <a:latin typeface="TH SarabunPSK" panose="020B0500040200020003" pitchFamily="34" charset="-34"/>
                           <a:cs typeface="TH SarabunPSK" panose="020B0500040200020003" pitchFamily="34" charset="-34"/>
                         </a:rPr>
-                        <a:t>2</a:t>
+                        <a:t>3</a:t>
                       </a:r>
                       <a:r>
                         <a:rPr lang="en-GB" sz="3200" i="0" dirty="0">
                           <a:latin typeface="TH SarabunPSK" panose="020B0500040200020003" pitchFamily="34" charset="-34"/>
                           <a:cs typeface="TH SarabunPSK" panose="020B0500040200020003" pitchFamily="34" charset="-34"/>
                         </a:rPr>
-                        <a:t>. This has been demonstrated to reduce the door to balloon time.  </a:t>
+                        <a:t>. </a:t>
                       </a:r>
                     </a:p>
                     <a:p>
@@ -3499,7 +3526,7 @@
                           <a:latin typeface="TH SarabunPSK" panose="020B0500040200020003" pitchFamily="34" charset="-34"/>
                           <a:cs typeface="TH SarabunPSK" panose="020B0500040200020003" pitchFamily="34" charset="-34"/>
                         </a:rPr>
-                        <a:t>However, to decide to send the patient for emergency cardiac catheterisation it is important to consider the patient’s presenting history, ECG results and the results of lab investigations. As soon as the decision is made the Team that works in the catheterisation lab must be notified to prepare for the patient. Our research looks at using a LLM to use text in the Electronic Health Record (EHR) which includes the History of Presenting illness (HPI), Physical Examination, ECG report and lab results (Troponin results) to automatically make the decision and send a notification to the catheterisation lab. Essentially this is two class medical  classification. </a:t>
+                        <a:t>However, to decide to send the patient for emergency cardiac catheterisation it is important to consider the patient’s presenting history, ECG results and the results of lab investigations. Our research looks at using a LLM to classify text in the Electronic Health Record (EHR) which includes the History of Presenting illness (HPI), Physical Examination, ECG report and lab results (Troponin results) to automatically make the decision and send a notification to the catheterisation lab. Essentially this is a two-class medical  classification. </a:t>
                       </a:r>
                     </a:p>
                     <a:p>
@@ -3521,21 +3548,76 @@
                       </a:pPr>
                       <a:r>
                         <a:rPr lang="en-GB" sz="3200" i="0" dirty="0">
-                          <a:highlight>
-                            <a:srgbClr val="FF0000"/>
-                          </a:highlight>
                           <a:latin typeface="TH SarabunPSK" panose="020B0500040200020003" pitchFamily="34" charset="-34"/>
                           <a:cs typeface="TH SarabunPSK" panose="020B0500040200020003" pitchFamily="34" charset="-34"/>
                         </a:rPr>
-                        <a:t>In previous work …., citations, </a:t>
+                        <a:t>Previous work has been done on classification of medical text using various Machine Learning models including gradient boosting with Text Frequency – Inverse Document Frequency (TF-IDF)</a:t>
                       </a:r>
-                      <a:endParaRPr sz="2800" i="0" dirty="0">
-                        <a:highlight>
-                          <a:srgbClr val="FF0000"/>
-                        </a:highlight>
-                        <a:latin typeface="TH SarabunPSK" panose="020B0500040200020003" pitchFamily="34" charset="-34"/>
-                        <a:cs typeface="TH SarabunPSK" panose="020B0500040200020003" pitchFamily="34" charset="-34"/>
-                      </a:endParaRPr>
+                      <a:r>
+                        <a:rPr lang="en-GB" sz="3200" i="0" baseline="30000" dirty="0">
+                          <a:solidFill>
+                            <a:srgbClr val="0070C0"/>
+                          </a:solidFill>
+                          <a:latin typeface="TH SarabunPSK" panose="020B0500040200020003" pitchFamily="34" charset="-34"/>
+                          <a:cs typeface="TH SarabunPSK" panose="020B0500040200020003" pitchFamily="34" charset="-34"/>
+                        </a:rPr>
+                        <a:t>5</a:t>
+                      </a:r>
+                      <a:r>
+                        <a:rPr lang="en-GB" sz="3200" i="0" dirty="0">
+                          <a:latin typeface="TH SarabunPSK" panose="020B0500040200020003" pitchFamily="34" charset="-34"/>
+                          <a:cs typeface="TH SarabunPSK" panose="020B0500040200020003" pitchFamily="34" charset="-34"/>
+                        </a:rPr>
+                        <a:t> and Transformers. Recently LLMs have been shown to perform well in medical text classification</a:t>
+                      </a:r>
+                      <a:r>
+                        <a:rPr lang="en-GB" sz="3200" i="0" baseline="30000" dirty="0">
+                          <a:solidFill>
+                            <a:srgbClr val="0070C0"/>
+                          </a:solidFill>
+                          <a:latin typeface="TH SarabunPSK" panose="020B0500040200020003" pitchFamily="34" charset="-34"/>
+                          <a:cs typeface="TH SarabunPSK" panose="020B0500040200020003" pitchFamily="34" charset="-34"/>
+                        </a:rPr>
+                        <a:t>6</a:t>
+                      </a:r>
+                      <a:r>
+                        <a:rPr lang="en-GB" sz="3200" i="0" dirty="0">
+                          <a:latin typeface="TH SarabunPSK" panose="020B0500040200020003" pitchFamily="34" charset="-34"/>
+                          <a:cs typeface="TH SarabunPSK" panose="020B0500040200020003" pitchFamily="34" charset="-34"/>
+                        </a:rPr>
+                        <a:t>. We aim to improve the performance of simple transformer model (</a:t>
+                      </a:r>
+                      <a:r>
+                        <a:rPr lang="en-GB" sz="3200" i="0" dirty="0" err="1">
+                          <a:latin typeface="TH SarabunPSK" panose="020B0500040200020003" pitchFamily="34" charset="-34"/>
+                          <a:cs typeface="TH SarabunPSK" panose="020B0500040200020003" pitchFamily="34" charset="-34"/>
+                        </a:rPr>
+                        <a:t>Bio_ClinicalBERT</a:t>
+                      </a:r>
+                      <a:r>
+                        <a:rPr lang="en-GB" sz="3200" i="0" dirty="0">
+                          <a:latin typeface="TH SarabunPSK" panose="020B0500040200020003" pitchFamily="34" charset="-34"/>
+                          <a:cs typeface="TH SarabunPSK" panose="020B0500040200020003" pitchFamily="34" charset="-34"/>
+                        </a:rPr>
+                        <a:t>) with knowledge graph</a:t>
+                      </a:r>
+                      <a:r>
+                        <a:rPr lang="en-GB" sz="3200" i="0" baseline="30000" dirty="0">
+                          <a:solidFill>
+                            <a:srgbClr val="0070C0"/>
+                          </a:solidFill>
+                          <a:latin typeface="TH SarabunPSK" panose="020B0500040200020003" pitchFamily="34" charset="-34"/>
+                          <a:cs typeface="TH SarabunPSK" panose="020B0500040200020003" pitchFamily="34" charset="-34"/>
+                        </a:rPr>
+                        <a:t>7</a:t>
+                      </a:r>
+                      <a:r>
+                        <a:rPr lang="en-GB" sz="3200" i="0" dirty="0">
+                          <a:latin typeface="TH SarabunPSK" panose="020B0500040200020003" pitchFamily="34" charset="-34"/>
+                          <a:cs typeface="TH SarabunPSK" panose="020B0500040200020003" pitchFamily="34" charset="-34"/>
+                        </a:rPr>
+                        <a:t>.</a:t>
+                      </a:r>
                     </a:p>
                   </a:txBody>
                   <a:tcPr marL="0" marR="0" marT="3810" marB="0">
@@ -4251,21 +4333,21 @@
           <p:nvPr>
             <p:extLst>
               <p:ext uri="{D42A27DB-BD31-4B8C-83A1-F6EECF244321}">
-                <p14:modId xmlns:p14="http://schemas.microsoft.com/office/powerpoint/2010/main" val="1571992389"/>
+                <p14:modId xmlns:p14="http://schemas.microsoft.com/office/powerpoint/2010/main" val="4097946602"/>
               </p:ext>
             </p:extLst>
           </p:nvPr>
         </p:nvGraphicFramePr>
         <p:xfrm>
-          <a:off x="10698162" y="20899120"/>
-          <a:ext cx="10534077" cy="8108644"/>
+          <a:off x="10689344" y="20899120"/>
+          <a:ext cx="10542896" cy="9256290"/>
         </p:xfrm>
         <a:graphic>
           <a:graphicData uri="http://schemas.openxmlformats.org/drawingml/2006/table">
             <a:tbl>
               <a:tblPr firstRow="1" bandRow="1"/>
               <a:tblGrid>
-                <a:gridCol w="10534077">
+                <a:gridCol w="10542896">
                   <a:extLst>
                     <a:ext uri="{9D8B030D-6E8A-4147-A177-3AD203B41FA5}">
                       <a16:colId xmlns:a16="http://schemas.microsoft.com/office/drawing/2014/main" val="20000"/>
@@ -4498,7 +4580,7 @@
                           <a:latin typeface="TH SarabunPSK" panose="020B0500040200020003" pitchFamily="34" charset="-34"/>
                           <a:cs typeface="TH SarabunPSK" panose="020B0500040200020003" pitchFamily="34" charset="-34"/>
                         </a:rPr>
-                        <a:t>1. Cannon CP, G. C. (2000). Relationship of Symptom-Onset-to-Balloon Time and Door-to-Balloon Time With Mortality in Patients Undergoing Angioplasty for Acute Myocardial Infarction. JAMA, 22(283), 2941–2947. Retrieved from doi:10.1001/jama.283.22.2941</a:t>
+                        <a:t>1. Lindstrom, M., DeCleene, N., Dorsey, et al (2022). Global Burden of Cardiovascular Diseases and Risks Collaboration, 1990-2021. Journal of the American College of Cardiology, 80(25), 2372–2425. https://doi.org/10.1016/j.jacc.2022.11.001</a:t>
                       </a:r>
                     </a:p>
                     <a:p>
@@ -4512,7 +4594,7 @@
                           <a:latin typeface="TH SarabunPSK" panose="020B0500040200020003" pitchFamily="34" charset="-34"/>
                           <a:cs typeface="TH SarabunPSK" panose="020B0500040200020003" pitchFamily="34" charset="-34"/>
                         </a:rPr>
-                        <a:t>2. Robert Avram, William F. Fearon. (2024, 7 1). NEJM AI, 1(7). doi:10.1056/AIe2400472</a:t>
+                        <a:t>2. Cannon CP, G. C. (2000). Relationship of Symptom-Onset-to-Balloon Time and Door-to-Balloon Time With Mortality in Patients Undergoing Angioplasty for Acute Myocardial Infarction. JAMA, 22(283), 2941–2947. Retrieved from doi:10.1001/jama.283.22.2941</a:t>
                       </a:r>
                     </a:p>
                     <a:p>
@@ -4526,7 +4608,7 @@
                           <a:latin typeface="TH SarabunPSK" panose="020B0500040200020003" pitchFamily="34" charset="-34"/>
                           <a:cs typeface="TH SarabunPSK" panose="020B0500040200020003" pitchFamily="34" charset="-34"/>
                         </a:rPr>
-                        <a:t>3. Sunil V. Rao, M. L. (2025). 2025 ACC/AHA/ACEP/NAEMSP/SCAI Guideline for the Management of Patients With Acute Coronary Syndromes: A Report of the American College of Cardiology/American Heart Association Joint Committee on Clinical Practice Guidelines. Circulation, 151(13).</a:t>
+                        <a:t>3. Robert Avram, William F. Fearon. (2024, 7 1). NEJM AI, 1(7). doi:10.1056/AIe2400472</a:t>
                       </a:r>
                     </a:p>
                     <a:p>
@@ -4540,7 +4622,21 @@
                           <a:latin typeface="TH SarabunPSK" panose="020B0500040200020003" pitchFamily="34" charset="-34"/>
                           <a:cs typeface="TH SarabunPSK" panose="020B0500040200020003" pitchFamily="34" charset="-34"/>
                         </a:rPr>
-                        <a:t>4. Maarten Falter, Dries </a:t>
+                        <a:t>4. Sunil V. Rao, M. L. (2025). 2025 ACC/AHA/ACEP/NAEMSP/SCAI Guideline for the Management of Patients With Acute Coronary Syndromes: A Report of the American College of Cardiology/American Heart Association Joint Committee on Clinical Practice Guidelines. Circulation, 151(13).</a:t>
+                      </a:r>
+                    </a:p>
+                    <a:p>
+                      <a:pPr marL="182880">
+                        <a:lnSpc>
+                          <a:spcPct val="100000"/>
+                        </a:lnSpc>
+                      </a:pPr>
+                      <a:r>
+                        <a:rPr lang="en-GB" sz="2400" dirty="0">
+                          <a:latin typeface="TH SarabunPSK" panose="020B0500040200020003" pitchFamily="34" charset="-34"/>
+                          <a:cs typeface="TH SarabunPSK" panose="020B0500040200020003" pitchFamily="34" charset="-34"/>
+                        </a:rPr>
+                        <a:t>5. Maarten Falter, Dries </a:t>
                       </a:r>
                       <a:r>
                         <a:rPr lang="en-GB" sz="2400" dirty="0" err="1">
@@ -4570,7 +4666,130 @@
                         </a:rPr>
                         <a:t>, et al, Using natural language processing for automated classification of disease and to identify misclassified ICD codes in cardiac disease, European Heart Journal - Digital Health, Volume 5, Issue 3, May 2024, Pages 229–234, https://doi.org/10.1093/ehjdh/ztae008</a:t>
                       </a:r>
-                      <a:endParaRPr lang="en-ZA" sz="2400" dirty="0">
+                    </a:p>
+                    <a:p>
+                      <a:pPr marL="182880">
+                        <a:lnSpc>
+                          <a:spcPct val="100000"/>
+                        </a:lnSpc>
+                      </a:pPr>
+                      <a:r>
+                        <a:rPr lang="en-GB" sz="2400" dirty="0">
+                          <a:latin typeface="TH SarabunPSK" panose="020B0500040200020003" pitchFamily="34" charset="-34"/>
+                          <a:cs typeface="TH SarabunPSK" panose="020B0500040200020003" pitchFamily="34" charset="-34"/>
+                        </a:rPr>
+                        <a:t>6. Matos, J., </a:t>
+                      </a:r>
+                      <a:r>
+                        <a:rPr lang="en-GB" sz="2400" dirty="0" err="1">
+                          <a:latin typeface="TH SarabunPSK" panose="020B0500040200020003" pitchFamily="34" charset="-34"/>
+                          <a:cs typeface="TH SarabunPSK" panose="020B0500040200020003" pitchFamily="34" charset="-34"/>
+                        </a:rPr>
+                        <a:t>Gallifant</a:t>
+                      </a:r>
+                      <a:r>
+                        <a:rPr lang="en-GB" sz="2400" dirty="0">
+                          <a:latin typeface="TH SarabunPSK" panose="020B0500040200020003" pitchFamily="34" charset="-34"/>
+                          <a:cs typeface="TH SarabunPSK" panose="020B0500040200020003" pitchFamily="34" charset="-34"/>
+                        </a:rPr>
+                        <a:t>, J., Pei, J., Wong, A.I. (2025). </a:t>
+                      </a:r>
+                      <a:r>
+                        <a:rPr lang="en-GB" sz="2400" dirty="0" err="1">
+                          <a:latin typeface="TH SarabunPSK" panose="020B0500040200020003" pitchFamily="34" charset="-34"/>
+                          <a:cs typeface="TH SarabunPSK" panose="020B0500040200020003" pitchFamily="34" charset="-34"/>
+                        </a:rPr>
+                        <a:t>EHRmonize</a:t>
+                      </a:r>
+                      <a:r>
+                        <a:rPr lang="en-GB" sz="2400" dirty="0">
+                          <a:latin typeface="TH SarabunPSK" panose="020B0500040200020003" pitchFamily="34" charset="-34"/>
+                          <a:cs typeface="TH SarabunPSK" panose="020B0500040200020003" pitchFamily="34" charset="-34"/>
+                        </a:rPr>
+                        <a:t>: A Framework for Medical Concept Abstraction from Electronic Health Records using Large Language Models. In: Wu, S., </a:t>
+                      </a:r>
+                      <a:r>
+                        <a:rPr lang="en-GB" sz="2400" dirty="0" err="1">
+                          <a:latin typeface="TH SarabunPSK" panose="020B0500040200020003" pitchFamily="34" charset="-34"/>
+                          <a:cs typeface="TH SarabunPSK" panose="020B0500040200020003" pitchFamily="34" charset="-34"/>
+                        </a:rPr>
+                        <a:t>Shabestari</a:t>
+                      </a:r>
+                      <a:r>
+                        <a:rPr lang="en-GB" sz="2400" dirty="0">
+                          <a:latin typeface="TH SarabunPSK" panose="020B0500040200020003" pitchFamily="34" charset="-34"/>
+                          <a:cs typeface="TH SarabunPSK" panose="020B0500040200020003" pitchFamily="34" charset="-34"/>
+                        </a:rPr>
+                        <a:t>, B., Xing, L. (eds) Applications of Medical Artificial Intelligence. AMAI 2024. Lecture Notes in Computer Science, vol 15384. Springer, Cham. </a:t>
+                      </a:r>
+                      <a:r>
+                        <a:rPr lang="en-GB" sz="2400" dirty="0">
+                          <a:latin typeface="TH SarabunPSK" panose="020B0500040200020003" pitchFamily="34" charset="-34"/>
+                          <a:cs typeface="TH SarabunPSK" panose="020B0500040200020003" pitchFamily="34" charset="-34"/>
+                          <a:hlinkClick r:id="rId2"/>
+                        </a:rPr>
+                        <a:t>https://doi.org/10.1007/978-3-031-82007-6_20</a:t>
+                      </a:r>
+                      <a:endParaRPr lang="en-GB" sz="2400" dirty="0">
+                        <a:latin typeface="TH SarabunPSK" panose="020B0500040200020003" pitchFamily="34" charset="-34"/>
+                        <a:cs typeface="TH SarabunPSK" panose="020B0500040200020003" pitchFamily="34" charset="-34"/>
+                      </a:endParaRPr>
+                    </a:p>
+                    <a:p>
+                      <a:pPr marL="182880">
+                        <a:lnSpc>
+                          <a:spcPct val="100000"/>
+                        </a:lnSpc>
+                      </a:pPr>
+                      <a:r>
+                        <a:rPr lang="en-GB" sz="2400" dirty="0">
+                          <a:latin typeface="TH SarabunPSK" panose="020B0500040200020003" pitchFamily="34" charset="-34"/>
+                          <a:cs typeface="TH SarabunPSK" panose="020B0500040200020003" pitchFamily="34" charset="-34"/>
+                        </a:rPr>
+                        <a:t>7. Wang, H., Zu, Q., Lu, M., Chen, R., Yang, Z., Gao, Y., &amp; Ding, J. (2022). Application of Medical Knowledge Graphs in Cardiology and Cardiovascular Medicine: A Brief Literature Review. Advances in therapy, 39(9), 4052–4060. </a:t>
+                      </a:r>
+                      <a:r>
+                        <a:rPr lang="en-GB" sz="2400" dirty="0">
+                          <a:latin typeface="TH SarabunPSK" panose="020B0500040200020003" pitchFamily="34" charset="-34"/>
+                          <a:cs typeface="TH SarabunPSK" panose="020B0500040200020003" pitchFamily="34" charset="-34"/>
+                          <a:hlinkClick r:id="rId3"/>
+                        </a:rPr>
+                        <a:t>https://doi.org/10.1007/s12325-022-02254-7</a:t>
+                      </a:r>
+                      <a:endParaRPr lang="en-GB" sz="2400" dirty="0">
+                        <a:latin typeface="TH SarabunPSK" panose="020B0500040200020003" pitchFamily="34" charset="-34"/>
+                        <a:cs typeface="TH SarabunPSK" panose="020B0500040200020003" pitchFamily="34" charset="-34"/>
+                      </a:endParaRPr>
+                    </a:p>
+                    <a:p>
+                      <a:pPr marL="182880">
+                        <a:lnSpc>
+                          <a:spcPct val="100000"/>
+                        </a:lnSpc>
+                      </a:pPr>
+                      <a:endParaRPr lang="en-GB" sz="2400" dirty="0">
+                        <a:latin typeface="TH SarabunPSK" panose="020B0500040200020003" pitchFamily="34" charset="-34"/>
+                        <a:cs typeface="TH SarabunPSK" panose="020B0500040200020003" pitchFamily="34" charset="-34"/>
+                      </a:endParaRPr>
+                    </a:p>
+                    <a:p>
+                      <a:pPr marL="182880">
+                        <a:lnSpc>
+                          <a:spcPct val="100000"/>
+                        </a:lnSpc>
+                      </a:pPr>
+                      <a:endParaRPr lang="en-GB" sz="2400" dirty="0">
+                        <a:latin typeface="TH SarabunPSK" panose="020B0500040200020003" pitchFamily="34" charset="-34"/>
+                        <a:cs typeface="TH SarabunPSK" panose="020B0500040200020003" pitchFamily="34" charset="-34"/>
+                      </a:endParaRPr>
+                    </a:p>
+                    <a:p>
+                      <a:pPr marL="182880">
+                        <a:lnSpc>
+                          <a:spcPct val="100000"/>
+                        </a:lnSpc>
+                      </a:pPr>
+                      <a:endParaRPr lang="en-GB" sz="2400" dirty="0">
                         <a:latin typeface="TH SarabunPSK" panose="020B0500040200020003" pitchFamily="34" charset="-34"/>
                         <a:cs typeface="TH SarabunPSK" panose="020B0500040200020003" pitchFamily="34" charset="-34"/>
                       </a:endParaRPr>
@@ -5758,7 +5977,7 @@
           <p:nvPr/>
         </p:nvPicPr>
         <p:blipFill>
-          <a:blip r:embed="rId2">
+          <a:blip r:embed="rId4">
             <a:extLst>
               <a:ext uri="{28A0092B-C50C-407E-A947-70E740481C1C}">
                 <a14:useLocalDpi xmlns:a14="http://schemas.microsoft.com/office/drawing/2010/main" val="0"/>
@@ -5805,7 +6024,7 @@
           <p:nvPr/>
         </p:nvPicPr>
         <p:blipFill>
-          <a:blip r:embed="rId2">
+          <a:blip r:embed="rId4">
             <a:extLst>
               <a:ext uri="{28A0092B-C50C-407E-A947-70E740481C1C}">
                 <a14:useLocalDpi xmlns:a14="http://schemas.microsoft.com/office/drawing/2010/main" val="0"/>
@@ -8716,7 +8935,7 @@
           <p:nvPr/>
         </p:nvPicPr>
         <p:blipFill>
-          <a:blip r:embed="rId3">
+          <a:blip r:embed="rId5">
             <a:extLst>
               <a:ext uri="{28A0092B-C50C-407E-A947-70E740481C1C}">
                 <a14:useLocalDpi xmlns:a14="http://schemas.microsoft.com/office/drawing/2010/main" val="0"/>

--- a/draft_poster.pptx
+++ b/draft_poster.pptx
@@ -3145,14 +3145,14 @@
           <p:nvPr>
             <p:extLst>
               <p:ext uri="{D42A27DB-BD31-4B8C-83A1-F6EECF244321}">
-                <p14:modId xmlns:p14="http://schemas.microsoft.com/office/powerpoint/2010/main" val="678381363"/>
+                <p14:modId xmlns:p14="http://schemas.microsoft.com/office/powerpoint/2010/main" val="3983248078"/>
               </p:ext>
             </p:extLst>
           </p:nvPr>
         </p:nvGraphicFramePr>
         <p:xfrm>
           <a:off x="79939" y="4419130"/>
-          <a:ext cx="10609404" cy="11612160"/>
+          <a:ext cx="10609404" cy="12099840"/>
         </p:xfrm>
         <a:graphic>
           <a:graphicData uri="http://schemas.openxmlformats.org/drawingml/2006/table">
@@ -3450,7 +3450,7 @@
                           <a:latin typeface="TH SarabunPSK" panose="020B0500040200020003" pitchFamily="34" charset="-34"/>
                           <a:cs typeface="TH SarabunPSK" panose="020B0500040200020003" pitchFamily="34" charset="-34"/>
                         </a:rPr>
-                        <a:t>. Artificial Intelligence systems have been implemented for automatic detection of ST elevated Myocardial Infarction (STEMI) from ECG</a:t>
+                        <a:t>. Artificial Intelligence systems have been implemented for automatic detection of ST elevated Myocardial Infarction (STEMI) from ECG only</a:t>
                       </a:r>
                       <a:r>
                         <a:rPr lang="en-GB" sz="3200" i="0" dirty="0">
@@ -3616,7 +3616,7 @@
                           <a:latin typeface="TH SarabunPSK" panose="020B0500040200020003" pitchFamily="34" charset="-34"/>
                           <a:cs typeface="TH SarabunPSK" panose="020B0500040200020003" pitchFamily="34" charset="-34"/>
                         </a:rPr>
-                        <a:t>.</a:t>
+                        <a:t>. We implement LLM as feature extraction tool. </a:t>
                       </a:r>
                     </a:p>
                   </a:txBody>
@@ -3671,7 +3671,7 @@
           <p:nvPr>
             <p:extLst>
               <p:ext uri="{D42A27DB-BD31-4B8C-83A1-F6EECF244321}">
-                <p14:modId xmlns:p14="http://schemas.microsoft.com/office/powerpoint/2010/main" val="3560417053"/>
+                <p14:modId xmlns:p14="http://schemas.microsoft.com/office/powerpoint/2010/main" val="1214155265"/>
               </p:ext>
             </p:extLst>
           </p:nvPr>
@@ -3931,7 +3931,7 @@
                           <a:latin typeface="TH SarabunPSK" panose="020B0500040200020003" pitchFamily="34" charset="-34"/>
                           <a:cs typeface="TH SarabunPSK" panose="020B0500040200020003" pitchFamily="34" charset="-34"/>
                         </a:rPr>
-                        <a:t>Can transformer based models predict which patients need cardiac catheterization using text-based classification methods using information in the patient Electronic Health Record ( HPI, Physical, ECG report, lab results) for patients with possible acute coronary syndromes. </a:t>
+                        <a:t>Can transformer-based models predict which patients need cardiac catheterization using text-based classification methods using information in the patient Electronic Health Record ( HPI, Physical, ECG report, lab results) for patients with possible acute coronary syndromes. </a:t>
                       </a:r>
                     </a:p>
                     <a:p>
@@ -4333,7 +4333,7 @@
           <p:nvPr>
             <p:extLst>
               <p:ext uri="{D42A27DB-BD31-4B8C-83A1-F6EECF244321}">
-                <p14:modId xmlns:p14="http://schemas.microsoft.com/office/powerpoint/2010/main" val="4097946602"/>
+                <p14:modId xmlns:p14="http://schemas.microsoft.com/office/powerpoint/2010/main" val="643947391"/>
               </p:ext>
             </p:extLst>
           </p:nvPr>
@@ -4664,7 +4664,7 @@
                           <a:latin typeface="TH SarabunPSK" panose="020B0500040200020003" pitchFamily="34" charset="-34"/>
                           <a:cs typeface="TH SarabunPSK" panose="020B0500040200020003" pitchFamily="34" charset="-34"/>
                         </a:rPr>
-                        <a:t>, et al, Using natural language processing for automated classification of disease and to identify misclassified ICD codes in cardiac disease, European Heart Journal - Digital Health, Volume 5, Issue 3, May 2024, Pages 229–234, https://doi.org/10.1093/ehjdh/ztae008</a:t>
+                        <a:t>, et al, Using natural language processing for automated classification of disease and to identify misclassified ICD codes in cardiac disease, European Heart Journal - Digital Health, Volume 5, Issue 3, 2024, Pages 229–234, https://doi.org/10.1093/ehjdh/ztae008</a:t>
                       </a:r>
                     </a:p>
                     <a:p>
@@ -6071,7 +6071,7 @@
           <p:nvPr>
             <p:extLst>
               <p:ext uri="{D42A27DB-BD31-4B8C-83A1-F6EECF244321}">
-                <p14:modId xmlns:p14="http://schemas.microsoft.com/office/powerpoint/2010/main" val="1133990102"/>
+                <p14:modId xmlns:p14="http://schemas.microsoft.com/office/powerpoint/2010/main" val="1942265932"/>
               </p:ext>
             </p:extLst>
           </p:nvPr>
@@ -7206,12 +7206,15 @@
                           <a:spcPts val="0"/>
                         </a:spcAft>
                       </a:pPr>
-                      <a:endParaRPr lang="en-US" sz="3200" kern="100" dirty="0">
-                        <a:effectLst/>
-                        <a:latin typeface="TH SarabunPSK" panose="020B0500040200020003" pitchFamily="34" charset="-34"/>
-                        <a:ea typeface="MS UI Gothic" panose="020B0600070205080204" pitchFamily="34" charset="-128"/>
-                        <a:cs typeface="TH SarabunPSK" panose="020B0500040200020003" pitchFamily="34" charset="-34"/>
-                      </a:endParaRPr>
+                      <a:r>
+                        <a:rPr lang="en-US" sz="3200" kern="100" dirty="0">
+                          <a:effectLst/>
+                          <a:latin typeface="TH SarabunPSK" panose="020B0500040200020003" pitchFamily="34" charset="-34"/>
+                          <a:ea typeface="MS UI Gothic" panose="020B0600070205080204" pitchFamily="34" charset="-128"/>
+                          <a:cs typeface="TH SarabunPSK" panose="020B0500040200020003" pitchFamily="34" charset="-34"/>
+                        </a:rPr>
+                        <a:t>0.683</a:t>
+                      </a:r>
                     </a:p>
                   </a:txBody>
                   <a:tcPr marL="68580" marR="68580" marT="0" marB="0" anchor="ctr">
@@ -7386,12 +7389,15 @@
                           <a:spcPts val="0"/>
                         </a:spcAft>
                       </a:pPr>
-                      <a:endParaRPr lang="en-US" sz="3200" kern="100" dirty="0">
-                        <a:effectLst/>
-                        <a:latin typeface="TH SarabunPSK" panose="020B0500040200020003" pitchFamily="34" charset="-34"/>
-                        <a:ea typeface="MS UI Gothic" panose="020B0600070205080204" pitchFamily="34" charset="-128"/>
-                        <a:cs typeface="TH SarabunPSK" panose="020B0500040200020003" pitchFamily="34" charset="-34"/>
-                      </a:endParaRPr>
+                      <a:r>
+                        <a:rPr lang="en-US" sz="3200" kern="100" dirty="0">
+                          <a:effectLst/>
+                          <a:latin typeface="TH SarabunPSK" panose="020B0500040200020003" pitchFamily="34" charset="-34"/>
+                          <a:ea typeface="MS UI Gothic" panose="020B0600070205080204" pitchFamily="34" charset="-128"/>
+                          <a:cs typeface="TH SarabunPSK" panose="020B0500040200020003" pitchFamily="34" charset="-34"/>
+                        </a:rPr>
+                        <a:t>0.776</a:t>
+                      </a:r>
                     </a:p>
                   </a:txBody>
                   <a:tcPr marL="68580" marR="68580" marT="0" marB="0" anchor="ctr">
@@ -7651,12 +7657,15 @@
                           <a:spcPts val="0"/>
                         </a:spcAft>
                       </a:pPr>
-                      <a:endParaRPr lang="en-US" sz="3200" kern="100" dirty="0">
-                        <a:effectLst/>
-                        <a:latin typeface="TH SarabunPSK" panose="020B0500040200020003" pitchFamily="34" charset="-34"/>
-                        <a:ea typeface="MS UI Gothic" panose="020B0600070205080204" pitchFamily="34" charset="-128"/>
-                        <a:cs typeface="TH SarabunPSK" panose="020B0500040200020003" pitchFamily="34" charset="-34"/>
-                      </a:endParaRPr>
+                      <a:r>
+                        <a:rPr lang="en-US" sz="3200" kern="100" dirty="0">
+                          <a:effectLst/>
+                          <a:latin typeface="TH SarabunPSK" panose="020B0500040200020003" pitchFamily="34" charset="-34"/>
+                          <a:ea typeface="MS UI Gothic" panose="020B0600070205080204" pitchFamily="34" charset="-128"/>
+                          <a:cs typeface="TH SarabunPSK" panose="020B0500040200020003" pitchFamily="34" charset="-34"/>
+                        </a:rPr>
+                        <a:t>0.517</a:t>
+                      </a:r>
                     </a:p>
                   </a:txBody>
                   <a:tcPr marL="68580" marR="68580" marT="0" marB="0" anchor="ctr">
@@ -7831,12 +7840,15 @@
                           <a:spcPts val="0"/>
                         </a:spcAft>
                       </a:pPr>
-                      <a:endParaRPr lang="en-US" sz="3200" kern="100" dirty="0">
-                        <a:effectLst/>
-                        <a:latin typeface="TH SarabunPSK" panose="020B0500040200020003" pitchFamily="34" charset="-34"/>
-                        <a:ea typeface="MS UI Gothic" panose="020B0600070205080204" pitchFamily="34" charset="-128"/>
-                        <a:cs typeface="TH SarabunPSK" panose="020B0500040200020003" pitchFamily="34" charset="-34"/>
-                      </a:endParaRPr>
+                      <a:r>
+                        <a:rPr lang="en-US" sz="3200" kern="100" dirty="0">
+                          <a:effectLst/>
+                          <a:latin typeface="TH SarabunPSK" panose="020B0500040200020003" pitchFamily="34" charset="-34"/>
+                          <a:ea typeface="MS UI Gothic" panose="020B0600070205080204" pitchFamily="34" charset="-128"/>
+                          <a:cs typeface="TH SarabunPSK" panose="020B0500040200020003" pitchFamily="34" charset="-34"/>
+                        </a:rPr>
+                        <a:t>0.658</a:t>
+                      </a:r>
                     </a:p>
                   </a:txBody>
                   <a:tcPr marL="68580" marR="68580" marT="0" marB="0" anchor="ctr">
@@ -8127,12 +8139,15 @@
                           <a:spcPts val="0"/>
                         </a:spcAft>
                       </a:pPr>
-                      <a:endParaRPr lang="en-US" sz="3200" kern="100" dirty="0">
-                        <a:effectLst/>
-                        <a:latin typeface="TH SarabunPSK" panose="020B0500040200020003" pitchFamily="34" charset="-34"/>
-                        <a:ea typeface="MS UI Gothic" panose="020B0600070205080204" pitchFamily="34" charset="-128"/>
-                        <a:cs typeface="TH SarabunPSK" panose="020B0500040200020003" pitchFamily="34" charset="-34"/>
-                      </a:endParaRPr>
+                      <a:r>
+                        <a:rPr lang="en-US" sz="3200" kern="100" dirty="0">
+                          <a:effectLst/>
+                          <a:latin typeface="TH SarabunPSK" panose="020B0500040200020003" pitchFamily="34" charset="-34"/>
+                          <a:ea typeface="MS UI Gothic" panose="020B0600070205080204" pitchFamily="34" charset="-128"/>
+                          <a:cs typeface="TH SarabunPSK" panose="020B0500040200020003" pitchFamily="34" charset="-34"/>
+                        </a:rPr>
+                        <a:t>0.552</a:t>
+                      </a:r>
                     </a:p>
                   </a:txBody>
                   <a:tcPr marL="68580" marR="68580" marT="0" marB="0" anchor="ctr">
@@ -8307,12 +8322,15 @@
                           <a:spcPts val="0"/>
                         </a:spcAft>
                       </a:pPr>
-                      <a:endParaRPr lang="en-US" sz="3200" kern="100" dirty="0">
-                        <a:effectLst/>
-                        <a:latin typeface="TH SarabunPSK" panose="020B0500040200020003" pitchFamily="34" charset="-34"/>
-                        <a:ea typeface="MS UI Gothic" panose="020B0600070205080204" pitchFamily="34" charset="-128"/>
-                        <a:cs typeface="TH SarabunPSK" panose="020B0500040200020003" pitchFamily="34" charset="-34"/>
-                      </a:endParaRPr>
+                      <a:r>
+                        <a:rPr lang="en-US" sz="3200" kern="100" dirty="0">
+                          <a:effectLst/>
+                          <a:latin typeface="TH SarabunPSK" panose="020B0500040200020003" pitchFamily="34" charset="-34"/>
+                          <a:ea typeface="MS UI Gothic" panose="020B0600070205080204" pitchFamily="34" charset="-128"/>
+                          <a:cs typeface="TH SarabunPSK" panose="020B0500040200020003" pitchFamily="34" charset="-34"/>
+                        </a:rPr>
+                        <a:t>0.711</a:t>
+                      </a:r>
                     </a:p>
                   </a:txBody>
                   <a:tcPr marL="68580" marR="68580" marT="0" marB="0" anchor="ctr">
@@ -8563,12 +8581,15 @@
                           <a:spcPts val="0"/>
                         </a:spcAft>
                       </a:pPr>
-                      <a:endParaRPr lang="en-US" sz="3200" kern="100" dirty="0">
-                        <a:effectLst/>
-                        <a:latin typeface="TH SarabunPSK" panose="020B0500040200020003" pitchFamily="34" charset="-34"/>
-                        <a:ea typeface="MS UI Gothic" panose="020B0600070205080204" pitchFamily="34" charset="-128"/>
-                        <a:cs typeface="TH SarabunPSK" panose="020B0500040200020003" pitchFamily="34" charset="-34"/>
-                      </a:endParaRPr>
+                      <a:r>
+                        <a:rPr lang="en-US" sz="3200" kern="100" dirty="0">
+                          <a:effectLst/>
+                          <a:latin typeface="TH SarabunPSK" panose="020B0500040200020003" pitchFamily="34" charset="-34"/>
+                          <a:ea typeface="MS UI Gothic" panose="020B0600070205080204" pitchFamily="34" charset="-128"/>
+                          <a:cs typeface="TH SarabunPSK" panose="020B0500040200020003" pitchFamily="34" charset="-34"/>
+                        </a:rPr>
+                        <a:t>0.834</a:t>
+                      </a:r>
                     </a:p>
                   </a:txBody>
                   <a:tcPr marL="68580" marR="68580" marT="0" marB="0" anchor="ctr">
@@ -8922,10 +8943,10 @@
       </p:graphicFrame>
       <p:pic>
         <p:nvPicPr>
-          <p:cNvPr id="6" name="Picture 5" descr="A graph of a number of cases&#10;&#10;AI-generated content may be incorrect.">
+          <p:cNvPr id="5" name="Picture 4" descr="A graph of different colored bars&#10;&#10;AI-generated content may be incorrect.">
             <a:extLst>
               <a:ext uri="{FF2B5EF4-FFF2-40B4-BE49-F238E27FC236}">
-                <a16:creationId xmlns:a16="http://schemas.microsoft.com/office/drawing/2014/main" id="{2C8C4FA9-43F5-AF9D-CFDC-FA2E1A58AB73}"/>
+                <a16:creationId xmlns:a16="http://schemas.microsoft.com/office/drawing/2014/main" id="{658BA87E-7890-7DB7-91E7-8EE82033E63F}"/>
               </a:ext>
             </a:extLst>
           </p:cNvPr>
@@ -8942,14 +8963,15 @@
               </a:ext>
             </a:extLst>
           </a:blip>
+          <a:srcRect l="50841" t="-1037"/>
           <a:stretch>
             <a:fillRect/>
           </a:stretch>
         </p:blipFill>
         <p:spPr>
           <a:xfrm>
-            <a:off x="10637041" y="11775311"/>
-            <a:ext cx="10534077" cy="6421804"/>
+            <a:off x="10689342" y="11624918"/>
+            <a:ext cx="10517339" cy="6836571"/>
           </a:xfrm>
           <a:prstGeom prst="rect">
             <a:avLst/>

--- a/draft_poster.pptx
+++ b/draft_poster.pptx
@@ -3145,13 +3145,13 @@
           <p:nvPr>
             <p:extLst>
               <p:ext uri="{D42A27DB-BD31-4B8C-83A1-F6EECF244321}">
-                <p14:modId xmlns:p14="http://schemas.microsoft.com/office/powerpoint/2010/main" val="3983248078"/>
+                <p14:modId xmlns:p14="http://schemas.microsoft.com/office/powerpoint/2010/main" val="1899605559"/>
               </p:ext>
             </p:extLst>
           </p:nvPr>
         </p:nvGraphicFramePr>
         <p:xfrm>
-          <a:off x="79939" y="4419130"/>
+          <a:off x="27637" y="4416386"/>
           <a:ext cx="10609404" cy="12099840"/>
         </p:xfrm>
         <a:graphic>
@@ -3526,8 +3526,19 @@
                           <a:latin typeface="TH SarabunPSK" panose="020B0500040200020003" pitchFamily="34" charset="-34"/>
                           <a:cs typeface="TH SarabunPSK" panose="020B0500040200020003" pitchFamily="34" charset="-34"/>
                         </a:rPr>
-                        <a:t>However, to decide to send the patient for emergency cardiac catheterisation it is important to consider the patient’s presenting history, ECG results and the results of lab investigations. Our research looks at using a LLM to classify text in the Electronic Health Record (EHR) which includes the History of Presenting illness (HPI), Physical Examination, ECG report and lab results (Troponin results) to automatically make the decision and send a notification to the catheterisation lab. Essentially this is a two-class medical  classification. </a:t>
-                      </a:r>
+                        <a:t>However, to decide to send the patient for emergency cardiac catheterisation it is important to consider the patient’s presenting history, ECG results and the results of lab investigations. Our research looks at using a LLM to classify text in the Electronic Health Record (EHR) which includes the History of Presenting illness (HPI), Physical Examination, ECG report and lab results (Troponin results) to automatically make the decision and send a notification to the catheterisation lab. Essentially this is a two-class medical  classification</a:t>
+                      </a:r>
+                      <a:r>
+                        <a:rPr lang="en-GB" sz="3200" i="0">
+                          <a:latin typeface="TH SarabunPSK" panose="020B0500040200020003" pitchFamily="34" charset="-34"/>
+                          <a:cs typeface="TH SarabunPSK" panose="020B0500040200020003" pitchFamily="34" charset="-34"/>
+                        </a:rPr>
+                        <a:t>. </a:t>
+                      </a:r>
+                      <a:endParaRPr lang="en-GB" sz="3200" i="0" dirty="0">
+                        <a:latin typeface="TH SarabunPSK" panose="020B0500040200020003" pitchFamily="34" charset="-34"/>
+                        <a:cs typeface="TH SarabunPSK" panose="020B0500040200020003" pitchFamily="34" charset="-34"/>
+                      </a:endParaRPr>
                     </a:p>
                     <a:p>
                       <a:pPr marL="182880">
@@ -3535,17 +3546,6 @@
                           <a:spcPct val="100000"/>
                         </a:lnSpc>
                       </a:pPr>
-                      <a:endParaRPr lang="en-GB" sz="3200" i="0" dirty="0">
-                        <a:latin typeface="TH SarabunPSK" panose="020B0500040200020003" pitchFamily="34" charset="-34"/>
-                        <a:cs typeface="TH SarabunPSK" panose="020B0500040200020003" pitchFamily="34" charset="-34"/>
-                      </a:endParaRPr>
-                    </a:p>
-                    <a:p>
-                      <a:pPr marL="182880">
-                        <a:lnSpc>
-                          <a:spcPct val="100000"/>
-                        </a:lnSpc>
-                      </a:pPr>
                       <a:r>
                         <a:rPr lang="en-GB" sz="3200" i="0" dirty="0">
                           <a:latin typeface="TH SarabunPSK" panose="020B0500040200020003" pitchFamily="34" charset="-34"/>
@@ -3568,7 +3568,7 @@
                           <a:latin typeface="TH SarabunPSK" panose="020B0500040200020003" pitchFamily="34" charset="-34"/>
                           <a:cs typeface="TH SarabunPSK" panose="020B0500040200020003" pitchFamily="34" charset="-34"/>
                         </a:rPr>
-                        <a:t> and Transformers. Recently LLMs have been shown to perform well in medical text classification</a:t>
+                        <a:t> and Transformers. BERT models were comparable to gradient boosted5. Recently LLMs have been shown to perform well in medical text classification</a:t>
                       </a:r>
                       <a:r>
                         <a:rPr lang="en-GB" sz="3200" i="0" baseline="30000" dirty="0">
@@ -3578,7 +3578,7 @@
                           <a:latin typeface="TH SarabunPSK" panose="020B0500040200020003" pitchFamily="34" charset="-34"/>
                           <a:cs typeface="TH SarabunPSK" panose="020B0500040200020003" pitchFamily="34" charset="-34"/>
                         </a:rPr>
-                        <a:t>6</a:t>
+                        <a:t>6, 8</a:t>
                       </a:r>
                       <a:r>
                         <a:rPr lang="en-GB" sz="3200" i="0" dirty="0">
@@ -3616,7 +3616,7 @@
                           <a:latin typeface="TH SarabunPSK" panose="020B0500040200020003" pitchFamily="34" charset="-34"/>
                           <a:cs typeface="TH SarabunPSK" panose="020B0500040200020003" pitchFamily="34" charset="-34"/>
                         </a:rPr>
-                        <a:t>. We implement LLM as feature extraction tool. </a:t>
+                        <a:t>. We further add an LLM as feature extraction tool. </a:t>
                       </a:r>
                     </a:p>
                   </a:txBody>
@@ -3671,21 +3671,21 @@
           <p:nvPr>
             <p:extLst>
               <p:ext uri="{D42A27DB-BD31-4B8C-83A1-F6EECF244321}">
-                <p14:modId xmlns:p14="http://schemas.microsoft.com/office/powerpoint/2010/main" val="1214155265"/>
+                <p14:modId xmlns:p14="http://schemas.microsoft.com/office/powerpoint/2010/main" val="4217342856"/>
               </p:ext>
             </p:extLst>
           </p:nvPr>
         </p:nvGraphicFramePr>
         <p:xfrm>
-          <a:off x="-16742" y="16660493"/>
-          <a:ext cx="10609404" cy="4469130"/>
+          <a:off x="39968" y="16660493"/>
+          <a:ext cx="10578254" cy="4469130"/>
         </p:xfrm>
         <a:graphic>
           <a:graphicData uri="http://schemas.openxmlformats.org/drawingml/2006/table">
             <a:tbl>
               <a:tblPr firstRow="1" bandRow="1"/>
               <a:tblGrid>
-                <a:gridCol w="10609404">
+                <a:gridCol w="10578254">
                   <a:extLst>
                     <a:ext uri="{9D8B030D-6E8A-4147-A177-3AD203B41FA5}">
                       <a16:colId xmlns:a16="http://schemas.microsoft.com/office/drawing/2014/main" val="20000"/>
@@ -4017,13 +4017,13 @@
           <p:nvPr>
             <p:extLst>
               <p:ext uri="{D42A27DB-BD31-4B8C-83A1-F6EECF244321}">
-                <p14:modId xmlns:p14="http://schemas.microsoft.com/office/powerpoint/2010/main" val="54875809"/>
+                <p14:modId xmlns:p14="http://schemas.microsoft.com/office/powerpoint/2010/main" val="1736754119"/>
               </p:ext>
             </p:extLst>
           </p:nvPr>
         </p:nvGraphicFramePr>
         <p:xfrm>
-          <a:off x="10637041" y="18533623"/>
+          <a:off x="10698163" y="18536539"/>
           <a:ext cx="10534077" cy="2221230"/>
         </p:xfrm>
         <a:graphic>
@@ -4333,7 +4333,7 @@
           <p:nvPr>
             <p:extLst>
               <p:ext uri="{D42A27DB-BD31-4B8C-83A1-F6EECF244321}">
-                <p14:modId xmlns:p14="http://schemas.microsoft.com/office/powerpoint/2010/main" val="643947391"/>
+                <p14:modId xmlns:p14="http://schemas.microsoft.com/office/powerpoint/2010/main" val="3414515328"/>
               </p:ext>
             </p:extLst>
           </p:nvPr>
@@ -4767,32 +4767,27 @@
                           <a:spcPct val="100000"/>
                         </a:lnSpc>
                       </a:pPr>
-                      <a:endParaRPr lang="en-GB" sz="2400" dirty="0">
-                        <a:latin typeface="TH SarabunPSK" panose="020B0500040200020003" pitchFamily="34" charset="-34"/>
-                        <a:cs typeface="TH SarabunPSK" panose="020B0500040200020003" pitchFamily="34" charset="-34"/>
-                      </a:endParaRPr>
-                    </a:p>
-                    <a:p>
-                      <a:pPr marL="182880">
-                        <a:lnSpc>
-                          <a:spcPct val="100000"/>
-                        </a:lnSpc>
-                      </a:pPr>
-                      <a:endParaRPr lang="en-GB" sz="2400" dirty="0">
-                        <a:latin typeface="TH SarabunPSK" panose="020B0500040200020003" pitchFamily="34" charset="-34"/>
-                        <a:cs typeface="TH SarabunPSK" panose="020B0500040200020003" pitchFamily="34" charset="-34"/>
-                      </a:endParaRPr>
-                    </a:p>
-                    <a:p>
-                      <a:pPr marL="182880">
-                        <a:lnSpc>
-                          <a:spcPct val="100000"/>
-                        </a:lnSpc>
-                      </a:pPr>
-                      <a:endParaRPr lang="en-GB" sz="2400" dirty="0">
-                        <a:latin typeface="TH SarabunPSK" panose="020B0500040200020003" pitchFamily="34" charset="-34"/>
-                        <a:cs typeface="TH SarabunPSK" panose="020B0500040200020003" pitchFamily="34" charset="-34"/>
-                      </a:endParaRPr>
+                      <a:r>
+                        <a:rPr lang="en-GB" sz="2400" dirty="0">
+                          <a:latin typeface="TH SarabunPSK" panose="020B0500040200020003" pitchFamily="34" charset="-34"/>
+                          <a:cs typeface="TH SarabunPSK" panose="020B0500040200020003" pitchFamily="34" charset="-34"/>
+                        </a:rPr>
+                        <a:t>8. E. De Santis, A. Martino, F. Ronci and A. Rizzi, "From Bag-of-Words to Transformers: A Comparative Study for Text Classification in Healthcare Discussions in Social Media," in IEEE Transactions on Emerging Topics in Computational Intelligence, vol. 9, no. 1, pp. 1063-1077, Feb. 2025, </a:t>
+                      </a:r>
+                      <a:r>
+                        <a:rPr lang="en-GB" sz="2400" dirty="0" err="1">
+                          <a:latin typeface="TH SarabunPSK" panose="020B0500040200020003" pitchFamily="34" charset="-34"/>
+                          <a:cs typeface="TH SarabunPSK" panose="020B0500040200020003" pitchFamily="34" charset="-34"/>
+                        </a:rPr>
+                        <a:t>doi</a:t>
+                      </a:r>
+                      <a:r>
+                        <a:rPr lang="en-GB" sz="2400" dirty="0">
+                          <a:latin typeface="TH SarabunPSK" panose="020B0500040200020003" pitchFamily="34" charset="-34"/>
+                          <a:cs typeface="TH SarabunPSK" panose="020B0500040200020003" pitchFamily="34" charset="-34"/>
+                        </a:rPr>
+                        <a:t>: 10.1109/TETCI.2024.3423444.</a:t>
+                      </a:r>
                     </a:p>
                   </a:txBody>
                   <a:tcPr marL="0" marR="0" marT="3810" marB="0">
@@ -8971,7 +8966,7 @@
         <p:spPr>
           <a:xfrm>
             <a:off x="10689342" y="11624918"/>
-            <a:ext cx="10517339" cy="6836571"/>
+            <a:ext cx="10542896" cy="6836571"/>
           </a:xfrm>
           <a:prstGeom prst="rect">
             <a:avLst/>
